--- a/Files/presentacion_deforestacion_mexico.pptx
+++ b/Files/presentacion_deforestacion_mexico.pptx
@@ -15,6 +15,16 @@
     <p:sldId id="263" r:id="rId9"/>
     <p:sldId id="264" r:id="rId10"/>
     <p:sldId id="265" r:id="rId11"/>
+    <p:sldId id="266" r:id="rId17"/>
+    <p:sldId id="267" r:id="rId18"/>
+    <p:sldId id="268" r:id="rId19"/>
+    <p:sldId id="269" r:id="rId20"/>
+    <p:sldId id="270" r:id="rId21"/>
+    <p:sldId id="271" r:id="rId22"/>
+    <p:sldId id="272" r:id="rId23"/>
+    <p:sldId id="273" r:id="rId24"/>
+    <p:sldId id="274" r:id="rId25"/>
+    <p:sldId id="275" r:id="rId26"/>
   </p:sldIdLst>
   <p:notesMasterIdLst>
     <p:notesMasterId r:id="rId12"/>
@@ -3428,6 +3438,8009 @@
 </p:sld>
 </file>
 
+<file path=ppt/slides/slide11.xml><?xml version="1.0" encoding="utf-8"?>
+<p:sld xmlns:a="http://schemas.openxmlformats.org/drawingml/2006/main" xmlns:p="http://schemas.openxmlformats.org/presentationml/2006/main" xmlns:r="http://schemas.openxmlformats.org/officeDocument/2006/relationships">
+  <p:cSld>
+    <p:bg>
+      <p:bgPr>
+        <a:solidFill>
+          <a:srgbClr val="F5F5F5"/>
+        </a:solidFill>
+        <a:effectLst/>
+      </p:bgPr>
+    </p:bg>
+    <p:spTree>
+      <p:nvGrpSpPr>
+        <p:cNvPr id="1" name=""/>
+        <p:cNvGrpSpPr/>
+        <p:nvPr/>
+      </p:nvGrpSpPr>
+      <p:grpSpPr/>
+      <p:sp>
+        <p:nvSpPr>
+          <p:cNvPr id="2" name="Rectangle 1"/>
+          <p:cNvSpPr/>
+          <p:nvPr/>
+        </p:nvSpPr>
+        <p:spPr>
+          <a:xfrm>
+            <a:off x="0" y="0"/>
+            <a:ext cx="9144000" cy="658368"/>
+          </a:xfrm>
+          <a:prstGeom prst="rect">
+            <a:avLst/>
+          </a:prstGeom>
+          <a:solidFill>
+            <a:srgbClr val="2E7D32"/>
+          </a:solidFill>
+          <a:ln>
+            <a:noFill/>
+          </a:ln>
+        </p:spPr>
+        <p:style>
+          <a:lnRef idx="1">
+            <a:schemeClr val="accent1"/>
+          </a:lnRef>
+          <a:fillRef idx="3">
+            <a:schemeClr val="accent1"/>
+          </a:fillRef>
+          <a:effectRef idx="2">
+            <a:schemeClr val="accent1"/>
+          </a:effectRef>
+          <a:fontRef idx="minor">
+            <a:schemeClr val="lt1"/>
+          </a:fontRef>
+        </p:style>
+        <p:txBody>
+          <a:bodyPr rtlCol="0" anchor="ctr"/>
+          <a:lstStyle/>
+          <a:p>
+            <a:pPr algn="ctr"/>
+          </a:p>
+        </p:txBody>
+      </p:sp>
+      <p:sp>
+        <p:nvSpPr>
+          <p:cNvPr id="3" name="TextBox 2"/>
+          <p:cNvSpPr txBox="1"/>
+          <p:nvPr/>
+        </p:nvSpPr>
+        <p:spPr>
+          <a:xfrm>
+            <a:off x="228600" y="73152"/>
+            <a:ext cx="7772400" cy="502920"/>
+          </a:xfrm>
+          <a:prstGeom prst="rect">
+            <a:avLst/>
+          </a:prstGeom>
+          <a:noFill/>
+        </p:spPr>
+        <p:txBody>
+          <a:bodyPr wrap="square">
+            <a:spAutoFit/>
+          </a:bodyPr>
+          <a:lstStyle/>
+          <a:p>
+            <a:pPr algn="l"/>
+            <a:r>
+              <a:rPr sz="2200" b="1" i="0">
+                <a:solidFill>
+                  <a:srgbClr val="FFFFFF"/>
+                </a:solidFill>
+              </a:rPr>
+              <a:t>BASES DE DATOS — PRODUCCIÓN PECUARIA</a:t>
+            </a:r>
+          </a:p>
+        </p:txBody>
+      </p:sp>
+      <p:sp>
+        <p:nvSpPr>
+          <p:cNvPr id="4" name="Rectangle 3"/>
+          <p:cNvSpPr/>
+          <p:nvPr/>
+        </p:nvSpPr>
+        <p:spPr>
+          <a:xfrm>
+            <a:off x="0" y="658368"/>
+            <a:ext cx="9144000" cy="36576"/>
+          </a:xfrm>
+          <a:prstGeom prst="rect">
+            <a:avLst/>
+          </a:prstGeom>
+          <a:solidFill>
+            <a:srgbClr val="E65100"/>
+          </a:solidFill>
+          <a:ln>
+            <a:noFill/>
+          </a:ln>
+        </p:spPr>
+        <p:style>
+          <a:lnRef idx="1">
+            <a:schemeClr val="accent1"/>
+          </a:lnRef>
+          <a:fillRef idx="3">
+            <a:schemeClr val="accent1"/>
+          </a:fillRef>
+          <a:effectRef idx="2">
+            <a:schemeClr val="accent1"/>
+          </a:effectRef>
+          <a:fontRef idx="minor">
+            <a:schemeClr val="lt1"/>
+          </a:fontRef>
+        </p:style>
+        <p:txBody>
+          <a:bodyPr rtlCol="0" anchor="ctr"/>
+          <a:lstStyle/>
+          <a:p>
+            <a:pPr algn="ctr"/>
+          </a:p>
+        </p:txBody>
+      </p:sp>
+      <p:sp>
+        <p:nvSpPr>
+          <p:cNvPr id="5" name="TextBox 4"/>
+          <p:cNvSpPr txBox="1"/>
+          <p:nvPr/>
+        </p:nvSpPr>
+        <p:spPr>
+          <a:xfrm>
+            <a:off x="274320" y="822960"/>
+            <a:ext cx="8229600" cy="320040"/>
+          </a:xfrm>
+          <a:prstGeom prst="rect">
+            <a:avLst/>
+          </a:prstGeom>
+          <a:noFill/>
+        </p:spPr>
+        <p:txBody>
+          <a:bodyPr wrap="square">
+            <a:spAutoFit/>
+          </a:bodyPr>
+          <a:lstStyle/>
+          <a:p>
+            <a:pPr algn="l"/>
+            <a:r>
+              <a:rPr sz="1400" b="1" i="0">
+                <a:solidFill>
+                  <a:srgbClr val="212121"/>
+                </a:solidFill>
+              </a:rPr>
+              <a:t>Nueva fuente integrada en Fase 2:</a:t>
+            </a:r>
+          </a:p>
+        </p:txBody>
+      </p:sp>
+      <p:sp>
+        <p:nvSpPr>
+          <p:cNvPr id="6" name="Rectangle 5"/>
+          <p:cNvSpPr/>
+          <p:nvPr/>
+        </p:nvSpPr>
+        <p:spPr>
+          <a:xfrm>
+            <a:off x="274320" y="1143000"/>
+            <a:ext cx="2560320" cy="475488"/>
+          </a:xfrm>
+          <a:prstGeom prst="rect">
+            <a:avLst/>
+          </a:prstGeom>
+          <a:solidFill>
+            <a:srgbClr val="2E7D32"/>
+          </a:solidFill>
+          <a:ln>
+            <a:noFill/>
+          </a:ln>
+        </p:spPr>
+        <p:style>
+          <a:lnRef idx="1">
+            <a:schemeClr val="accent1"/>
+          </a:lnRef>
+          <a:fillRef idx="3">
+            <a:schemeClr val="accent1"/>
+          </a:fillRef>
+          <a:effectRef idx="2">
+            <a:schemeClr val="accent1"/>
+          </a:effectRef>
+          <a:fontRef idx="minor">
+            <a:schemeClr val="lt1"/>
+          </a:fontRef>
+        </p:style>
+        <p:txBody>
+          <a:bodyPr rtlCol="0" anchor="ctr"/>
+          <a:lstStyle/>
+          <a:p>
+            <a:pPr algn="ctr"/>
+          </a:p>
+        </p:txBody>
+      </p:sp>
+      <p:sp>
+        <p:nvSpPr>
+          <p:cNvPr id="7" name="TextBox 6"/>
+          <p:cNvSpPr txBox="1"/>
+          <p:nvPr/>
+        </p:nvSpPr>
+        <p:spPr>
+          <a:xfrm>
+            <a:off x="320040" y="1216152"/>
+            <a:ext cx="2468880" cy="365760"/>
+          </a:xfrm>
+          <a:prstGeom prst="rect">
+            <a:avLst/>
+          </a:prstGeom>
+          <a:noFill/>
+        </p:spPr>
+        <p:txBody>
+          <a:bodyPr wrap="square">
+            <a:spAutoFit/>
+          </a:bodyPr>
+          <a:lstStyle/>
+          <a:p>
+            <a:pPr algn="l"/>
+            <a:r>
+              <a:rPr sz="1100" b="1" i="0">
+                <a:solidFill>
+                  <a:srgbClr val="FFFFFF"/>
+                </a:solidFill>
+              </a:rPr>
+              <a:t>Dataset</a:t>
+            </a:r>
+          </a:p>
+        </p:txBody>
+      </p:sp>
+      <p:sp>
+        <p:nvSpPr>
+          <p:cNvPr id="8" name="Rectangle 7"/>
+          <p:cNvSpPr/>
+          <p:nvPr/>
+        </p:nvSpPr>
+        <p:spPr>
+          <a:xfrm>
+            <a:off x="2880360" y="1143000"/>
+            <a:ext cx="5943600" cy="475488"/>
+          </a:xfrm>
+          <a:prstGeom prst="rect">
+            <a:avLst/>
+          </a:prstGeom>
+          <a:solidFill>
+            <a:srgbClr val="EEEEEE"/>
+          </a:solidFill>
+          <a:ln>
+            <a:noFill/>
+          </a:ln>
+        </p:spPr>
+        <p:style>
+          <a:lnRef idx="1">
+            <a:schemeClr val="accent1"/>
+          </a:lnRef>
+          <a:fillRef idx="3">
+            <a:schemeClr val="accent1"/>
+          </a:fillRef>
+          <a:effectRef idx="2">
+            <a:schemeClr val="accent1"/>
+          </a:effectRef>
+          <a:fontRef idx="minor">
+            <a:schemeClr val="lt1"/>
+          </a:fontRef>
+        </p:style>
+        <p:txBody>
+          <a:bodyPr rtlCol="0" anchor="ctr"/>
+          <a:lstStyle/>
+          <a:p>
+            <a:pPr algn="ctr"/>
+          </a:p>
+        </p:txBody>
+      </p:sp>
+      <p:sp>
+        <p:nvSpPr>
+          <p:cNvPr id="9" name="TextBox 8"/>
+          <p:cNvSpPr txBox="1"/>
+          <p:nvPr/>
+        </p:nvSpPr>
+        <p:spPr>
+          <a:xfrm>
+            <a:off x="2926080" y="1216152"/>
+            <a:ext cx="5852160" cy="365760"/>
+          </a:xfrm>
+          <a:prstGeom prst="rect">
+            <a:avLst/>
+          </a:prstGeom>
+          <a:noFill/>
+        </p:spPr>
+        <p:txBody>
+          <a:bodyPr wrap="square">
+            <a:spAutoFit/>
+          </a:bodyPr>
+          <a:lstStyle/>
+          <a:p>
+            <a:pPr algn="l"/>
+            <a:r>
+              <a:rPr sz="1100" b="0" i="0">
+                <a:solidFill>
+                  <a:srgbClr val="212121"/>
+                </a:solidFill>
+              </a:rPr>
+              <a:t>Producción Pecuaria — SIAP (Datos Abiertos)</a:t>
+            </a:r>
+          </a:p>
+        </p:txBody>
+      </p:sp>
+      <p:sp>
+        <p:nvSpPr>
+          <p:cNvPr id="10" name="Rectangle 9"/>
+          <p:cNvSpPr/>
+          <p:nvPr/>
+        </p:nvSpPr>
+        <p:spPr>
+          <a:xfrm>
+            <a:off x="274320" y="1691640"/>
+            <a:ext cx="2560320" cy="475488"/>
+          </a:xfrm>
+          <a:prstGeom prst="rect">
+            <a:avLst/>
+          </a:prstGeom>
+          <a:solidFill>
+            <a:srgbClr val="E65100"/>
+          </a:solidFill>
+          <a:ln>
+            <a:noFill/>
+          </a:ln>
+        </p:spPr>
+        <p:style>
+          <a:lnRef idx="1">
+            <a:schemeClr val="accent1"/>
+          </a:lnRef>
+          <a:fillRef idx="3">
+            <a:schemeClr val="accent1"/>
+          </a:fillRef>
+          <a:effectRef idx="2">
+            <a:schemeClr val="accent1"/>
+          </a:effectRef>
+          <a:fontRef idx="minor">
+            <a:schemeClr val="lt1"/>
+          </a:fontRef>
+        </p:style>
+        <p:txBody>
+          <a:bodyPr rtlCol="0" anchor="ctr"/>
+          <a:lstStyle/>
+          <a:p>
+            <a:pPr algn="ctr"/>
+          </a:p>
+        </p:txBody>
+      </p:sp>
+      <p:sp>
+        <p:nvSpPr>
+          <p:cNvPr id="11" name="TextBox 10"/>
+          <p:cNvSpPr txBox="1"/>
+          <p:nvPr/>
+        </p:nvSpPr>
+        <p:spPr>
+          <a:xfrm>
+            <a:off x="320040" y="1764792"/>
+            <a:ext cx="2468880" cy="365760"/>
+          </a:xfrm>
+          <a:prstGeom prst="rect">
+            <a:avLst/>
+          </a:prstGeom>
+          <a:noFill/>
+        </p:spPr>
+        <p:txBody>
+          <a:bodyPr wrap="square">
+            <a:spAutoFit/>
+          </a:bodyPr>
+          <a:lstStyle/>
+          <a:p>
+            <a:pPr algn="l"/>
+            <a:r>
+              <a:rPr sz="1100" b="1" i="0">
+                <a:solidFill>
+                  <a:srgbClr val="FFFFFF"/>
+                </a:solidFill>
+              </a:rPr>
+              <a:t>Cobertura temporal</a:t>
+            </a:r>
+          </a:p>
+        </p:txBody>
+      </p:sp>
+      <p:sp>
+        <p:nvSpPr>
+          <p:cNvPr id="12" name="Rectangle 11"/>
+          <p:cNvSpPr/>
+          <p:nvPr/>
+        </p:nvSpPr>
+        <p:spPr>
+          <a:xfrm>
+            <a:off x="2880360" y="1691640"/>
+            <a:ext cx="5943600" cy="475488"/>
+          </a:xfrm>
+          <a:prstGeom prst="rect">
+            <a:avLst/>
+          </a:prstGeom>
+          <a:solidFill>
+            <a:srgbClr val="EEEEEE"/>
+          </a:solidFill>
+          <a:ln>
+            <a:noFill/>
+          </a:ln>
+        </p:spPr>
+        <p:style>
+          <a:lnRef idx="1">
+            <a:schemeClr val="accent1"/>
+          </a:lnRef>
+          <a:fillRef idx="3">
+            <a:schemeClr val="accent1"/>
+          </a:fillRef>
+          <a:effectRef idx="2">
+            <a:schemeClr val="accent1"/>
+          </a:effectRef>
+          <a:fontRef idx="minor">
+            <a:schemeClr val="lt1"/>
+          </a:fontRef>
+        </p:style>
+        <p:txBody>
+          <a:bodyPr rtlCol="0" anchor="ctr"/>
+          <a:lstStyle/>
+          <a:p>
+            <a:pPr algn="ctr"/>
+          </a:p>
+        </p:txBody>
+      </p:sp>
+      <p:sp>
+        <p:nvSpPr>
+          <p:cNvPr id="13" name="TextBox 12"/>
+          <p:cNvSpPr txBox="1"/>
+          <p:nvPr/>
+        </p:nvSpPr>
+        <p:spPr>
+          <a:xfrm>
+            <a:off x="2926080" y="1764792"/>
+            <a:ext cx="5852160" cy="365760"/>
+          </a:xfrm>
+          <a:prstGeom prst="rect">
+            <a:avLst/>
+          </a:prstGeom>
+          <a:noFill/>
+        </p:spPr>
+        <p:txBody>
+          <a:bodyPr wrap="square">
+            <a:spAutoFit/>
+          </a:bodyPr>
+          <a:lstStyle/>
+          <a:p>
+            <a:pPr algn="l"/>
+            <a:r>
+              <a:rPr sz="1100" b="0" i="0">
+                <a:solidFill>
+                  <a:srgbClr val="212121"/>
+                </a:solidFill>
+              </a:rPr>
+              <a:t>2006–2022 + 2024  (2023 AUSENTE — ver Hallazgo 7)</a:t>
+            </a:r>
+          </a:p>
+        </p:txBody>
+      </p:sp>
+      <p:sp>
+        <p:nvSpPr>
+          <p:cNvPr id="14" name="Rectangle 13"/>
+          <p:cNvSpPr/>
+          <p:nvPr/>
+        </p:nvSpPr>
+        <p:spPr>
+          <a:xfrm>
+            <a:off x="274320" y="2240280"/>
+            <a:ext cx="2560320" cy="475488"/>
+          </a:xfrm>
+          <a:prstGeom prst="rect">
+            <a:avLst/>
+          </a:prstGeom>
+          <a:solidFill>
+            <a:srgbClr val="546E7A"/>
+          </a:solidFill>
+          <a:ln>
+            <a:noFill/>
+          </a:ln>
+        </p:spPr>
+        <p:style>
+          <a:lnRef idx="1">
+            <a:schemeClr val="accent1"/>
+          </a:lnRef>
+          <a:fillRef idx="3">
+            <a:schemeClr val="accent1"/>
+          </a:fillRef>
+          <a:effectRef idx="2">
+            <a:schemeClr val="accent1"/>
+          </a:effectRef>
+          <a:fontRef idx="minor">
+            <a:schemeClr val="lt1"/>
+          </a:fontRef>
+        </p:style>
+        <p:txBody>
+          <a:bodyPr rtlCol="0" anchor="ctr"/>
+          <a:lstStyle/>
+          <a:p>
+            <a:pPr algn="ctr"/>
+          </a:p>
+        </p:txBody>
+      </p:sp>
+      <p:sp>
+        <p:nvSpPr>
+          <p:cNvPr id="15" name="TextBox 14"/>
+          <p:cNvSpPr txBox="1"/>
+          <p:nvPr/>
+        </p:nvSpPr>
+        <p:spPr>
+          <a:xfrm>
+            <a:off x="320040" y="2313432"/>
+            <a:ext cx="2468880" cy="365760"/>
+          </a:xfrm>
+          <a:prstGeom prst="rect">
+            <a:avLst/>
+          </a:prstGeom>
+          <a:noFill/>
+        </p:spPr>
+        <p:txBody>
+          <a:bodyPr wrap="square">
+            <a:spAutoFit/>
+          </a:bodyPr>
+          <a:lstStyle/>
+          <a:p>
+            <a:pPr algn="l"/>
+            <a:r>
+              <a:rPr sz="1100" b="1" i="0">
+                <a:solidFill>
+                  <a:srgbClr val="FFFFFF"/>
+                </a:solidFill>
+              </a:rPr>
+              <a:t>Granularidad</a:t>
+            </a:r>
+          </a:p>
+        </p:txBody>
+      </p:sp>
+      <p:sp>
+        <p:nvSpPr>
+          <p:cNvPr id="16" name="Rectangle 15"/>
+          <p:cNvSpPr/>
+          <p:nvPr/>
+        </p:nvSpPr>
+        <p:spPr>
+          <a:xfrm>
+            <a:off x="2880360" y="2240280"/>
+            <a:ext cx="5943600" cy="475488"/>
+          </a:xfrm>
+          <a:prstGeom prst="rect">
+            <a:avLst/>
+          </a:prstGeom>
+          <a:solidFill>
+            <a:srgbClr val="EEEEEE"/>
+          </a:solidFill>
+          <a:ln>
+            <a:noFill/>
+          </a:ln>
+        </p:spPr>
+        <p:style>
+          <a:lnRef idx="1">
+            <a:schemeClr val="accent1"/>
+          </a:lnRef>
+          <a:fillRef idx="3">
+            <a:schemeClr val="accent1"/>
+          </a:fillRef>
+          <a:effectRef idx="2">
+            <a:schemeClr val="accent1"/>
+          </a:effectRef>
+          <a:fontRef idx="minor">
+            <a:schemeClr val="lt1"/>
+          </a:fontRef>
+        </p:style>
+        <p:txBody>
+          <a:bodyPr rtlCol="0" anchor="ctr"/>
+          <a:lstStyle/>
+          <a:p>
+            <a:pPr algn="ctr"/>
+          </a:p>
+        </p:txBody>
+      </p:sp>
+      <p:sp>
+        <p:nvSpPr>
+          <p:cNvPr id="17" name="TextBox 16"/>
+          <p:cNvSpPr txBox="1"/>
+          <p:nvPr/>
+        </p:nvSpPr>
+        <p:spPr>
+          <a:xfrm>
+            <a:off x="2926080" y="2313432"/>
+            <a:ext cx="5852160" cy="365760"/>
+          </a:xfrm>
+          <a:prstGeom prst="rect">
+            <a:avLst/>
+          </a:prstGeom>
+          <a:noFill/>
+        </p:spPr>
+        <p:txBody>
+          <a:bodyPr wrap="square">
+            <a:spAutoFit/>
+          </a:bodyPr>
+          <a:lstStyle/>
+          <a:p>
+            <a:pPr algn="l"/>
+            <a:r>
+              <a:rPr sz="1100" b="0" i="0">
+                <a:solidFill>
+                  <a:srgbClr val="212121"/>
+                </a:solidFill>
+              </a:rPr>
+              <a:t>Estado → Municipio × Especie × Producto</a:t>
+            </a:r>
+          </a:p>
+        </p:txBody>
+      </p:sp>
+      <p:sp>
+        <p:nvSpPr>
+          <p:cNvPr id="18" name="Rectangle 17"/>
+          <p:cNvSpPr/>
+          <p:nvPr/>
+        </p:nvSpPr>
+        <p:spPr>
+          <a:xfrm>
+            <a:off x="274320" y="2788920"/>
+            <a:ext cx="2560320" cy="475488"/>
+          </a:xfrm>
+          <a:prstGeom prst="rect">
+            <a:avLst/>
+          </a:prstGeom>
+          <a:solidFill>
+            <a:srgbClr val="1565C0"/>
+          </a:solidFill>
+          <a:ln>
+            <a:noFill/>
+          </a:ln>
+        </p:spPr>
+        <p:style>
+          <a:lnRef idx="1">
+            <a:schemeClr val="accent1"/>
+          </a:lnRef>
+          <a:fillRef idx="3">
+            <a:schemeClr val="accent1"/>
+          </a:fillRef>
+          <a:effectRef idx="2">
+            <a:schemeClr val="accent1"/>
+          </a:effectRef>
+          <a:fontRef idx="minor">
+            <a:schemeClr val="lt1"/>
+          </a:fontRef>
+        </p:style>
+        <p:txBody>
+          <a:bodyPr rtlCol="0" anchor="ctr"/>
+          <a:lstStyle/>
+          <a:p>
+            <a:pPr algn="ctr"/>
+          </a:p>
+        </p:txBody>
+      </p:sp>
+      <p:sp>
+        <p:nvSpPr>
+          <p:cNvPr id="19" name="TextBox 18"/>
+          <p:cNvSpPr txBox="1"/>
+          <p:nvPr/>
+        </p:nvSpPr>
+        <p:spPr>
+          <a:xfrm>
+            <a:off x="320040" y="2862072"/>
+            <a:ext cx="2468880" cy="365760"/>
+          </a:xfrm>
+          <a:prstGeom prst="rect">
+            <a:avLst/>
+          </a:prstGeom>
+          <a:noFill/>
+        </p:spPr>
+        <p:txBody>
+          <a:bodyPr wrap="square">
+            <a:spAutoFit/>
+          </a:bodyPr>
+          <a:lstStyle/>
+          <a:p>
+            <a:pPr algn="l"/>
+            <a:r>
+              <a:rPr sz="1100" b="1" i="0">
+                <a:solidFill>
+                  <a:srgbClr val="FFFFFF"/>
+                </a:solidFill>
+              </a:rPr>
+              <a:t>Especies</a:t>
+            </a:r>
+          </a:p>
+        </p:txBody>
+      </p:sp>
+      <p:sp>
+        <p:nvSpPr>
+          <p:cNvPr id="20" name="Rectangle 19"/>
+          <p:cNvSpPr/>
+          <p:nvPr/>
+        </p:nvSpPr>
+        <p:spPr>
+          <a:xfrm>
+            <a:off x="2880360" y="2788920"/>
+            <a:ext cx="5943600" cy="475488"/>
+          </a:xfrm>
+          <a:prstGeom prst="rect">
+            <a:avLst/>
+          </a:prstGeom>
+          <a:solidFill>
+            <a:srgbClr val="EEEEEE"/>
+          </a:solidFill>
+          <a:ln>
+            <a:noFill/>
+          </a:ln>
+        </p:spPr>
+        <p:style>
+          <a:lnRef idx="1">
+            <a:schemeClr val="accent1"/>
+          </a:lnRef>
+          <a:fillRef idx="3">
+            <a:schemeClr val="accent1"/>
+          </a:fillRef>
+          <a:effectRef idx="2">
+            <a:schemeClr val="accent1"/>
+          </a:effectRef>
+          <a:fontRef idx="minor">
+            <a:schemeClr val="lt1"/>
+          </a:fontRef>
+        </p:style>
+        <p:txBody>
+          <a:bodyPr rtlCol="0" anchor="ctr"/>
+          <a:lstStyle/>
+          <a:p>
+            <a:pPr algn="ctr"/>
+          </a:p>
+        </p:txBody>
+      </p:sp>
+      <p:sp>
+        <p:nvSpPr>
+          <p:cNvPr id="21" name="TextBox 20"/>
+          <p:cNvSpPr txBox="1"/>
+          <p:nvPr/>
+        </p:nvSpPr>
+        <p:spPr>
+          <a:xfrm>
+            <a:off x="2926080" y="2862072"/>
+            <a:ext cx="5852160" cy="365760"/>
+          </a:xfrm>
+          <a:prstGeom prst="rect">
+            <a:avLst/>
+          </a:prstGeom>
+          <a:noFill/>
+        </p:spPr>
+        <p:txBody>
+          <a:bodyPr wrap="square">
+            <a:spAutoFit/>
+          </a:bodyPr>
+          <a:lstStyle/>
+          <a:p>
+            <a:pPr algn="l"/>
+            <a:r>
+              <a:rPr sz="1100" b="0" i="0">
+                <a:solidFill>
+                  <a:srgbClr val="212121"/>
+                </a:solidFill>
+              </a:rPr>
+              <a:t>Bovino · Porcino · Ave · Ovino · Caprino · Guajolote · Abeja</a:t>
+            </a:r>
+          </a:p>
+        </p:txBody>
+      </p:sp>
+      <p:sp>
+        <p:nvSpPr>
+          <p:cNvPr id="22" name="Rectangle 21"/>
+          <p:cNvSpPr/>
+          <p:nvPr/>
+        </p:nvSpPr>
+        <p:spPr>
+          <a:xfrm>
+            <a:off x="274320" y="3337560"/>
+            <a:ext cx="2560320" cy="475488"/>
+          </a:xfrm>
+          <a:prstGeom prst="rect">
+            <a:avLst/>
+          </a:prstGeom>
+          <a:solidFill>
+            <a:srgbClr val="795548"/>
+          </a:solidFill>
+          <a:ln>
+            <a:noFill/>
+          </a:ln>
+        </p:spPr>
+        <p:style>
+          <a:lnRef idx="1">
+            <a:schemeClr val="accent1"/>
+          </a:lnRef>
+          <a:fillRef idx="3">
+            <a:schemeClr val="accent1"/>
+          </a:fillRef>
+          <a:effectRef idx="2">
+            <a:schemeClr val="accent1"/>
+          </a:effectRef>
+          <a:fontRef idx="minor">
+            <a:schemeClr val="lt1"/>
+          </a:fontRef>
+        </p:style>
+        <p:txBody>
+          <a:bodyPr rtlCol="0" anchor="ctr"/>
+          <a:lstStyle/>
+          <a:p>
+            <a:pPr algn="ctr"/>
+          </a:p>
+        </p:txBody>
+      </p:sp>
+      <p:sp>
+        <p:nvSpPr>
+          <p:cNvPr id="23" name="TextBox 22"/>
+          <p:cNvSpPr txBox="1"/>
+          <p:nvPr/>
+        </p:nvSpPr>
+        <p:spPr>
+          <a:xfrm>
+            <a:off x="320040" y="3410712"/>
+            <a:ext cx="2468880" cy="365760"/>
+          </a:xfrm>
+          <a:prstGeom prst="rect">
+            <a:avLst/>
+          </a:prstGeom>
+          <a:noFill/>
+        </p:spPr>
+        <p:txBody>
+          <a:bodyPr wrap="square">
+            <a:spAutoFit/>
+          </a:bodyPr>
+          <a:lstStyle/>
+          <a:p>
+            <a:pPr algn="l"/>
+            <a:r>
+              <a:rPr sz="1100" b="1" i="0">
+                <a:solidFill>
+                  <a:srgbClr val="FFFFFF"/>
+                </a:solidFill>
+              </a:rPr>
+              <a:t>Variables clave</a:t>
+            </a:r>
+          </a:p>
+        </p:txBody>
+      </p:sp>
+      <p:sp>
+        <p:nvSpPr>
+          <p:cNvPr id="24" name="Rectangle 23"/>
+          <p:cNvSpPr/>
+          <p:nvPr/>
+        </p:nvSpPr>
+        <p:spPr>
+          <a:xfrm>
+            <a:off x="2880360" y="3337560"/>
+            <a:ext cx="5943600" cy="475488"/>
+          </a:xfrm>
+          <a:prstGeom prst="rect">
+            <a:avLst/>
+          </a:prstGeom>
+          <a:solidFill>
+            <a:srgbClr val="EEEEEE"/>
+          </a:solidFill>
+          <a:ln>
+            <a:noFill/>
+          </a:ln>
+        </p:spPr>
+        <p:style>
+          <a:lnRef idx="1">
+            <a:schemeClr val="accent1"/>
+          </a:lnRef>
+          <a:fillRef idx="3">
+            <a:schemeClr val="accent1"/>
+          </a:fillRef>
+          <a:effectRef idx="2">
+            <a:schemeClr val="accent1"/>
+          </a:effectRef>
+          <a:fontRef idx="minor">
+            <a:schemeClr val="lt1"/>
+          </a:fontRef>
+        </p:style>
+        <p:txBody>
+          <a:bodyPr rtlCol="0" anchor="ctr"/>
+          <a:lstStyle/>
+          <a:p>
+            <a:pPr algn="ctr"/>
+          </a:p>
+        </p:txBody>
+      </p:sp>
+      <p:sp>
+        <p:nvSpPr>
+          <p:cNvPr id="25" name="TextBox 24"/>
+          <p:cNvSpPr txBox="1"/>
+          <p:nvPr/>
+        </p:nvSpPr>
+        <p:spPr>
+          <a:xfrm>
+            <a:off x="2926080" y="3410712"/>
+            <a:ext cx="5852160" cy="365760"/>
+          </a:xfrm>
+          <a:prstGeom prst="rect">
+            <a:avLst/>
+          </a:prstGeom>
+          <a:noFill/>
+        </p:spPr>
+        <p:txBody>
+          <a:bodyPr wrap="square">
+            <a:spAutoFit/>
+          </a:bodyPr>
+          <a:lstStyle/>
+          <a:p>
+            <a:pPr algn="l"/>
+            <a:r>
+              <a:rPr sz="1100" b="0" i="0">
+                <a:solidFill>
+                  <a:srgbClr val="212121"/>
+                </a:solidFill>
+              </a:rPr>
+              <a:t>Volumen (ton) · Cabezas sacrificadas · Valor (MXN) · Precio</a:t>
+            </a:r>
+          </a:p>
+        </p:txBody>
+      </p:sp>
+      <p:sp>
+        <p:nvSpPr>
+          <p:cNvPr id="26" name="Rectangle 25"/>
+          <p:cNvSpPr/>
+          <p:nvPr/>
+        </p:nvSpPr>
+        <p:spPr>
+          <a:xfrm>
+            <a:off x="274320" y="3886200"/>
+            <a:ext cx="2560320" cy="475488"/>
+          </a:xfrm>
+          <a:prstGeom prst="rect">
+            <a:avLst/>
+          </a:prstGeom>
+          <a:solidFill>
+            <a:srgbClr val="6A1B9A"/>
+          </a:solidFill>
+          <a:ln>
+            <a:noFill/>
+          </a:ln>
+        </p:spPr>
+        <p:style>
+          <a:lnRef idx="1">
+            <a:schemeClr val="accent1"/>
+          </a:lnRef>
+          <a:fillRef idx="3">
+            <a:schemeClr val="accent1"/>
+          </a:fillRef>
+          <a:effectRef idx="2">
+            <a:schemeClr val="accent1"/>
+          </a:effectRef>
+          <a:fontRef idx="minor">
+            <a:schemeClr val="lt1"/>
+          </a:fontRef>
+        </p:style>
+        <p:txBody>
+          <a:bodyPr rtlCol="0" anchor="ctr"/>
+          <a:lstStyle/>
+          <a:p>
+            <a:pPr algn="ctr"/>
+          </a:p>
+        </p:txBody>
+      </p:sp>
+      <p:sp>
+        <p:nvSpPr>
+          <p:cNvPr id="27" name="TextBox 26"/>
+          <p:cNvSpPr txBox="1"/>
+          <p:nvPr/>
+        </p:nvSpPr>
+        <p:spPr>
+          <a:xfrm>
+            <a:off x="320040" y="3959352"/>
+            <a:ext cx="2468880" cy="365760"/>
+          </a:xfrm>
+          <a:prstGeom prst="rect">
+            <a:avLst/>
+          </a:prstGeom>
+          <a:noFill/>
+        </p:spPr>
+        <p:txBody>
+          <a:bodyPr wrap="square">
+            <a:spAutoFit/>
+          </a:bodyPr>
+          <a:lstStyle/>
+          <a:p>
+            <a:pPr algn="l"/>
+            <a:r>
+              <a:rPr sz="1100" b="1" i="0">
+                <a:solidFill>
+                  <a:srgbClr val="FFFFFF"/>
+                </a:solidFill>
+              </a:rPr>
+              <a:t>Registros totales</a:t>
+            </a:r>
+          </a:p>
+        </p:txBody>
+      </p:sp>
+      <p:sp>
+        <p:nvSpPr>
+          <p:cNvPr id="28" name="Rectangle 27"/>
+          <p:cNvSpPr/>
+          <p:nvPr/>
+        </p:nvSpPr>
+        <p:spPr>
+          <a:xfrm>
+            <a:off x="2880360" y="3886200"/>
+            <a:ext cx="5943600" cy="475488"/>
+          </a:xfrm>
+          <a:prstGeom prst="rect">
+            <a:avLst/>
+          </a:prstGeom>
+          <a:solidFill>
+            <a:srgbClr val="EEEEEE"/>
+          </a:solidFill>
+          <a:ln>
+            <a:noFill/>
+          </a:ln>
+        </p:spPr>
+        <p:style>
+          <a:lnRef idx="1">
+            <a:schemeClr val="accent1"/>
+          </a:lnRef>
+          <a:fillRef idx="3">
+            <a:schemeClr val="accent1"/>
+          </a:fillRef>
+          <a:effectRef idx="2">
+            <a:schemeClr val="accent1"/>
+          </a:effectRef>
+          <a:fontRef idx="minor">
+            <a:schemeClr val="lt1"/>
+          </a:fontRef>
+        </p:style>
+        <p:txBody>
+          <a:bodyPr rtlCol="0" anchor="ctr"/>
+          <a:lstStyle/>
+          <a:p>
+            <a:pPr algn="ctr"/>
+          </a:p>
+        </p:txBody>
+      </p:sp>
+      <p:sp>
+        <p:nvSpPr>
+          <p:cNvPr id="29" name="TextBox 28"/>
+          <p:cNvSpPr txBox="1"/>
+          <p:nvPr/>
+        </p:nvSpPr>
+        <p:spPr>
+          <a:xfrm>
+            <a:off x="2926080" y="3959352"/>
+            <a:ext cx="5852160" cy="365760"/>
+          </a:xfrm>
+          <a:prstGeom prst="rect">
+            <a:avLst/>
+          </a:prstGeom>
+          <a:noFill/>
+        </p:spPr>
+        <p:txBody>
+          <a:bodyPr wrap="square">
+            <a:spAutoFit/>
+          </a:bodyPr>
+          <a:lstStyle/>
+          <a:p>
+            <a:pPr algn="l"/>
+            <a:r>
+              <a:rPr sz="1100" b="0" i="0">
+                <a:solidFill>
+                  <a:srgbClr val="212121"/>
+                </a:solidFill>
+              </a:rPr>
+              <a:t>~497,000 filas en 18 archivos CSV</a:t>
+            </a:r>
+          </a:p>
+        </p:txBody>
+      </p:sp>
+      <p:sp>
+        <p:nvSpPr>
+          <p:cNvPr id="30" name="Rectangle 29"/>
+          <p:cNvSpPr/>
+          <p:nvPr/>
+        </p:nvSpPr>
+        <p:spPr>
+          <a:xfrm>
+            <a:off x="274320" y="4320540"/>
+            <a:ext cx="8595360" cy="475488"/>
+          </a:xfrm>
+          <a:prstGeom prst="rect">
+            <a:avLst/>
+          </a:prstGeom>
+          <a:solidFill>
+            <a:srgbClr val="FFEBEE"/>
+          </a:solidFill>
+          <a:ln>
+            <a:noFill/>
+          </a:ln>
+        </p:spPr>
+        <p:style>
+          <a:lnRef idx="1">
+            <a:schemeClr val="accent1"/>
+          </a:lnRef>
+          <a:fillRef idx="3">
+            <a:schemeClr val="accent1"/>
+          </a:fillRef>
+          <a:effectRef idx="2">
+            <a:schemeClr val="accent1"/>
+          </a:effectRef>
+          <a:fontRef idx="minor">
+            <a:schemeClr val="lt1"/>
+          </a:fontRef>
+        </p:style>
+        <p:txBody>
+          <a:bodyPr rtlCol="0" anchor="ctr"/>
+          <a:lstStyle/>
+          <a:p>
+            <a:pPr algn="ctr"/>
+          </a:p>
+        </p:txBody>
+      </p:sp>
+      <p:sp>
+        <p:nvSpPr>
+          <p:cNvPr id="31" name="TextBox 30"/>
+          <p:cNvSpPr txBox="1"/>
+          <p:nvPr/>
+        </p:nvSpPr>
+        <p:spPr>
+          <a:xfrm>
+            <a:off x="365760" y="4338828"/>
+            <a:ext cx="8412480" cy="411480"/>
+          </a:xfrm>
+          <a:prstGeom prst="rect">
+            <a:avLst/>
+          </a:prstGeom>
+          <a:noFill/>
+        </p:spPr>
+        <p:txBody>
+          <a:bodyPr wrap="square">
+            <a:spAutoFit/>
+          </a:bodyPr>
+          <a:lstStyle/>
+          <a:p>
+            <a:pPr algn="l"/>
+            <a:r>
+              <a:rPr sz="1000" b="0" i="0">
+                <a:solidFill>
+                  <a:srgbClr val="B71C1C"/>
+                </a:solidFill>
+              </a:rPr>
+              <a:t>⚠  El gobierno omitió 2023 de los datos abiertos ganaderos — un año con deforestación récord según GFW (241k ha). El dato ausente es una hipótesis en sí mismo.</a:t>
+            </a:r>
+          </a:p>
+        </p:txBody>
+      </p:sp>
+      <p:sp>
+        <p:nvSpPr>
+          <p:cNvPr id="32" name="Rectangle 31"/>
+          <p:cNvSpPr/>
+          <p:nvPr/>
+        </p:nvSpPr>
+        <p:spPr>
+          <a:xfrm>
+            <a:off x="0" y="4887468"/>
+            <a:ext cx="9144000" cy="256032"/>
+          </a:xfrm>
+          <a:prstGeom prst="rect">
+            <a:avLst/>
+          </a:prstGeom>
+          <a:solidFill>
+            <a:srgbClr val="2E7D32"/>
+          </a:solidFill>
+          <a:ln>
+            <a:noFill/>
+          </a:ln>
+        </p:spPr>
+        <p:style>
+          <a:lnRef idx="1">
+            <a:schemeClr val="accent1"/>
+          </a:lnRef>
+          <a:fillRef idx="3">
+            <a:schemeClr val="accent1"/>
+          </a:fillRef>
+          <a:effectRef idx="2">
+            <a:schemeClr val="accent1"/>
+          </a:effectRef>
+          <a:fontRef idx="minor">
+            <a:schemeClr val="lt1"/>
+          </a:fontRef>
+        </p:style>
+        <p:txBody>
+          <a:bodyPr rtlCol="0" anchor="ctr"/>
+          <a:lstStyle/>
+          <a:p>
+            <a:pPr algn="ctr"/>
+          </a:p>
+        </p:txBody>
+      </p:sp>
+      <p:sp>
+        <p:nvSpPr>
+          <p:cNvPr id="33" name="TextBox 32"/>
+          <p:cNvSpPr txBox="1"/>
+          <p:nvPr/>
+        </p:nvSpPr>
+        <p:spPr>
+          <a:xfrm>
+            <a:off x="182880" y="4905756"/>
+            <a:ext cx="7315200" cy="219456"/>
+          </a:xfrm>
+          <a:prstGeom prst="rect">
+            <a:avLst/>
+          </a:prstGeom>
+          <a:noFill/>
+        </p:spPr>
+        <p:txBody>
+          <a:bodyPr wrap="square">
+            <a:spAutoFit/>
+          </a:bodyPr>
+          <a:lstStyle/>
+          <a:p>
+            <a:pPr algn="l"/>
+            <a:r>
+              <a:rPr sz="900" b="0" i="0">
+                <a:solidFill>
+                  <a:srgbClr val="FFFFFF"/>
+                </a:solidFill>
+              </a:rPr>
+              <a:t>Deforestación México · Ciencias de Datos · UP</a:t>
+            </a:r>
+          </a:p>
+        </p:txBody>
+      </p:sp>
+      <p:sp>
+        <p:nvSpPr>
+          <p:cNvPr id="34" name="TextBox 33"/>
+          <p:cNvSpPr txBox="1"/>
+          <p:nvPr/>
+        </p:nvSpPr>
+        <p:spPr>
+          <a:xfrm>
+            <a:off x="8595360" y="4905756"/>
+            <a:ext cx="365760" cy="219456"/>
+          </a:xfrm>
+          <a:prstGeom prst="rect">
+            <a:avLst/>
+          </a:prstGeom>
+          <a:noFill/>
+        </p:spPr>
+        <p:txBody>
+          <a:bodyPr wrap="square">
+            <a:spAutoFit/>
+          </a:bodyPr>
+          <a:lstStyle/>
+          <a:p>
+            <a:pPr algn="r"/>
+            <a:r>
+              <a:rPr sz="900" b="0" i="0">
+                <a:solidFill>
+                  <a:srgbClr val="FFFFFF"/>
+                </a:solidFill>
+              </a:rPr>
+              <a:t>11</a:t>
+            </a:r>
+          </a:p>
+        </p:txBody>
+      </p:sp>
+    </p:spTree>
+  </p:cSld>
+  <p:clrMapOvr>
+    <a:masterClrMapping/>
+  </p:clrMapOvr>
+</p:sld>
+</file>
+
+<file path=ppt/slides/slide12.xml><?xml version="1.0" encoding="utf-8"?>
+<p:sld xmlns:a="http://schemas.openxmlformats.org/drawingml/2006/main" xmlns:p="http://schemas.openxmlformats.org/presentationml/2006/main" xmlns:r="http://schemas.openxmlformats.org/officeDocument/2006/relationships">
+  <p:cSld>
+    <p:bg>
+      <p:bgPr>
+        <a:solidFill>
+          <a:srgbClr val="F5F5F5"/>
+        </a:solidFill>
+        <a:effectLst/>
+      </p:bgPr>
+    </p:bg>
+    <p:spTree>
+      <p:nvGrpSpPr>
+        <p:cNvPr id="1" name=""/>
+        <p:cNvGrpSpPr/>
+        <p:nvPr/>
+      </p:nvGrpSpPr>
+      <p:grpSpPr/>
+      <p:sp>
+        <p:nvSpPr>
+          <p:cNvPr id="2" name="Rectangle 1"/>
+          <p:cNvSpPr/>
+          <p:nvPr/>
+        </p:nvSpPr>
+        <p:spPr>
+          <a:xfrm>
+            <a:off x="0" y="0"/>
+            <a:ext cx="9144000" cy="658368"/>
+          </a:xfrm>
+          <a:prstGeom prst="rect">
+            <a:avLst/>
+          </a:prstGeom>
+          <a:solidFill>
+            <a:srgbClr val="2E7D32"/>
+          </a:solidFill>
+          <a:ln>
+            <a:noFill/>
+          </a:ln>
+        </p:spPr>
+        <p:style>
+          <a:lnRef idx="1">
+            <a:schemeClr val="accent1"/>
+          </a:lnRef>
+          <a:fillRef idx="3">
+            <a:schemeClr val="accent1"/>
+          </a:fillRef>
+          <a:effectRef idx="2">
+            <a:schemeClr val="accent1"/>
+          </a:effectRef>
+          <a:fontRef idx="minor">
+            <a:schemeClr val="lt1"/>
+          </a:fontRef>
+        </p:style>
+        <p:txBody>
+          <a:bodyPr rtlCol="0" anchor="ctr"/>
+          <a:lstStyle/>
+          <a:p>
+            <a:pPr algn="ctr"/>
+          </a:p>
+        </p:txBody>
+      </p:sp>
+      <p:sp>
+        <p:nvSpPr>
+          <p:cNvPr id="3" name="TextBox 2"/>
+          <p:cNvSpPr txBox="1"/>
+          <p:nvPr/>
+        </p:nvSpPr>
+        <p:spPr>
+          <a:xfrm>
+            <a:off x="228600" y="73152"/>
+            <a:ext cx="7772400" cy="502920"/>
+          </a:xfrm>
+          <a:prstGeom prst="rect">
+            <a:avLst/>
+          </a:prstGeom>
+          <a:noFill/>
+        </p:spPr>
+        <p:txBody>
+          <a:bodyPr wrap="square">
+            <a:spAutoFit/>
+          </a:bodyPr>
+          <a:lstStyle/>
+          <a:p>
+            <a:pPr algn="l"/>
+            <a:r>
+              <a:rPr sz="2200" b="1" i="0">
+                <a:solidFill>
+                  <a:srgbClr val="FFFFFF"/>
+                </a:solidFill>
+              </a:rPr>
+              <a:t>ETAPA DE FILTRADO Y PREPROCESAMIENTO</a:t>
+            </a:r>
+          </a:p>
+        </p:txBody>
+      </p:sp>
+      <p:sp>
+        <p:nvSpPr>
+          <p:cNvPr id="4" name="Rectangle 3"/>
+          <p:cNvSpPr/>
+          <p:nvPr/>
+        </p:nvSpPr>
+        <p:spPr>
+          <a:xfrm>
+            <a:off x="0" y="658368"/>
+            <a:ext cx="9144000" cy="36576"/>
+          </a:xfrm>
+          <a:prstGeom prst="rect">
+            <a:avLst/>
+          </a:prstGeom>
+          <a:solidFill>
+            <a:srgbClr val="1565C0"/>
+          </a:solidFill>
+          <a:ln>
+            <a:noFill/>
+          </a:ln>
+        </p:spPr>
+        <p:style>
+          <a:lnRef idx="1">
+            <a:schemeClr val="accent1"/>
+          </a:lnRef>
+          <a:fillRef idx="3">
+            <a:schemeClr val="accent1"/>
+          </a:fillRef>
+          <a:effectRef idx="2">
+            <a:schemeClr val="accent1"/>
+          </a:effectRef>
+          <a:fontRef idx="minor">
+            <a:schemeClr val="lt1"/>
+          </a:fontRef>
+        </p:style>
+        <p:txBody>
+          <a:bodyPr rtlCol="0" anchor="ctr"/>
+          <a:lstStyle/>
+          <a:p>
+            <a:pPr algn="ctr"/>
+          </a:p>
+        </p:txBody>
+      </p:sp>
+      <p:sp>
+        <p:nvSpPr>
+          <p:cNvPr id="5" name="Rectangle 4"/>
+          <p:cNvSpPr/>
+          <p:nvPr/>
+        </p:nvSpPr>
+        <p:spPr>
+          <a:xfrm>
+            <a:off x="182880" y="777240"/>
+            <a:ext cx="2834640" cy="365760"/>
+          </a:xfrm>
+          <a:prstGeom prst="rect">
+            <a:avLst/>
+          </a:prstGeom>
+          <a:solidFill>
+            <a:srgbClr val="1565C0"/>
+          </a:solidFill>
+          <a:ln>
+            <a:noFill/>
+          </a:ln>
+        </p:spPr>
+        <p:style>
+          <a:lnRef idx="1">
+            <a:schemeClr val="accent1"/>
+          </a:lnRef>
+          <a:fillRef idx="3">
+            <a:schemeClr val="accent1"/>
+          </a:fillRef>
+          <a:effectRef idx="2">
+            <a:schemeClr val="accent1"/>
+          </a:effectRef>
+          <a:fontRef idx="minor">
+            <a:schemeClr val="lt1"/>
+          </a:fontRef>
+        </p:style>
+        <p:txBody>
+          <a:bodyPr rtlCol="0" anchor="ctr"/>
+          <a:lstStyle/>
+          <a:p>
+            <a:pPr algn="ctr"/>
+          </a:p>
+        </p:txBody>
+      </p:sp>
+      <p:sp>
+        <p:nvSpPr>
+          <p:cNvPr id="6" name="TextBox 5"/>
+          <p:cNvSpPr txBox="1"/>
+          <p:nvPr/>
+        </p:nvSpPr>
+        <p:spPr>
+          <a:xfrm>
+            <a:off x="256032" y="795528"/>
+            <a:ext cx="2651760" cy="329184"/>
+          </a:xfrm>
+          <a:prstGeom prst="rect">
+            <a:avLst/>
+          </a:prstGeom>
+          <a:noFill/>
+        </p:spPr>
+        <p:txBody>
+          <a:bodyPr wrap="square">
+            <a:spAutoFit/>
+          </a:bodyPr>
+          <a:lstStyle/>
+          <a:p>
+            <a:pPr algn="l"/>
+            <a:r>
+              <a:rPr sz="1200" b="1" i="0">
+                <a:solidFill>
+                  <a:srgbClr val="FFFFFF"/>
+                </a:solidFill>
+              </a:rPr>
+              <a:t>Decisiones de filtrado</a:t>
+            </a:r>
+          </a:p>
+        </p:txBody>
+      </p:sp>
+      <p:sp>
+        <p:nvSpPr>
+          <p:cNvPr id="7" name="Rectangle 6"/>
+          <p:cNvSpPr/>
+          <p:nvPr/>
+        </p:nvSpPr>
+        <p:spPr>
+          <a:xfrm>
+            <a:off x="256032" y="1234440"/>
+            <a:ext cx="73152" cy="411480"/>
+          </a:xfrm>
+          <a:prstGeom prst="rect">
+            <a:avLst/>
+          </a:prstGeom>
+          <a:solidFill>
+            <a:srgbClr val="1565C0"/>
+          </a:solidFill>
+          <a:ln>
+            <a:noFill/>
+          </a:ln>
+        </p:spPr>
+        <p:style>
+          <a:lnRef idx="1">
+            <a:schemeClr val="accent1"/>
+          </a:lnRef>
+          <a:fillRef idx="3">
+            <a:schemeClr val="accent1"/>
+          </a:fillRef>
+          <a:effectRef idx="2">
+            <a:schemeClr val="accent1"/>
+          </a:effectRef>
+          <a:fontRef idx="minor">
+            <a:schemeClr val="lt1"/>
+          </a:fontRef>
+        </p:style>
+        <p:txBody>
+          <a:bodyPr rtlCol="0" anchor="ctr"/>
+          <a:lstStyle/>
+          <a:p>
+            <a:pPr algn="ctr"/>
+          </a:p>
+        </p:txBody>
+      </p:sp>
+      <p:sp>
+        <p:nvSpPr>
+          <p:cNvPr id="8" name="TextBox 7"/>
+          <p:cNvSpPr txBox="1"/>
+          <p:nvPr/>
+        </p:nvSpPr>
+        <p:spPr>
+          <a:xfrm>
+            <a:off x="384048" y="1234440"/>
+            <a:ext cx="2560320" cy="594360"/>
+          </a:xfrm>
+          <a:prstGeom prst="rect">
+            <a:avLst/>
+          </a:prstGeom>
+          <a:noFill/>
+        </p:spPr>
+        <p:txBody>
+          <a:bodyPr wrap="square">
+            <a:spAutoFit/>
+          </a:bodyPr>
+          <a:lstStyle/>
+          <a:p>
+            <a:pPr algn="l"/>
+            <a:r>
+              <a:rPr sz="1000" b="0" i="0">
+                <a:solidFill>
+                  <a:srgbClr val="212121"/>
+                </a:solidFill>
+              </a:rPr>
+              <a:t>Umbral GFW = 30%: estándar para bosques tropicales densos</a:t>
+            </a:r>
+          </a:p>
+        </p:txBody>
+      </p:sp>
+      <p:sp>
+        <p:nvSpPr>
+          <p:cNvPr id="9" name="Rectangle 8"/>
+          <p:cNvSpPr/>
+          <p:nvPr/>
+        </p:nvSpPr>
+        <p:spPr>
+          <a:xfrm>
+            <a:off x="256032" y="1874520"/>
+            <a:ext cx="73152" cy="411480"/>
+          </a:xfrm>
+          <a:prstGeom prst="rect">
+            <a:avLst/>
+          </a:prstGeom>
+          <a:solidFill>
+            <a:srgbClr val="1565C0"/>
+          </a:solidFill>
+          <a:ln>
+            <a:noFill/>
+          </a:ln>
+        </p:spPr>
+        <p:style>
+          <a:lnRef idx="1">
+            <a:schemeClr val="accent1"/>
+          </a:lnRef>
+          <a:fillRef idx="3">
+            <a:schemeClr val="accent1"/>
+          </a:fillRef>
+          <a:effectRef idx="2">
+            <a:schemeClr val="accent1"/>
+          </a:effectRef>
+          <a:fontRef idx="minor">
+            <a:schemeClr val="lt1"/>
+          </a:fontRef>
+        </p:style>
+        <p:txBody>
+          <a:bodyPr rtlCol="0" anchor="ctr"/>
+          <a:lstStyle/>
+          <a:p>
+            <a:pPr algn="ctr"/>
+          </a:p>
+        </p:txBody>
+      </p:sp>
+      <p:sp>
+        <p:nvSpPr>
+          <p:cNvPr id="10" name="TextBox 9"/>
+          <p:cNvSpPr txBox="1"/>
+          <p:nvPr/>
+        </p:nvSpPr>
+        <p:spPr>
+          <a:xfrm>
+            <a:off x="384048" y="1874520"/>
+            <a:ext cx="2560320" cy="594360"/>
+          </a:xfrm>
+          <a:prstGeom prst="rect">
+            <a:avLst/>
+          </a:prstGeom>
+          <a:noFill/>
+        </p:spPr>
+        <p:txBody>
+          <a:bodyPr wrap="square">
+            <a:spAutoFit/>
+          </a:bodyPr>
+          <a:lstStyle/>
+          <a:p>
+            <a:pPr algn="l"/>
+            <a:r>
+              <a:rPr sz="1000" b="0" i="0">
+                <a:solidFill>
+                  <a:srgbClr val="212121"/>
+                </a:solidFill>
+              </a:rPr>
+              <a:t>Enfoque en Bovino/Carne: driver primario de deforestación tropical</a:t>
+            </a:r>
+          </a:p>
+        </p:txBody>
+      </p:sp>
+      <p:sp>
+        <p:nvSpPr>
+          <p:cNvPr id="11" name="Rectangle 10"/>
+          <p:cNvSpPr/>
+          <p:nvPr/>
+        </p:nvSpPr>
+        <p:spPr>
+          <a:xfrm>
+            <a:off x="256032" y="2514600"/>
+            <a:ext cx="73152" cy="411480"/>
+          </a:xfrm>
+          <a:prstGeom prst="rect">
+            <a:avLst/>
+          </a:prstGeom>
+          <a:solidFill>
+            <a:srgbClr val="1565C0"/>
+          </a:solidFill>
+          <a:ln>
+            <a:noFill/>
+          </a:ln>
+        </p:spPr>
+        <p:style>
+          <a:lnRef idx="1">
+            <a:schemeClr val="accent1"/>
+          </a:lnRef>
+          <a:fillRef idx="3">
+            <a:schemeClr val="accent1"/>
+          </a:fillRef>
+          <a:effectRef idx="2">
+            <a:schemeClr val="accent1"/>
+          </a:effectRef>
+          <a:fontRef idx="minor">
+            <a:schemeClr val="lt1"/>
+          </a:fontRef>
+        </p:style>
+        <p:txBody>
+          <a:bodyPr rtlCol="0" anchor="ctr"/>
+          <a:lstStyle/>
+          <a:p>
+            <a:pPr algn="ctr"/>
+          </a:p>
+        </p:txBody>
+      </p:sp>
+      <p:sp>
+        <p:nvSpPr>
+          <p:cNvPr id="12" name="TextBox 11"/>
+          <p:cNvSpPr txBox="1"/>
+          <p:nvPr/>
+        </p:nvSpPr>
+        <p:spPr>
+          <a:xfrm>
+            <a:off x="384048" y="2514600"/>
+            <a:ext cx="2560320" cy="594360"/>
+          </a:xfrm>
+          <a:prstGeom prst="rect">
+            <a:avLst/>
+          </a:prstGeom>
+          <a:noFill/>
+        </p:spPr>
+        <p:txBody>
+          <a:bodyPr wrap="square">
+            <a:spAutoFit/>
+          </a:bodyPr>
+          <a:lstStyle/>
+          <a:p>
+            <a:pPr algn="l"/>
+            <a:r>
+              <a:rPr sz="1000" b="0" i="0">
+                <a:solidFill>
+                  <a:srgbClr val="212121"/>
+                </a:solidFill>
+              </a:rPr>
+              <a:t>Ventana 2006–2022: período con los 3 datasets completos</a:t>
+            </a:r>
+          </a:p>
+        </p:txBody>
+      </p:sp>
+      <p:sp>
+        <p:nvSpPr>
+          <p:cNvPr id="13" name="Rectangle 12"/>
+          <p:cNvSpPr/>
+          <p:nvPr/>
+        </p:nvSpPr>
+        <p:spPr>
+          <a:xfrm>
+            <a:off x="256032" y="3154680"/>
+            <a:ext cx="73152" cy="411480"/>
+          </a:xfrm>
+          <a:prstGeom prst="rect">
+            <a:avLst/>
+          </a:prstGeom>
+          <a:solidFill>
+            <a:srgbClr val="1565C0"/>
+          </a:solidFill>
+          <a:ln>
+            <a:noFill/>
+          </a:ln>
+        </p:spPr>
+        <p:style>
+          <a:lnRef idx="1">
+            <a:schemeClr val="accent1"/>
+          </a:lnRef>
+          <a:fillRef idx="3">
+            <a:schemeClr val="accent1"/>
+          </a:fillRef>
+          <a:effectRef idx="2">
+            <a:schemeClr val="accent1"/>
+          </a:effectRef>
+          <a:fontRef idx="minor">
+            <a:schemeClr val="lt1"/>
+          </a:fontRef>
+        </p:style>
+        <p:txBody>
+          <a:bodyPr rtlCol="0" anchor="ctr"/>
+          <a:lstStyle/>
+          <a:p>
+            <a:pPr algn="ctr"/>
+          </a:p>
+        </p:txBody>
+      </p:sp>
+      <p:sp>
+        <p:nvSpPr>
+          <p:cNvPr id="14" name="TextBox 13"/>
+          <p:cNvSpPr txBox="1"/>
+          <p:nvPr/>
+        </p:nvSpPr>
+        <p:spPr>
+          <a:xfrm>
+            <a:off x="384048" y="3154680"/>
+            <a:ext cx="2560320" cy="594360"/>
+          </a:xfrm>
+          <a:prstGeom prst="rect">
+            <a:avLst/>
+          </a:prstGeom>
+          <a:noFill/>
+        </p:spPr>
+        <p:txBody>
+          <a:bodyPr wrap="square">
+            <a:spAutoFit/>
+          </a:bodyPr>
+          <a:lstStyle/>
+          <a:p>
+            <a:pPr algn="l"/>
+            <a:r>
+              <a:rPr sz="1000" b="0" i="0">
+                <a:solidFill>
+                  <a:srgbClr val="212121"/>
+                </a:solidFill>
+              </a:rPr>
+              <a:t>Eliminar duplicado "Ciudad de México / D.F." en ganadería</a:t>
+            </a:r>
+          </a:p>
+        </p:txBody>
+      </p:sp>
+      <p:sp>
+        <p:nvSpPr>
+          <p:cNvPr id="15" name="Rectangle 14"/>
+          <p:cNvSpPr/>
+          <p:nvPr/>
+        </p:nvSpPr>
+        <p:spPr>
+          <a:xfrm>
+            <a:off x="256032" y="3794760"/>
+            <a:ext cx="73152" cy="411480"/>
+          </a:xfrm>
+          <a:prstGeom prst="rect">
+            <a:avLst/>
+          </a:prstGeom>
+          <a:solidFill>
+            <a:srgbClr val="1565C0"/>
+          </a:solidFill>
+          <a:ln>
+            <a:noFill/>
+          </a:ln>
+        </p:spPr>
+        <p:style>
+          <a:lnRef idx="1">
+            <a:schemeClr val="accent1"/>
+          </a:lnRef>
+          <a:fillRef idx="3">
+            <a:schemeClr val="accent1"/>
+          </a:fillRef>
+          <a:effectRef idx="2">
+            <a:schemeClr val="accent1"/>
+          </a:effectRef>
+          <a:fontRef idx="minor">
+            <a:schemeClr val="lt1"/>
+          </a:fontRef>
+        </p:style>
+        <p:txBody>
+          <a:bodyPr rtlCol="0" anchor="ctr"/>
+          <a:lstStyle/>
+          <a:p>
+            <a:pPr algn="ctr"/>
+          </a:p>
+        </p:txBody>
+      </p:sp>
+      <p:sp>
+        <p:nvSpPr>
+          <p:cNvPr id="16" name="TextBox 15"/>
+          <p:cNvSpPr txBox="1"/>
+          <p:nvPr/>
+        </p:nvSpPr>
+        <p:spPr>
+          <a:xfrm>
+            <a:off x="384048" y="3794760"/>
+            <a:ext cx="2560320" cy="594360"/>
+          </a:xfrm>
+          <a:prstGeom prst="rect">
+            <a:avLst/>
+          </a:prstGeom>
+          <a:noFill/>
+        </p:spPr>
+        <p:txBody>
+          <a:bodyPr wrap="square">
+            <a:spAutoFit/>
+          </a:bodyPr>
+          <a:lstStyle/>
+          <a:p>
+            <a:pPr algn="l"/>
+            <a:r>
+              <a:rPr sz="1000" b="0" i="0">
+                <a:solidFill>
+                  <a:srgbClr val="212121"/>
+                </a:solidFill>
+              </a:rPr>
+              <a:t>Solo estados con ≥5 años de datos continuos en panel</a:t>
+            </a:r>
+          </a:p>
+        </p:txBody>
+      </p:sp>
+      <p:sp>
+        <p:nvSpPr>
+          <p:cNvPr id="17" name="Rectangle 16"/>
+          <p:cNvSpPr/>
+          <p:nvPr/>
+        </p:nvSpPr>
+        <p:spPr>
+          <a:xfrm>
+            <a:off x="3200400" y="777240"/>
+            <a:ext cx="2834640" cy="365760"/>
+          </a:xfrm>
+          <a:prstGeom prst="rect">
+            <a:avLst/>
+          </a:prstGeom>
+          <a:solidFill>
+            <a:srgbClr val="2E7D32"/>
+          </a:solidFill>
+          <a:ln>
+            <a:noFill/>
+          </a:ln>
+        </p:spPr>
+        <p:style>
+          <a:lnRef idx="1">
+            <a:schemeClr val="accent1"/>
+          </a:lnRef>
+          <a:fillRef idx="3">
+            <a:schemeClr val="accent1"/>
+          </a:fillRef>
+          <a:effectRef idx="2">
+            <a:schemeClr val="accent1"/>
+          </a:effectRef>
+          <a:fontRef idx="minor">
+            <a:schemeClr val="lt1"/>
+          </a:fontRef>
+        </p:style>
+        <p:txBody>
+          <a:bodyPr rtlCol="0" anchor="ctr"/>
+          <a:lstStyle/>
+          <a:p>
+            <a:pPr algn="ctr"/>
+          </a:p>
+        </p:txBody>
+      </p:sp>
+      <p:sp>
+        <p:nvSpPr>
+          <p:cNvPr id="18" name="TextBox 17"/>
+          <p:cNvSpPr txBox="1"/>
+          <p:nvPr/>
+        </p:nvSpPr>
+        <p:spPr>
+          <a:xfrm>
+            <a:off x="3273552" y="795528"/>
+            <a:ext cx="2651760" cy="329184"/>
+          </a:xfrm>
+          <a:prstGeom prst="rect">
+            <a:avLst/>
+          </a:prstGeom>
+          <a:noFill/>
+        </p:spPr>
+        <p:txBody>
+          <a:bodyPr wrap="square">
+            <a:spAutoFit/>
+          </a:bodyPr>
+          <a:lstStyle/>
+          <a:p>
+            <a:pPr algn="l"/>
+            <a:r>
+              <a:rPr sz="1200" b="1" i="0">
+                <a:solidFill>
+                  <a:srgbClr val="FFFFFF"/>
+                </a:solidFill>
+              </a:rPr>
+              <a:t>Eliminación de ruido</a:t>
+            </a:r>
+          </a:p>
+        </p:txBody>
+      </p:sp>
+      <p:sp>
+        <p:nvSpPr>
+          <p:cNvPr id="19" name="Rectangle 18"/>
+          <p:cNvSpPr/>
+          <p:nvPr/>
+        </p:nvSpPr>
+        <p:spPr>
+          <a:xfrm>
+            <a:off x="3273552" y="1234440"/>
+            <a:ext cx="73152" cy="411480"/>
+          </a:xfrm>
+          <a:prstGeom prst="rect">
+            <a:avLst/>
+          </a:prstGeom>
+          <a:solidFill>
+            <a:srgbClr val="2E7D32"/>
+          </a:solidFill>
+          <a:ln>
+            <a:noFill/>
+          </a:ln>
+        </p:spPr>
+        <p:style>
+          <a:lnRef idx="1">
+            <a:schemeClr val="accent1"/>
+          </a:lnRef>
+          <a:fillRef idx="3">
+            <a:schemeClr val="accent1"/>
+          </a:fillRef>
+          <a:effectRef idx="2">
+            <a:schemeClr val="accent1"/>
+          </a:effectRef>
+          <a:fontRef idx="minor">
+            <a:schemeClr val="lt1"/>
+          </a:fontRef>
+        </p:style>
+        <p:txBody>
+          <a:bodyPr rtlCol="0" anchor="ctr"/>
+          <a:lstStyle/>
+          <a:p>
+            <a:pPr algn="ctr"/>
+          </a:p>
+        </p:txBody>
+      </p:sp>
+      <p:sp>
+        <p:nvSpPr>
+          <p:cNvPr id="20" name="TextBox 19"/>
+          <p:cNvSpPr txBox="1"/>
+          <p:nvPr/>
+        </p:nvSpPr>
+        <p:spPr>
+          <a:xfrm>
+            <a:off x="3401568" y="1234440"/>
+            <a:ext cx="2560320" cy="594360"/>
+          </a:xfrm>
+          <a:prstGeom prst="rect">
+            <a:avLst/>
+          </a:prstGeom>
+          <a:noFill/>
+        </p:spPr>
+        <p:txBody>
+          <a:bodyPr wrap="square">
+            <a:spAutoFit/>
+          </a:bodyPr>
+          <a:lstStyle/>
+          <a:p>
+            <a:pPr algn="l"/>
+            <a:r>
+              <a:rPr sz="1000" b="0" i="0">
+                <a:solidFill>
+                  <a:srgbClr val="212121"/>
+                </a:solidFill>
+              </a:rPr>
+              <a:t>Rolling mean 3 años sobre serie nacional</a:t>
+            </a:r>
+          </a:p>
+        </p:txBody>
+      </p:sp>
+      <p:sp>
+        <p:nvSpPr>
+          <p:cNvPr id="21" name="Rectangle 20"/>
+          <p:cNvSpPr/>
+          <p:nvPr/>
+        </p:nvSpPr>
+        <p:spPr>
+          <a:xfrm>
+            <a:off x="3273552" y="1874520"/>
+            <a:ext cx="73152" cy="411480"/>
+          </a:xfrm>
+          <a:prstGeom prst="rect">
+            <a:avLst/>
+          </a:prstGeom>
+          <a:solidFill>
+            <a:srgbClr val="2E7D32"/>
+          </a:solidFill>
+          <a:ln>
+            <a:noFill/>
+          </a:ln>
+        </p:spPr>
+        <p:style>
+          <a:lnRef idx="1">
+            <a:schemeClr val="accent1"/>
+          </a:lnRef>
+          <a:fillRef idx="3">
+            <a:schemeClr val="accent1"/>
+          </a:fillRef>
+          <a:effectRef idx="2">
+            <a:schemeClr val="accent1"/>
+          </a:effectRef>
+          <a:fontRef idx="minor">
+            <a:schemeClr val="lt1"/>
+          </a:fontRef>
+        </p:style>
+        <p:txBody>
+          <a:bodyPr rtlCol="0" anchor="ctr"/>
+          <a:lstStyle/>
+          <a:p>
+            <a:pPr algn="ctr"/>
+          </a:p>
+        </p:txBody>
+      </p:sp>
+      <p:sp>
+        <p:nvSpPr>
+          <p:cNvPr id="22" name="TextBox 21"/>
+          <p:cNvSpPr txBox="1"/>
+          <p:nvPr/>
+        </p:nvSpPr>
+        <p:spPr>
+          <a:xfrm>
+            <a:off x="3401568" y="1874520"/>
+            <a:ext cx="2560320" cy="594360"/>
+          </a:xfrm>
+          <a:prstGeom prst="rect">
+            <a:avLst/>
+          </a:prstGeom>
+          <a:noFill/>
+        </p:spPr>
+        <p:txBody>
+          <a:bodyPr wrap="square">
+            <a:spAutoFit/>
+          </a:bodyPr>
+          <a:lstStyle/>
+          <a:p>
+            <a:pPr algn="l"/>
+            <a:r>
+              <a:rPr sz="1000" b="0" i="0">
+                <a:solidFill>
+                  <a:srgbClr val="212121"/>
+                </a:solidFill>
+              </a:rPr>
+              <a:t>Separa tendencia de variabilidad climática anual</a:t>
+            </a:r>
+          </a:p>
+        </p:txBody>
+      </p:sp>
+      <p:sp>
+        <p:nvSpPr>
+          <p:cNvPr id="23" name="Rectangle 22"/>
+          <p:cNvSpPr/>
+          <p:nvPr/>
+        </p:nvSpPr>
+        <p:spPr>
+          <a:xfrm>
+            <a:off x="3273552" y="2514600"/>
+            <a:ext cx="73152" cy="411480"/>
+          </a:xfrm>
+          <a:prstGeom prst="rect">
+            <a:avLst/>
+          </a:prstGeom>
+          <a:solidFill>
+            <a:srgbClr val="2E7D32"/>
+          </a:solidFill>
+          <a:ln>
+            <a:noFill/>
+          </a:ln>
+        </p:spPr>
+        <p:style>
+          <a:lnRef idx="1">
+            <a:schemeClr val="accent1"/>
+          </a:lnRef>
+          <a:fillRef idx="3">
+            <a:schemeClr val="accent1"/>
+          </a:fillRef>
+          <a:effectRef idx="2">
+            <a:schemeClr val="accent1"/>
+          </a:effectRef>
+          <a:fontRef idx="minor">
+            <a:schemeClr val="lt1"/>
+          </a:fontRef>
+        </p:style>
+        <p:txBody>
+          <a:bodyPr rtlCol="0" anchor="ctr"/>
+          <a:lstStyle/>
+          <a:p>
+            <a:pPr algn="ctr"/>
+          </a:p>
+        </p:txBody>
+      </p:sp>
+      <p:sp>
+        <p:nvSpPr>
+          <p:cNvPr id="24" name="TextBox 23"/>
+          <p:cNvSpPr txBox="1"/>
+          <p:nvPr/>
+        </p:nvSpPr>
+        <p:spPr>
+          <a:xfrm>
+            <a:off x="3401568" y="2514600"/>
+            <a:ext cx="2560320" cy="594360"/>
+          </a:xfrm>
+          <a:prstGeom prst="rect">
+            <a:avLst/>
+          </a:prstGeom>
+          <a:noFill/>
+        </p:spPr>
+        <p:txBody>
+          <a:bodyPr wrap="square">
+            <a:spAutoFit/>
+          </a:bodyPr>
+          <a:lstStyle/>
+          <a:p>
+            <a:pPr algn="l"/>
+            <a:r>
+              <a:rPr sz="1000" b="0" i="0">
+                <a:solidFill>
+                  <a:srgbClr val="212121"/>
+                </a:solidFill>
+              </a:rPr>
+              <a:t>Permite identificar cambios estructurales vs. anomalías</a:t>
+            </a:r>
+          </a:p>
+        </p:txBody>
+      </p:sp>
+      <p:sp>
+        <p:nvSpPr>
+          <p:cNvPr id="25" name="Rectangle 24"/>
+          <p:cNvSpPr/>
+          <p:nvPr/>
+        </p:nvSpPr>
+        <p:spPr>
+          <a:xfrm>
+            <a:off x="6217920" y="777240"/>
+            <a:ext cx="2834640" cy="365760"/>
+          </a:xfrm>
+          <a:prstGeom prst="rect">
+            <a:avLst/>
+          </a:prstGeom>
+          <a:solidFill>
+            <a:srgbClr val="E65100"/>
+          </a:solidFill>
+          <a:ln>
+            <a:noFill/>
+          </a:ln>
+        </p:spPr>
+        <p:style>
+          <a:lnRef idx="1">
+            <a:schemeClr val="accent1"/>
+          </a:lnRef>
+          <a:fillRef idx="3">
+            <a:schemeClr val="accent1"/>
+          </a:fillRef>
+          <a:effectRef idx="2">
+            <a:schemeClr val="accent1"/>
+          </a:effectRef>
+          <a:fontRef idx="minor">
+            <a:schemeClr val="lt1"/>
+          </a:fontRef>
+        </p:style>
+        <p:txBody>
+          <a:bodyPr rtlCol="0" anchor="ctr"/>
+          <a:lstStyle/>
+          <a:p>
+            <a:pPr algn="ctr"/>
+          </a:p>
+        </p:txBody>
+      </p:sp>
+      <p:sp>
+        <p:nvSpPr>
+          <p:cNvPr id="26" name="TextBox 25"/>
+          <p:cNvSpPr txBox="1"/>
+          <p:nvPr/>
+        </p:nvSpPr>
+        <p:spPr>
+          <a:xfrm>
+            <a:off x="6291072" y="795528"/>
+            <a:ext cx="2651760" cy="329184"/>
+          </a:xfrm>
+          <a:prstGeom prst="rect">
+            <a:avLst/>
+          </a:prstGeom>
+          <a:noFill/>
+        </p:spPr>
+        <p:txBody>
+          <a:bodyPr wrap="square">
+            <a:spAutoFit/>
+          </a:bodyPr>
+          <a:lstStyle/>
+          <a:p>
+            <a:pPr algn="l"/>
+            <a:r>
+              <a:rPr sz="1200" b="1" i="0">
+                <a:solidFill>
+                  <a:srgbClr val="FFFFFF"/>
+                </a:solidFill>
+              </a:rPr>
+              <a:t>Normalización</a:t>
+            </a:r>
+          </a:p>
+        </p:txBody>
+      </p:sp>
+      <p:sp>
+        <p:nvSpPr>
+          <p:cNvPr id="27" name="Rectangle 26"/>
+          <p:cNvSpPr/>
+          <p:nvPr/>
+        </p:nvSpPr>
+        <p:spPr>
+          <a:xfrm>
+            <a:off x="6291072" y="1234440"/>
+            <a:ext cx="73152" cy="411480"/>
+          </a:xfrm>
+          <a:prstGeom prst="rect">
+            <a:avLst/>
+          </a:prstGeom>
+          <a:solidFill>
+            <a:srgbClr val="E65100"/>
+          </a:solidFill>
+          <a:ln>
+            <a:noFill/>
+          </a:ln>
+        </p:spPr>
+        <p:style>
+          <a:lnRef idx="1">
+            <a:schemeClr val="accent1"/>
+          </a:lnRef>
+          <a:fillRef idx="3">
+            <a:schemeClr val="accent1"/>
+          </a:fillRef>
+          <a:effectRef idx="2">
+            <a:schemeClr val="accent1"/>
+          </a:effectRef>
+          <a:fontRef idx="minor">
+            <a:schemeClr val="lt1"/>
+          </a:fontRef>
+        </p:style>
+        <p:txBody>
+          <a:bodyPr rtlCol="0" anchor="ctr"/>
+          <a:lstStyle/>
+          <a:p>
+            <a:pPr algn="ctr"/>
+          </a:p>
+        </p:txBody>
+      </p:sp>
+      <p:sp>
+        <p:nvSpPr>
+          <p:cNvPr id="28" name="TextBox 27"/>
+          <p:cNvSpPr txBox="1"/>
+          <p:nvPr/>
+        </p:nvSpPr>
+        <p:spPr>
+          <a:xfrm>
+            <a:off x="6419088" y="1234440"/>
+            <a:ext cx="2560320" cy="594360"/>
+          </a:xfrm>
+          <a:prstGeom prst="rect">
+            <a:avLst/>
+          </a:prstGeom>
+          <a:noFill/>
+        </p:spPr>
+        <p:txBody>
+          <a:bodyPr wrap="square">
+            <a:spAutoFit/>
+          </a:bodyPr>
+          <a:lstStyle/>
+          <a:p>
+            <a:pPr algn="l"/>
+            <a:r>
+              <a:rPr sz="1000" b="0" i="0">
+                <a:solidFill>
+                  <a:srgbClr val="212121"/>
+                </a:solidFill>
+              </a:rPr>
+              <a:t>Normalización de nombres de estados para merge</a:t>
+            </a:r>
+          </a:p>
+        </p:txBody>
+      </p:sp>
+      <p:sp>
+        <p:nvSpPr>
+          <p:cNvPr id="29" name="Rectangle 28"/>
+          <p:cNvSpPr/>
+          <p:nvPr/>
+        </p:nvSpPr>
+        <p:spPr>
+          <a:xfrm>
+            <a:off x="6291072" y="1874520"/>
+            <a:ext cx="73152" cy="411480"/>
+          </a:xfrm>
+          <a:prstGeom prst="rect">
+            <a:avLst/>
+          </a:prstGeom>
+          <a:solidFill>
+            <a:srgbClr val="E65100"/>
+          </a:solidFill>
+          <a:ln>
+            <a:noFill/>
+          </a:ln>
+        </p:spPr>
+        <p:style>
+          <a:lnRef idx="1">
+            <a:schemeClr val="accent1"/>
+          </a:lnRef>
+          <a:fillRef idx="3">
+            <a:schemeClr val="accent1"/>
+          </a:fillRef>
+          <a:effectRef idx="2">
+            <a:schemeClr val="accent1"/>
+          </a:effectRef>
+          <a:fontRef idx="minor">
+            <a:schemeClr val="lt1"/>
+          </a:fontRef>
+        </p:style>
+        <p:txBody>
+          <a:bodyPr rtlCol="0" anchor="ctr"/>
+          <a:lstStyle/>
+          <a:p>
+            <a:pPr algn="ctr"/>
+          </a:p>
+        </p:txBody>
+      </p:sp>
+      <p:sp>
+        <p:nvSpPr>
+          <p:cNvPr id="30" name="TextBox 29"/>
+          <p:cNvSpPr txBox="1"/>
+          <p:nvPr/>
+        </p:nvSpPr>
+        <p:spPr>
+          <a:xfrm>
+            <a:off x="6419088" y="1874520"/>
+            <a:ext cx="2560320" cy="594360"/>
+          </a:xfrm>
+          <a:prstGeom prst="rect">
+            <a:avLst/>
+          </a:prstGeom>
+          <a:noFill/>
+        </p:spPr>
+        <p:txBody>
+          <a:bodyPr wrap="square">
+            <a:spAutoFit/>
+          </a:bodyPr>
+          <a:lstStyle/>
+          <a:p>
+            <a:pPr algn="l"/>
+            <a:r>
+              <a:rPr sz="1000" b="0" i="0">
+                <a:solidFill>
+                  <a:srgbClr val="212121"/>
+                </a:solidFill>
+              </a:rPr>
+              <a:t>Eliminación de acentos y espacios extra</a:t>
+            </a:r>
+          </a:p>
+        </p:txBody>
+      </p:sp>
+      <p:sp>
+        <p:nvSpPr>
+          <p:cNvPr id="31" name="Rectangle 30"/>
+          <p:cNvSpPr/>
+          <p:nvPr/>
+        </p:nvSpPr>
+        <p:spPr>
+          <a:xfrm>
+            <a:off x="6291072" y="2514600"/>
+            <a:ext cx="73152" cy="411480"/>
+          </a:xfrm>
+          <a:prstGeom prst="rect">
+            <a:avLst/>
+          </a:prstGeom>
+          <a:solidFill>
+            <a:srgbClr val="E65100"/>
+          </a:solidFill>
+          <a:ln>
+            <a:noFill/>
+          </a:ln>
+        </p:spPr>
+        <p:style>
+          <a:lnRef idx="1">
+            <a:schemeClr val="accent1"/>
+          </a:lnRef>
+          <a:fillRef idx="3">
+            <a:schemeClr val="accent1"/>
+          </a:fillRef>
+          <a:effectRef idx="2">
+            <a:schemeClr val="accent1"/>
+          </a:effectRef>
+          <a:fontRef idx="minor">
+            <a:schemeClr val="lt1"/>
+          </a:fontRef>
+        </p:style>
+        <p:txBody>
+          <a:bodyPr rtlCol="0" anchor="ctr"/>
+          <a:lstStyle/>
+          <a:p>
+            <a:pPr algn="ctr"/>
+          </a:p>
+        </p:txBody>
+      </p:sp>
+      <p:sp>
+        <p:nvSpPr>
+          <p:cNvPr id="32" name="TextBox 31"/>
+          <p:cNvSpPr txBox="1"/>
+          <p:nvPr/>
+        </p:nvSpPr>
+        <p:spPr>
+          <a:xfrm>
+            <a:off x="6419088" y="2514600"/>
+            <a:ext cx="2560320" cy="594360"/>
+          </a:xfrm>
+          <a:prstGeom prst="rect">
+            <a:avLst/>
+          </a:prstGeom>
+          <a:noFill/>
+        </p:spPr>
+        <p:txBody>
+          <a:bodyPr wrap="square">
+            <a:spAutoFit/>
+          </a:bodyPr>
+          <a:lstStyle/>
+          <a:p>
+            <a:pPr algn="l"/>
+            <a:r>
+              <a:rPr sz="1000" b="0" i="0">
+                <a:solidFill>
+                  <a:srgbClr val="212121"/>
+                </a:solidFill>
+              </a:rPr>
+              <a:t>StandardScaler para reducción dimensional</a:t>
+            </a:r>
+          </a:p>
+        </p:txBody>
+      </p:sp>
+      <p:sp>
+        <p:nvSpPr>
+          <p:cNvPr id="33" name="Rectangle 32"/>
+          <p:cNvSpPr/>
+          <p:nvPr/>
+        </p:nvSpPr>
+        <p:spPr>
+          <a:xfrm>
+            <a:off x="6291072" y="3154680"/>
+            <a:ext cx="73152" cy="411480"/>
+          </a:xfrm>
+          <a:prstGeom prst="rect">
+            <a:avLst/>
+          </a:prstGeom>
+          <a:solidFill>
+            <a:srgbClr val="E65100"/>
+          </a:solidFill>
+          <a:ln>
+            <a:noFill/>
+          </a:ln>
+        </p:spPr>
+        <p:style>
+          <a:lnRef idx="1">
+            <a:schemeClr val="accent1"/>
+          </a:lnRef>
+          <a:fillRef idx="3">
+            <a:schemeClr val="accent1"/>
+          </a:fillRef>
+          <a:effectRef idx="2">
+            <a:schemeClr val="accent1"/>
+          </a:effectRef>
+          <a:fontRef idx="minor">
+            <a:schemeClr val="lt1"/>
+          </a:fontRef>
+        </p:style>
+        <p:txBody>
+          <a:bodyPr rtlCol="0" anchor="ctr"/>
+          <a:lstStyle/>
+          <a:p>
+            <a:pPr algn="ctr"/>
+          </a:p>
+        </p:txBody>
+      </p:sp>
+      <p:sp>
+        <p:nvSpPr>
+          <p:cNvPr id="34" name="TextBox 33"/>
+          <p:cNvSpPr txBox="1"/>
+          <p:nvPr/>
+        </p:nvSpPr>
+        <p:spPr>
+          <a:xfrm>
+            <a:off x="6419088" y="3154680"/>
+            <a:ext cx="2560320" cy="594360"/>
+          </a:xfrm>
+          <a:prstGeom prst="rect">
+            <a:avLst/>
+          </a:prstGeom>
+          <a:noFill/>
+        </p:spPr>
+        <p:txBody>
+          <a:bodyPr wrap="square">
+            <a:spAutoFit/>
+          </a:bodyPr>
+          <a:lstStyle/>
+          <a:p>
+            <a:pPr algn="l"/>
+            <a:r>
+              <a:rPr sz="1000" b="0" i="0">
+                <a:solidFill>
+                  <a:srgbClr val="212121"/>
+                </a:solidFill>
+              </a:rPr>
+              <a:t>log(1+x) en datos con distribución lognormal</a:t>
+            </a:r>
+          </a:p>
+        </p:txBody>
+      </p:sp>
+      <p:sp>
+        <p:nvSpPr>
+          <p:cNvPr id="35" name="Rectangle 34"/>
+          <p:cNvSpPr/>
+          <p:nvPr/>
+        </p:nvSpPr>
+        <p:spPr>
+          <a:xfrm>
+            <a:off x="0" y="4887468"/>
+            <a:ext cx="9144000" cy="256032"/>
+          </a:xfrm>
+          <a:prstGeom prst="rect">
+            <a:avLst/>
+          </a:prstGeom>
+          <a:solidFill>
+            <a:srgbClr val="2E7D32"/>
+          </a:solidFill>
+          <a:ln>
+            <a:noFill/>
+          </a:ln>
+        </p:spPr>
+        <p:style>
+          <a:lnRef idx="1">
+            <a:schemeClr val="accent1"/>
+          </a:lnRef>
+          <a:fillRef idx="3">
+            <a:schemeClr val="accent1"/>
+          </a:fillRef>
+          <a:effectRef idx="2">
+            <a:schemeClr val="accent1"/>
+          </a:effectRef>
+          <a:fontRef idx="minor">
+            <a:schemeClr val="lt1"/>
+          </a:fontRef>
+        </p:style>
+        <p:txBody>
+          <a:bodyPr rtlCol="0" anchor="ctr"/>
+          <a:lstStyle/>
+          <a:p>
+            <a:pPr algn="ctr"/>
+          </a:p>
+        </p:txBody>
+      </p:sp>
+      <p:sp>
+        <p:nvSpPr>
+          <p:cNvPr id="36" name="TextBox 35"/>
+          <p:cNvSpPr txBox="1"/>
+          <p:nvPr/>
+        </p:nvSpPr>
+        <p:spPr>
+          <a:xfrm>
+            <a:off x="182880" y="4905756"/>
+            <a:ext cx="7315200" cy="219456"/>
+          </a:xfrm>
+          <a:prstGeom prst="rect">
+            <a:avLst/>
+          </a:prstGeom>
+          <a:noFill/>
+        </p:spPr>
+        <p:txBody>
+          <a:bodyPr wrap="square">
+            <a:spAutoFit/>
+          </a:bodyPr>
+          <a:lstStyle/>
+          <a:p>
+            <a:pPr algn="l"/>
+            <a:r>
+              <a:rPr sz="900" b="0" i="0">
+                <a:solidFill>
+                  <a:srgbClr val="FFFFFF"/>
+                </a:solidFill>
+              </a:rPr>
+              <a:t>Deforestación México · Ciencias de Datos · UP</a:t>
+            </a:r>
+          </a:p>
+        </p:txBody>
+      </p:sp>
+      <p:sp>
+        <p:nvSpPr>
+          <p:cNvPr id="37" name="TextBox 36"/>
+          <p:cNvSpPr txBox="1"/>
+          <p:nvPr/>
+        </p:nvSpPr>
+        <p:spPr>
+          <a:xfrm>
+            <a:off x="8595360" y="4905756"/>
+            <a:ext cx="365760" cy="219456"/>
+          </a:xfrm>
+          <a:prstGeom prst="rect">
+            <a:avLst/>
+          </a:prstGeom>
+          <a:noFill/>
+        </p:spPr>
+        <p:txBody>
+          <a:bodyPr wrap="square">
+            <a:spAutoFit/>
+          </a:bodyPr>
+          <a:lstStyle/>
+          <a:p>
+            <a:pPr algn="r"/>
+            <a:r>
+              <a:rPr sz="900" b="0" i="0">
+                <a:solidFill>
+                  <a:srgbClr val="FFFFFF"/>
+                </a:solidFill>
+              </a:rPr>
+              <a:t>12</a:t>
+            </a:r>
+          </a:p>
+        </p:txBody>
+      </p:sp>
+    </p:spTree>
+  </p:cSld>
+  <p:clrMapOvr>
+    <a:masterClrMapping/>
+  </p:clrMapOvr>
+</p:sld>
+</file>
+
+<file path=ppt/slides/slide13.xml><?xml version="1.0" encoding="utf-8"?>
+<p:sld xmlns:a="http://schemas.openxmlformats.org/drawingml/2006/main" xmlns:p="http://schemas.openxmlformats.org/presentationml/2006/main" xmlns:r="http://schemas.openxmlformats.org/officeDocument/2006/relationships">
+  <p:cSld>
+    <p:bg>
+      <p:bgPr>
+        <a:solidFill>
+          <a:srgbClr val="F5F5F5"/>
+        </a:solidFill>
+        <a:effectLst/>
+      </p:bgPr>
+    </p:bg>
+    <p:spTree>
+      <p:nvGrpSpPr>
+        <p:cNvPr id="1" name=""/>
+        <p:cNvGrpSpPr/>
+        <p:nvPr/>
+      </p:nvGrpSpPr>
+      <p:grpSpPr/>
+      <p:sp>
+        <p:nvSpPr>
+          <p:cNvPr id="2" name="Rectangle 1"/>
+          <p:cNvSpPr/>
+          <p:nvPr/>
+        </p:nvSpPr>
+        <p:spPr>
+          <a:xfrm>
+            <a:off x="0" y="0"/>
+            <a:ext cx="9144000" cy="658368"/>
+          </a:xfrm>
+          <a:prstGeom prst="rect">
+            <a:avLst/>
+          </a:prstGeom>
+          <a:solidFill>
+            <a:srgbClr val="2E7D32"/>
+          </a:solidFill>
+          <a:ln>
+            <a:noFill/>
+          </a:ln>
+        </p:spPr>
+        <p:style>
+          <a:lnRef idx="1">
+            <a:schemeClr val="accent1"/>
+          </a:lnRef>
+          <a:fillRef idx="3">
+            <a:schemeClr val="accent1"/>
+          </a:fillRef>
+          <a:effectRef idx="2">
+            <a:schemeClr val="accent1"/>
+          </a:effectRef>
+          <a:fontRef idx="minor">
+            <a:schemeClr val="lt1"/>
+          </a:fontRef>
+        </p:style>
+        <p:txBody>
+          <a:bodyPr rtlCol="0" anchor="ctr"/>
+          <a:lstStyle/>
+          <a:p>
+            <a:pPr algn="ctr"/>
+          </a:p>
+        </p:txBody>
+      </p:sp>
+      <p:sp>
+        <p:nvSpPr>
+          <p:cNvPr id="3" name="TextBox 2"/>
+          <p:cNvSpPr txBox="1"/>
+          <p:nvPr/>
+        </p:nvSpPr>
+        <p:spPr>
+          <a:xfrm>
+            <a:off x="228600" y="73152"/>
+            <a:ext cx="7772400" cy="502920"/>
+          </a:xfrm>
+          <a:prstGeom prst="rect">
+            <a:avLst/>
+          </a:prstGeom>
+          <a:noFill/>
+        </p:spPr>
+        <p:txBody>
+          <a:bodyPr wrap="square">
+            <a:spAutoFit/>
+          </a:bodyPr>
+          <a:lstStyle/>
+          <a:p>
+            <a:pPr algn="l"/>
+            <a:r>
+              <a:rPr sz="2200" b="1" i="0">
+                <a:solidFill>
+                  <a:srgbClr val="FFFFFF"/>
+                </a:solidFill>
+              </a:rPr>
+              <a:t>DISTRIBUCIONES PARAMÉTRICAS E INTERVALOS DE CONFIANZA</a:t>
+            </a:r>
+          </a:p>
+        </p:txBody>
+      </p:sp>
+      <p:sp>
+        <p:nvSpPr>
+          <p:cNvPr id="4" name="Rectangle 3"/>
+          <p:cNvSpPr/>
+          <p:nvPr/>
+        </p:nvSpPr>
+        <p:spPr>
+          <a:xfrm>
+            <a:off x="0" y="658368"/>
+            <a:ext cx="9144000" cy="36576"/>
+          </a:xfrm>
+          <a:prstGeom prst="rect">
+            <a:avLst/>
+          </a:prstGeom>
+          <a:solidFill>
+            <a:srgbClr val="E65100"/>
+          </a:solidFill>
+          <a:ln>
+            <a:noFill/>
+          </a:ln>
+        </p:spPr>
+        <p:style>
+          <a:lnRef idx="1">
+            <a:schemeClr val="accent1"/>
+          </a:lnRef>
+          <a:fillRef idx="3">
+            <a:schemeClr val="accent1"/>
+          </a:fillRef>
+          <a:effectRef idx="2">
+            <a:schemeClr val="accent1"/>
+          </a:effectRef>
+          <a:fontRef idx="minor">
+            <a:schemeClr val="lt1"/>
+          </a:fontRef>
+        </p:style>
+        <p:txBody>
+          <a:bodyPr rtlCol="0" anchor="ctr"/>
+          <a:lstStyle/>
+          <a:p>
+            <a:pPr algn="ctr"/>
+          </a:p>
+        </p:txBody>
+      </p:sp>
+      <p:pic>
+        <p:nvPicPr>
+          <p:cNvPr id="5" name="Picture 4" descr="F2_04_distribuciones.png"/>
+          <p:cNvPicPr>
+            <a:picLocks noChangeAspect="1"/>
+          </p:cNvPicPr>
+          <p:nvPr/>
+        </p:nvPicPr>
+        <p:blipFill>
+          <a:blip r:embed="rId2"/>
+          <a:stretch>
+            <a:fillRect/>
+          </a:stretch>
+        </p:blipFill>
+        <p:spPr>
+          <a:xfrm>
+            <a:off x="182880" y="777240"/>
+            <a:ext cx="5303520" cy="2194560"/>
+          </a:xfrm>
+          <a:prstGeom prst="rect">
+            <a:avLst/>
+          </a:prstGeom>
+        </p:spPr>
+      </p:pic>
+      <p:pic>
+        <p:nvPicPr>
+          <p:cNvPr id="6" name="Picture 5" descr="F2_05_intervalos_confianza.png"/>
+          <p:cNvPicPr>
+            <a:picLocks noChangeAspect="1"/>
+          </p:cNvPicPr>
+          <p:nvPr/>
+        </p:nvPicPr>
+        <p:blipFill>
+          <a:blip r:embed="rId3"/>
+          <a:stretch>
+            <a:fillRect/>
+          </a:stretch>
+        </p:blipFill>
+        <p:spPr>
+          <a:xfrm>
+            <a:off x="182880" y="3063240"/>
+            <a:ext cx="5303520" cy="1828800"/>
+          </a:xfrm>
+          <a:prstGeom prst="rect">
+            <a:avLst/>
+          </a:prstGeom>
+        </p:spPr>
+      </p:pic>
+      <p:sp>
+        <p:nvSpPr>
+          <p:cNvPr id="7" name="TextBox 6"/>
+          <p:cNvSpPr txBox="1"/>
+          <p:nvPr/>
+        </p:nvSpPr>
+        <p:spPr>
+          <a:xfrm>
+            <a:off x="5623560" y="804672"/>
+            <a:ext cx="3291840" cy="320040"/>
+          </a:xfrm>
+          <a:prstGeom prst="rect">
+            <a:avLst/>
+          </a:prstGeom>
+          <a:noFill/>
+        </p:spPr>
+        <p:txBody>
+          <a:bodyPr wrap="square">
+            <a:spAutoFit/>
+          </a:bodyPr>
+          <a:lstStyle/>
+          <a:p>
+            <a:pPr algn="l"/>
+            <a:r>
+              <a:rPr sz="1300" b="1" i="0">
+                <a:solidFill>
+                  <a:srgbClr val="E65100"/>
+                </a:solidFill>
+              </a:rPr>
+              <a:t>Resultado: Distribución Lognormal</a:t>
+            </a:r>
+          </a:p>
+        </p:txBody>
+      </p:sp>
+      <p:sp>
+        <p:nvSpPr>
+          <p:cNvPr id="8" name="TextBox 7"/>
+          <p:cNvSpPr txBox="1"/>
+          <p:nvPr/>
+        </p:nvSpPr>
+        <p:spPr>
+          <a:xfrm>
+            <a:off x="5623560" y="1170432"/>
+            <a:ext cx="3291840" cy="384048"/>
+          </a:xfrm>
+          <a:prstGeom prst="rect">
+            <a:avLst/>
+          </a:prstGeom>
+          <a:noFill/>
+        </p:spPr>
+        <p:txBody>
+          <a:bodyPr wrap="square">
+            <a:spAutoFit/>
+          </a:bodyPr>
+          <a:lstStyle/>
+          <a:p>
+            <a:pPr algn="l"/>
+            <a:r>
+              <a:rPr sz="1000" b="0" i="0">
+                <a:solidFill>
+                  <a:srgbClr val="212121"/>
+                </a:solidFill>
+              </a:rPr>
+              <a:t>• Shapiro-Wilk rechaza normalidad (p&lt;0.05)</a:t>
+            </a:r>
+          </a:p>
+        </p:txBody>
+      </p:sp>
+      <p:sp>
+        <p:nvSpPr>
+          <p:cNvPr id="9" name="TextBox 8"/>
+          <p:cNvSpPr txBox="1"/>
+          <p:nvPr/>
+        </p:nvSpPr>
+        <p:spPr>
+          <a:xfrm>
+            <a:off x="5623560" y="1581912"/>
+            <a:ext cx="3291840" cy="384048"/>
+          </a:xfrm>
+          <a:prstGeom prst="rect">
+            <a:avLst/>
+          </a:prstGeom>
+          <a:noFill/>
+        </p:spPr>
+        <p:txBody>
+          <a:bodyPr wrap="square">
+            <a:spAutoFit/>
+          </a:bodyPr>
+          <a:lstStyle/>
+          <a:p>
+            <a:pPr algn="l"/>
+            <a:r>
+              <a:rPr sz="1000" b="0" i="0">
+                <a:solidFill>
+                  <a:srgbClr val="212121"/>
+                </a:solidFill>
+              </a:rPr>
+              <a:t>• KS-test: Lognormal es el mejor ajuste (p&gt;0.05)</a:t>
+            </a:r>
+          </a:p>
+        </p:txBody>
+      </p:sp>
+      <p:sp>
+        <p:nvSpPr>
+          <p:cNvPr id="10" name="TextBox 9"/>
+          <p:cNvSpPr txBox="1"/>
+          <p:nvPr/>
+        </p:nvSpPr>
+        <p:spPr>
+          <a:xfrm>
+            <a:off x="5623560" y="1993392"/>
+            <a:ext cx="3291840" cy="384048"/>
+          </a:xfrm>
+          <a:prstGeom prst="rect">
+            <a:avLst/>
+          </a:prstGeom>
+          <a:noFill/>
+        </p:spPr>
+        <p:txBody>
+          <a:bodyPr wrap="square">
+            <a:spAutoFit/>
+          </a:bodyPr>
+          <a:lstStyle/>
+          <a:p>
+            <a:pPr algn="l"/>
+            <a:r>
+              <a:rPr sz="1000" b="0" i="0">
+                <a:solidFill>
+                  <a:srgbClr val="212121"/>
+                </a:solidFill>
+              </a:rPr>
+              <a:t>• Consistente con distribuciones de eventos ambientales extremos</a:t>
+            </a:r>
+          </a:p>
+        </p:txBody>
+      </p:sp>
+      <p:sp>
+        <p:nvSpPr>
+          <p:cNvPr id="11" name="TextBox 10"/>
+          <p:cNvSpPr txBox="1"/>
+          <p:nvPr/>
+        </p:nvSpPr>
+        <p:spPr>
+          <a:xfrm>
+            <a:off x="5623560" y="2404872"/>
+            <a:ext cx="3291840" cy="384048"/>
+          </a:xfrm>
+          <a:prstGeom prst="rect">
+            <a:avLst/>
+          </a:prstGeom>
+          <a:noFill/>
+        </p:spPr>
+        <p:txBody>
+          <a:bodyPr wrap="square">
+            <a:spAutoFit/>
+          </a:bodyPr>
+          <a:lstStyle/>
+          <a:p>
+            <a:pPr algn="l"/>
+            <a:r>
+              <a:rPr sz="1000" b="0" i="0">
+                <a:solidFill>
+                  <a:srgbClr val="212121"/>
+                </a:solidFill>
+              </a:rPr>
+              <a:t>• Cola larga explica el pico anómalo de 2019</a:t>
+            </a:r>
+          </a:p>
+        </p:txBody>
+      </p:sp>
+      <p:sp>
+        <p:nvSpPr>
+          <p:cNvPr id="12" name="TextBox 11"/>
+          <p:cNvSpPr txBox="1"/>
+          <p:nvPr/>
+        </p:nvSpPr>
+        <p:spPr>
+          <a:xfrm>
+            <a:off x="5623560" y="2377440"/>
+            <a:ext cx="3291840" cy="320040"/>
+          </a:xfrm>
+          <a:prstGeom prst="rect">
+            <a:avLst/>
+          </a:prstGeom>
+          <a:noFill/>
+        </p:spPr>
+        <p:txBody>
+          <a:bodyPr wrap="square">
+            <a:spAutoFit/>
+          </a:bodyPr>
+          <a:lstStyle/>
+          <a:p>
+            <a:pPr algn="l"/>
+            <a:r>
+              <a:rPr sz="1300" b="1" i="0">
+                <a:solidFill>
+                  <a:srgbClr val="1565C0"/>
+                </a:solidFill>
+              </a:rPr>
+              <a:t>Intervalos de Confianza (IC 95%)</a:t>
+            </a:r>
+          </a:p>
+        </p:txBody>
+      </p:sp>
+      <p:sp>
+        <p:nvSpPr>
+          <p:cNvPr id="13" name="TextBox 12"/>
+          <p:cNvSpPr txBox="1"/>
+          <p:nvPr/>
+        </p:nvSpPr>
+        <p:spPr>
+          <a:xfrm>
+            <a:off x="5623560" y="2743200"/>
+            <a:ext cx="3291840" cy="384048"/>
+          </a:xfrm>
+          <a:prstGeom prst="rect">
+            <a:avLst/>
+          </a:prstGeom>
+          <a:noFill/>
+        </p:spPr>
+        <p:txBody>
+          <a:bodyPr wrap="square">
+            <a:spAutoFit/>
+          </a:bodyPr>
+          <a:lstStyle/>
+          <a:p>
+            <a:pPr algn="l"/>
+            <a:r>
+              <a:rPr sz="1000" b="0" i="0">
+                <a:solidFill>
+                  <a:srgbClr val="212121"/>
+                </a:solidFill>
+              </a:rPr>
+              <a:t>• Media nacional: 212,466 ha/año</a:t>
+            </a:r>
+          </a:p>
+        </p:txBody>
+      </p:sp>
+      <p:sp>
+        <p:nvSpPr>
+          <p:cNvPr id="14" name="TextBox 13"/>
+          <p:cNvSpPr txBox="1"/>
+          <p:nvPr/>
+        </p:nvSpPr>
+        <p:spPr>
+          <a:xfrm>
+            <a:off x="5623560" y="3154680"/>
+            <a:ext cx="3291840" cy="384048"/>
+          </a:xfrm>
+          <a:prstGeom prst="rect">
+            <a:avLst/>
+          </a:prstGeom>
+          <a:noFill/>
+        </p:spPr>
+        <p:txBody>
+          <a:bodyPr wrap="square">
+            <a:spAutoFit/>
+          </a:bodyPr>
+          <a:lstStyle/>
+          <a:p>
+            <a:pPr algn="l"/>
+            <a:r>
+              <a:rPr sz="1000" b="0" i="0">
+                <a:solidFill>
+                  <a:srgbClr val="212121"/>
+                </a:solidFill>
+              </a:rPr>
+              <a:t>• IC 95% paramétrico: [175k — 250k] ha</a:t>
+            </a:r>
+          </a:p>
+        </p:txBody>
+      </p:sp>
+      <p:sp>
+        <p:nvSpPr>
+          <p:cNvPr id="15" name="TextBox 14"/>
+          <p:cNvSpPr txBox="1"/>
+          <p:nvPr/>
+        </p:nvSpPr>
+        <p:spPr>
+          <a:xfrm>
+            <a:off x="5623560" y="3566160"/>
+            <a:ext cx="3291840" cy="384048"/>
+          </a:xfrm>
+          <a:prstGeom prst="rect">
+            <a:avLst/>
+          </a:prstGeom>
+          <a:noFill/>
+        </p:spPr>
+        <p:txBody>
+          <a:bodyPr wrap="square">
+            <a:spAutoFit/>
+          </a:bodyPr>
+          <a:lstStyle/>
+          <a:p>
+            <a:pPr algn="l"/>
+            <a:r>
+              <a:rPr sz="1000" b="0" i="0">
+                <a:solidFill>
+                  <a:srgbClr val="212121"/>
+                </a:solidFill>
+              </a:rPr>
+              <a:t>• Bootstrap 10,000 muestras sobre r(bovino, deforestación)</a:t>
+            </a:r>
+          </a:p>
+        </p:txBody>
+      </p:sp>
+      <p:sp>
+        <p:nvSpPr>
+          <p:cNvPr id="16" name="TextBox 15"/>
+          <p:cNvSpPr txBox="1"/>
+          <p:nvPr/>
+        </p:nvSpPr>
+        <p:spPr>
+          <a:xfrm>
+            <a:off x="5623560" y="3977640"/>
+            <a:ext cx="3291840" cy="384048"/>
+          </a:xfrm>
+          <a:prstGeom prst="rect">
+            <a:avLst/>
+          </a:prstGeom>
+          <a:noFill/>
+        </p:spPr>
+        <p:txBody>
+          <a:bodyPr wrap="square">
+            <a:spAutoFit/>
+          </a:bodyPr>
+          <a:lstStyle/>
+          <a:p>
+            <a:pPr algn="l"/>
+            <a:r>
+              <a:rPr sz="1000" b="0" i="0">
+                <a:solidFill>
+                  <a:srgbClr val="212121"/>
+                </a:solidFill>
+              </a:rPr>
+              <a:t>• IC 95% bootstrap confirma significancia estadística</a:t>
+            </a:r>
+          </a:p>
+        </p:txBody>
+      </p:sp>
+      <p:sp>
+        <p:nvSpPr>
+          <p:cNvPr id="17" name="Rectangle 16"/>
+          <p:cNvSpPr/>
+          <p:nvPr/>
+        </p:nvSpPr>
+        <p:spPr>
+          <a:xfrm>
+            <a:off x="0" y="4887468"/>
+            <a:ext cx="9144000" cy="256032"/>
+          </a:xfrm>
+          <a:prstGeom prst="rect">
+            <a:avLst/>
+          </a:prstGeom>
+          <a:solidFill>
+            <a:srgbClr val="2E7D32"/>
+          </a:solidFill>
+          <a:ln>
+            <a:noFill/>
+          </a:ln>
+        </p:spPr>
+        <p:style>
+          <a:lnRef idx="1">
+            <a:schemeClr val="accent1"/>
+          </a:lnRef>
+          <a:fillRef idx="3">
+            <a:schemeClr val="accent1"/>
+          </a:fillRef>
+          <a:effectRef idx="2">
+            <a:schemeClr val="accent1"/>
+          </a:effectRef>
+          <a:fontRef idx="minor">
+            <a:schemeClr val="lt1"/>
+          </a:fontRef>
+        </p:style>
+        <p:txBody>
+          <a:bodyPr rtlCol="0" anchor="ctr"/>
+          <a:lstStyle/>
+          <a:p>
+            <a:pPr algn="ctr"/>
+          </a:p>
+        </p:txBody>
+      </p:sp>
+      <p:sp>
+        <p:nvSpPr>
+          <p:cNvPr id="18" name="TextBox 17"/>
+          <p:cNvSpPr txBox="1"/>
+          <p:nvPr/>
+        </p:nvSpPr>
+        <p:spPr>
+          <a:xfrm>
+            <a:off x="182880" y="4905756"/>
+            <a:ext cx="7315200" cy="219456"/>
+          </a:xfrm>
+          <a:prstGeom prst="rect">
+            <a:avLst/>
+          </a:prstGeom>
+          <a:noFill/>
+        </p:spPr>
+        <p:txBody>
+          <a:bodyPr wrap="square">
+            <a:spAutoFit/>
+          </a:bodyPr>
+          <a:lstStyle/>
+          <a:p>
+            <a:pPr algn="l"/>
+            <a:r>
+              <a:rPr sz="900" b="0" i="0">
+                <a:solidFill>
+                  <a:srgbClr val="FFFFFF"/>
+                </a:solidFill>
+              </a:rPr>
+              <a:t>Deforestación México · Ciencias de Datos · UP</a:t>
+            </a:r>
+          </a:p>
+        </p:txBody>
+      </p:sp>
+      <p:sp>
+        <p:nvSpPr>
+          <p:cNvPr id="19" name="TextBox 18"/>
+          <p:cNvSpPr txBox="1"/>
+          <p:nvPr/>
+        </p:nvSpPr>
+        <p:spPr>
+          <a:xfrm>
+            <a:off x="8595360" y="4905756"/>
+            <a:ext cx="365760" cy="219456"/>
+          </a:xfrm>
+          <a:prstGeom prst="rect">
+            <a:avLst/>
+          </a:prstGeom>
+          <a:noFill/>
+        </p:spPr>
+        <p:txBody>
+          <a:bodyPr wrap="square">
+            <a:spAutoFit/>
+          </a:bodyPr>
+          <a:lstStyle/>
+          <a:p>
+            <a:pPr algn="r"/>
+            <a:r>
+              <a:rPr sz="900" b="0" i="0">
+                <a:solidFill>
+                  <a:srgbClr val="FFFFFF"/>
+                </a:solidFill>
+              </a:rPr>
+              <a:t>13</a:t>
+            </a:r>
+          </a:p>
+        </p:txBody>
+      </p:sp>
+    </p:spTree>
+  </p:cSld>
+  <p:clrMapOvr>
+    <a:masterClrMapping/>
+  </p:clrMapOvr>
+</p:sld>
+</file>
+
+<file path=ppt/slides/slide14.xml><?xml version="1.0" encoding="utf-8"?>
+<p:sld xmlns:a="http://schemas.openxmlformats.org/drawingml/2006/main" xmlns:p="http://schemas.openxmlformats.org/presentationml/2006/main" xmlns:r="http://schemas.openxmlformats.org/officeDocument/2006/relationships">
+  <p:cSld>
+    <p:bg>
+      <p:bgPr>
+        <a:solidFill>
+          <a:srgbClr val="F5F5F5"/>
+        </a:solidFill>
+        <a:effectLst/>
+      </p:bgPr>
+    </p:bg>
+    <p:spTree>
+      <p:nvGrpSpPr>
+        <p:cNvPr id="1" name=""/>
+        <p:cNvGrpSpPr/>
+        <p:nvPr/>
+      </p:nvGrpSpPr>
+      <p:grpSpPr/>
+      <p:sp>
+        <p:nvSpPr>
+          <p:cNvPr id="2" name="Rectangle 1"/>
+          <p:cNvSpPr/>
+          <p:nvPr/>
+        </p:nvSpPr>
+        <p:spPr>
+          <a:xfrm>
+            <a:off x="0" y="0"/>
+            <a:ext cx="9144000" cy="658368"/>
+          </a:xfrm>
+          <a:prstGeom prst="rect">
+            <a:avLst/>
+          </a:prstGeom>
+          <a:solidFill>
+            <a:srgbClr val="2E7D32"/>
+          </a:solidFill>
+          <a:ln>
+            <a:noFill/>
+          </a:ln>
+        </p:spPr>
+        <p:style>
+          <a:lnRef idx="1">
+            <a:schemeClr val="accent1"/>
+          </a:lnRef>
+          <a:fillRef idx="3">
+            <a:schemeClr val="accent1"/>
+          </a:fillRef>
+          <a:effectRef idx="2">
+            <a:schemeClr val="accent1"/>
+          </a:effectRef>
+          <a:fontRef idx="minor">
+            <a:schemeClr val="lt1"/>
+          </a:fontRef>
+        </p:style>
+        <p:txBody>
+          <a:bodyPr rtlCol="0" anchor="ctr"/>
+          <a:lstStyle/>
+          <a:p>
+            <a:pPr algn="ctr"/>
+          </a:p>
+        </p:txBody>
+      </p:sp>
+      <p:sp>
+        <p:nvSpPr>
+          <p:cNvPr id="3" name="TextBox 2"/>
+          <p:cNvSpPr txBox="1"/>
+          <p:nvPr/>
+        </p:nvSpPr>
+        <p:spPr>
+          <a:xfrm>
+            <a:off x="228600" y="73152"/>
+            <a:ext cx="7772400" cy="502920"/>
+          </a:xfrm>
+          <a:prstGeom prst="rect">
+            <a:avLst/>
+          </a:prstGeom>
+          <a:noFill/>
+        </p:spPr>
+        <p:txBody>
+          <a:bodyPr wrap="square">
+            <a:spAutoFit/>
+          </a:bodyPr>
+          <a:lstStyle/>
+          <a:p>
+            <a:pPr algn="l"/>
+            <a:r>
+              <a:rPr sz="2200" b="1" i="0">
+                <a:solidFill>
+                  <a:srgbClr val="FFFFFF"/>
+                </a:solidFill>
+              </a:rPr>
+              <a:t>TESTS DE HIPÓTESIS</a:t>
+            </a:r>
+          </a:p>
+        </p:txBody>
+      </p:sp>
+      <p:sp>
+        <p:nvSpPr>
+          <p:cNvPr id="4" name="Rectangle 3"/>
+          <p:cNvSpPr/>
+          <p:nvPr/>
+        </p:nvSpPr>
+        <p:spPr>
+          <a:xfrm>
+            <a:off x="0" y="658368"/>
+            <a:ext cx="9144000" cy="36576"/>
+          </a:xfrm>
+          <a:prstGeom prst="rect">
+            <a:avLst/>
+          </a:prstGeom>
+          <a:solidFill>
+            <a:srgbClr val="B71C1C"/>
+          </a:solidFill>
+          <a:ln>
+            <a:noFill/>
+          </a:ln>
+        </p:spPr>
+        <p:style>
+          <a:lnRef idx="1">
+            <a:schemeClr val="accent1"/>
+          </a:lnRef>
+          <a:fillRef idx="3">
+            <a:schemeClr val="accent1"/>
+          </a:fillRef>
+          <a:effectRef idx="2">
+            <a:schemeClr val="accent1"/>
+          </a:effectRef>
+          <a:fontRef idx="minor">
+            <a:schemeClr val="lt1"/>
+          </a:fontRef>
+        </p:style>
+        <p:txBody>
+          <a:bodyPr rtlCol="0" anchor="ctr"/>
+          <a:lstStyle/>
+          <a:p>
+            <a:pPr algn="ctr"/>
+          </a:p>
+        </p:txBody>
+      </p:sp>
+      <p:pic>
+        <p:nvPicPr>
+          <p:cNvPr id="5" name="Picture 4" descr="F2_06_tests_hipotesis.png"/>
+          <p:cNvPicPr>
+            <a:picLocks noChangeAspect="1"/>
+          </p:cNvPicPr>
+          <p:nvPr/>
+        </p:nvPicPr>
+        <p:blipFill>
+          <a:blip r:embed="rId2"/>
+          <a:stretch>
+            <a:fillRect/>
+          </a:stretch>
+        </p:blipFill>
+        <p:spPr>
+          <a:xfrm>
+            <a:off x="182880" y="777240"/>
+            <a:ext cx="5486400" cy="4160520"/>
+          </a:xfrm>
+          <a:prstGeom prst="rect">
+            <a:avLst/>
+          </a:prstGeom>
+        </p:spPr>
+      </p:pic>
+      <p:sp>
+        <p:nvSpPr>
+          <p:cNvPr id="6" name="Rectangle 5"/>
+          <p:cNvSpPr/>
+          <p:nvPr/>
+        </p:nvSpPr>
+        <p:spPr>
+          <a:xfrm>
+            <a:off x="5760720" y="777240"/>
+            <a:ext cx="3200400" cy="1325880"/>
+          </a:xfrm>
+          <a:prstGeom prst="rect">
+            <a:avLst/>
+          </a:prstGeom>
+          <a:solidFill>
+            <a:srgbClr val="B71C1C"/>
+          </a:solidFill>
+          <a:ln>
+            <a:noFill/>
+          </a:ln>
+        </p:spPr>
+        <p:style>
+          <a:lnRef idx="1">
+            <a:schemeClr val="accent1"/>
+          </a:lnRef>
+          <a:fillRef idx="3">
+            <a:schemeClr val="accent1"/>
+          </a:fillRef>
+          <a:effectRef idx="2">
+            <a:schemeClr val="accent1"/>
+          </a:effectRef>
+          <a:fontRef idx="minor">
+            <a:schemeClr val="lt1"/>
+          </a:fontRef>
+        </p:style>
+        <p:txBody>
+          <a:bodyPr rtlCol="0" anchor="ctr"/>
+          <a:lstStyle/>
+          <a:p>
+            <a:pPr algn="ctr"/>
+          </a:p>
+        </p:txBody>
+      </p:sp>
+      <p:sp>
+        <p:nvSpPr>
+          <p:cNvPr id="7" name="TextBox 6"/>
+          <p:cNvSpPr txBox="1"/>
+          <p:nvPr/>
+        </p:nvSpPr>
+        <p:spPr>
+          <a:xfrm>
+            <a:off x="5833872" y="822960"/>
+            <a:ext cx="3017520" cy="320040"/>
+          </a:xfrm>
+          <a:prstGeom prst="rect">
+            <a:avLst/>
+          </a:prstGeom>
+          <a:noFill/>
+        </p:spPr>
+        <p:txBody>
+          <a:bodyPr wrap="square">
+            <a:spAutoFit/>
+          </a:bodyPr>
+          <a:lstStyle/>
+          <a:p>
+            <a:pPr algn="l"/>
+            <a:r>
+              <a:rPr sz="1100" b="1" i="0">
+                <a:solidFill>
+                  <a:srgbClr val="FFFFFF"/>
+                </a:solidFill>
+              </a:rPr>
+              <a:t>TEST 1: Bovino ↔ Deforestación</a:t>
+            </a:r>
+          </a:p>
+        </p:txBody>
+      </p:sp>
+      <p:sp>
+        <p:nvSpPr>
+          <p:cNvPr id="8" name="TextBox 7"/>
+          <p:cNvSpPr txBox="1"/>
+          <p:nvPr/>
+        </p:nvSpPr>
+        <p:spPr>
+          <a:xfrm>
+            <a:off x="5833872" y="1143000"/>
+            <a:ext cx="3017520" cy="914400"/>
+          </a:xfrm>
+          <a:prstGeom prst="rect">
+            <a:avLst/>
+          </a:prstGeom>
+          <a:noFill/>
+        </p:spPr>
+        <p:txBody>
+          <a:bodyPr wrap="square">
+            <a:spAutoFit/>
+          </a:bodyPr>
+          <a:lstStyle/>
+          <a:p>
+            <a:pPr algn="l"/>
+            <a:r>
+              <a:rPr sz="950" b="0" i="0">
+                <a:solidFill>
+                  <a:srgbClr val="FFFFFF"/>
+                </a:solidFill>
+              </a:rPr>
+              <a:t>H₀: r=0
+Pearson + Spearman
+Resultado: Ver notebook para p-value</a:t>
+            </a:r>
+          </a:p>
+        </p:txBody>
+      </p:sp>
+      <p:sp>
+        <p:nvSpPr>
+          <p:cNvPr id="9" name="Rectangle 8"/>
+          <p:cNvSpPr/>
+          <p:nvPr/>
+        </p:nvSpPr>
+        <p:spPr>
+          <a:xfrm>
+            <a:off x="5760720" y="2194560"/>
+            <a:ext cx="3200400" cy="1325880"/>
+          </a:xfrm>
+          <a:prstGeom prst="rect">
+            <a:avLst/>
+          </a:prstGeom>
+          <a:solidFill>
+            <a:srgbClr val="1565C0"/>
+          </a:solidFill>
+          <a:ln>
+            <a:noFill/>
+          </a:ln>
+        </p:spPr>
+        <p:style>
+          <a:lnRef idx="1">
+            <a:schemeClr val="accent1"/>
+          </a:lnRef>
+          <a:fillRef idx="3">
+            <a:schemeClr val="accent1"/>
+          </a:fillRef>
+          <a:effectRef idx="2">
+            <a:schemeClr val="accent1"/>
+          </a:effectRef>
+          <a:fontRef idx="minor">
+            <a:schemeClr val="lt1"/>
+          </a:fontRef>
+        </p:style>
+        <p:txBody>
+          <a:bodyPr rtlCol="0" anchor="ctr"/>
+          <a:lstStyle/>
+          <a:p>
+            <a:pPr algn="ctr"/>
+          </a:p>
+        </p:txBody>
+      </p:sp>
+      <p:sp>
+        <p:nvSpPr>
+          <p:cNvPr id="10" name="TextBox 9"/>
+          <p:cNvSpPr txBox="1"/>
+          <p:nvPr/>
+        </p:nvSpPr>
+        <p:spPr>
+          <a:xfrm>
+            <a:off x="5833872" y="2240280"/>
+            <a:ext cx="3017520" cy="320040"/>
+          </a:xfrm>
+          <a:prstGeom prst="rect">
+            <a:avLst/>
+          </a:prstGeom>
+          <a:noFill/>
+        </p:spPr>
+        <p:txBody>
+          <a:bodyPr wrap="square">
+            <a:spAutoFit/>
+          </a:bodyPr>
+          <a:lstStyle/>
+          <a:p>
+            <a:pPr algn="l"/>
+            <a:r>
+              <a:rPr sz="1100" b="1" i="0">
+                <a:solidFill>
+                  <a:srgbClr val="FFFFFF"/>
+                </a:solidFill>
+              </a:rPr>
+              <a:t>TEST 2: Cambio de período</a:t>
+            </a:r>
+          </a:p>
+        </p:txBody>
+      </p:sp>
+      <p:sp>
+        <p:nvSpPr>
+          <p:cNvPr id="11" name="TextBox 10"/>
+          <p:cNvSpPr txBox="1"/>
+          <p:nvPr/>
+        </p:nvSpPr>
+        <p:spPr>
+          <a:xfrm>
+            <a:off x="5833872" y="2560320"/>
+            <a:ext cx="3017520" cy="914400"/>
+          </a:xfrm>
+          <a:prstGeom prst="rect">
+            <a:avLst/>
+          </a:prstGeom>
+          <a:noFill/>
+        </p:spPr>
+        <p:txBody>
+          <a:bodyPr wrap="square">
+            <a:spAutoFit/>
+          </a:bodyPr>
+          <a:lstStyle/>
+          <a:p>
+            <a:pPr algn="l"/>
+            <a:r>
+              <a:rPr sz="950" b="0" i="0">
+                <a:solidFill>
+                  <a:srgbClr val="FFFFFF"/>
+                </a:solidFill>
+              </a:rPr>
+              <a:t>H₀: media(06-13) = media(14-22)
+t-test + Mann-Whitney U
+Per.1: 196k ha/yr  Per.2: 234k ha/yr</a:t>
+            </a:r>
+          </a:p>
+        </p:txBody>
+      </p:sp>
+      <p:sp>
+        <p:nvSpPr>
+          <p:cNvPr id="12" name="Rectangle 11"/>
+          <p:cNvSpPr/>
+          <p:nvPr/>
+        </p:nvSpPr>
+        <p:spPr>
+          <a:xfrm>
+            <a:off x="5760720" y="3611880"/>
+            <a:ext cx="3200400" cy="1325880"/>
+          </a:xfrm>
+          <a:prstGeom prst="rect">
+            <a:avLst/>
+          </a:prstGeom>
+          <a:solidFill>
+            <a:srgbClr val="6A1B9A"/>
+          </a:solidFill>
+          <a:ln>
+            <a:noFill/>
+          </a:ln>
+        </p:spPr>
+        <p:style>
+          <a:lnRef idx="1">
+            <a:schemeClr val="accent1"/>
+          </a:lnRef>
+          <a:fillRef idx="3">
+            <a:schemeClr val="accent1"/>
+          </a:fillRef>
+          <a:effectRef idx="2">
+            <a:schemeClr val="accent1"/>
+          </a:effectRef>
+          <a:fontRef idx="minor">
+            <a:schemeClr val="lt1"/>
+          </a:fontRef>
+        </p:style>
+        <p:txBody>
+          <a:bodyPr rtlCol="0" anchor="ctr"/>
+          <a:lstStyle/>
+          <a:p>
+            <a:pPr algn="ctr"/>
+          </a:p>
+        </p:txBody>
+      </p:sp>
+      <p:sp>
+        <p:nvSpPr>
+          <p:cNvPr id="13" name="TextBox 12"/>
+          <p:cNvSpPr txBox="1"/>
+          <p:nvPr/>
+        </p:nvSpPr>
+        <p:spPr>
+          <a:xfrm>
+            <a:off x="5833872" y="3657600"/>
+            <a:ext cx="3017520" cy="320040"/>
+          </a:xfrm>
+          <a:prstGeom prst="rect">
+            <a:avLst/>
+          </a:prstGeom>
+          <a:noFill/>
+        </p:spPr>
+        <p:txBody>
+          <a:bodyPr wrap="square">
+            <a:spAutoFit/>
+          </a:bodyPr>
+          <a:lstStyle/>
+          <a:p>
+            <a:pPr algn="l"/>
+            <a:r>
+              <a:rPr sz="1100" b="1" i="0">
+                <a:solidFill>
+                  <a:srgbClr val="FFFFFF"/>
+                </a:solidFill>
+              </a:rPr>
+              <a:t>TEST 3: Subreporte gubernamental</a:t>
+            </a:r>
+          </a:p>
+        </p:txBody>
+      </p:sp>
+      <p:sp>
+        <p:nvSpPr>
+          <p:cNvPr id="14" name="TextBox 13"/>
+          <p:cNvSpPr txBox="1"/>
+          <p:nvPr/>
+        </p:nvSpPr>
+        <p:spPr>
+          <a:xfrm>
+            <a:off x="5833872" y="3977640"/>
+            <a:ext cx="3017520" cy="914400"/>
+          </a:xfrm>
+          <a:prstGeom prst="rect">
+            <a:avLst/>
+          </a:prstGeom>
+          <a:noFill/>
+        </p:spPr>
+        <p:txBody>
+          <a:bodyPr wrap="square">
+            <a:spAutoFit/>
+          </a:bodyPr>
+          <a:lstStyle/>
+          <a:p>
+            <a:pPr algn="l"/>
+            <a:r>
+              <a:rPr sz="950" b="0" i="0">
+                <a:solidFill>
+                  <a:srgbClr val="FFFFFF"/>
+                </a:solidFill>
+              </a:rPr>
+              <a:t>Gobierno ≈ 40-55% de GFW
+2019: Gob=104k vs GFW=327k
+Discrepancia: 223k ha no reconocidas</a:t>
+            </a:r>
+          </a:p>
+        </p:txBody>
+      </p:sp>
+      <p:sp>
+        <p:nvSpPr>
+          <p:cNvPr id="15" name="Rectangle 14"/>
+          <p:cNvSpPr/>
+          <p:nvPr/>
+        </p:nvSpPr>
+        <p:spPr>
+          <a:xfrm>
+            <a:off x="0" y="4887468"/>
+            <a:ext cx="9144000" cy="256032"/>
+          </a:xfrm>
+          <a:prstGeom prst="rect">
+            <a:avLst/>
+          </a:prstGeom>
+          <a:solidFill>
+            <a:srgbClr val="2E7D32"/>
+          </a:solidFill>
+          <a:ln>
+            <a:noFill/>
+          </a:ln>
+        </p:spPr>
+        <p:style>
+          <a:lnRef idx="1">
+            <a:schemeClr val="accent1"/>
+          </a:lnRef>
+          <a:fillRef idx="3">
+            <a:schemeClr val="accent1"/>
+          </a:fillRef>
+          <a:effectRef idx="2">
+            <a:schemeClr val="accent1"/>
+          </a:effectRef>
+          <a:fontRef idx="minor">
+            <a:schemeClr val="lt1"/>
+          </a:fontRef>
+        </p:style>
+        <p:txBody>
+          <a:bodyPr rtlCol="0" anchor="ctr"/>
+          <a:lstStyle/>
+          <a:p>
+            <a:pPr algn="ctr"/>
+          </a:p>
+        </p:txBody>
+      </p:sp>
+      <p:sp>
+        <p:nvSpPr>
+          <p:cNvPr id="16" name="TextBox 15"/>
+          <p:cNvSpPr txBox="1"/>
+          <p:nvPr/>
+        </p:nvSpPr>
+        <p:spPr>
+          <a:xfrm>
+            <a:off x="182880" y="4905756"/>
+            <a:ext cx="7315200" cy="219456"/>
+          </a:xfrm>
+          <a:prstGeom prst="rect">
+            <a:avLst/>
+          </a:prstGeom>
+          <a:noFill/>
+        </p:spPr>
+        <p:txBody>
+          <a:bodyPr wrap="square">
+            <a:spAutoFit/>
+          </a:bodyPr>
+          <a:lstStyle/>
+          <a:p>
+            <a:pPr algn="l"/>
+            <a:r>
+              <a:rPr sz="900" b="0" i="0">
+                <a:solidFill>
+                  <a:srgbClr val="FFFFFF"/>
+                </a:solidFill>
+              </a:rPr>
+              <a:t>Deforestación México · Ciencias de Datos · UP</a:t>
+            </a:r>
+          </a:p>
+        </p:txBody>
+      </p:sp>
+      <p:sp>
+        <p:nvSpPr>
+          <p:cNvPr id="17" name="TextBox 16"/>
+          <p:cNvSpPr txBox="1"/>
+          <p:nvPr/>
+        </p:nvSpPr>
+        <p:spPr>
+          <a:xfrm>
+            <a:off x="8595360" y="4905756"/>
+            <a:ext cx="365760" cy="219456"/>
+          </a:xfrm>
+          <a:prstGeom prst="rect">
+            <a:avLst/>
+          </a:prstGeom>
+          <a:noFill/>
+        </p:spPr>
+        <p:txBody>
+          <a:bodyPr wrap="square">
+            <a:spAutoFit/>
+          </a:bodyPr>
+          <a:lstStyle/>
+          <a:p>
+            <a:pPr algn="r"/>
+            <a:r>
+              <a:rPr sz="900" b="0" i="0">
+                <a:solidFill>
+                  <a:srgbClr val="FFFFFF"/>
+                </a:solidFill>
+              </a:rPr>
+              <a:t>14</a:t>
+            </a:r>
+          </a:p>
+        </p:txBody>
+      </p:sp>
+    </p:spTree>
+  </p:cSld>
+  <p:clrMapOvr>
+    <a:masterClrMapping/>
+  </p:clrMapOvr>
+</p:sld>
+</file>
+
+<file path=ppt/slides/slide15.xml><?xml version="1.0" encoding="utf-8"?>
+<p:sld xmlns:a="http://schemas.openxmlformats.org/drawingml/2006/main" xmlns:p="http://schemas.openxmlformats.org/presentationml/2006/main" xmlns:r="http://schemas.openxmlformats.org/officeDocument/2006/relationships">
+  <p:cSld>
+    <p:bg>
+      <p:bgPr>
+        <a:solidFill>
+          <a:srgbClr val="F5F5F5"/>
+        </a:solidFill>
+        <a:effectLst/>
+      </p:bgPr>
+    </p:bg>
+    <p:spTree>
+      <p:nvGrpSpPr>
+        <p:cNvPr id="1" name=""/>
+        <p:cNvGrpSpPr/>
+        <p:nvPr/>
+      </p:nvGrpSpPr>
+      <p:grpSpPr/>
+      <p:sp>
+        <p:nvSpPr>
+          <p:cNvPr id="2" name="Rectangle 1"/>
+          <p:cNvSpPr/>
+          <p:nvPr/>
+        </p:nvSpPr>
+        <p:spPr>
+          <a:xfrm>
+            <a:off x="0" y="0"/>
+            <a:ext cx="9144000" cy="658368"/>
+          </a:xfrm>
+          <a:prstGeom prst="rect">
+            <a:avLst/>
+          </a:prstGeom>
+          <a:solidFill>
+            <a:srgbClr val="2E7D32"/>
+          </a:solidFill>
+          <a:ln>
+            <a:noFill/>
+          </a:ln>
+        </p:spPr>
+        <p:style>
+          <a:lnRef idx="1">
+            <a:schemeClr val="accent1"/>
+          </a:lnRef>
+          <a:fillRef idx="3">
+            <a:schemeClr val="accent1"/>
+          </a:fillRef>
+          <a:effectRef idx="2">
+            <a:schemeClr val="accent1"/>
+          </a:effectRef>
+          <a:fontRef idx="minor">
+            <a:schemeClr val="lt1"/>
+          </a:fontRef>
+        </p:style>
+        <p:txBody>
+          <a:bodyPr rtlCol="0" anchor="ctr"/>
+          <a:lstStyle/>
+          <a:p>
+            <a:pPr algn="ctr"/>
+          </a:p>
+        </p:txBody>
+      </p:sp>
+      <p:sp>
+        <p:nvSpPr>
+          <p:cNvPr id="3" name="TextBox 2"/>
+          <p:cNvSpPr txBox="1"/>
+          <p:nvPr/>
+        </p:nvSpPr>
+        <p:spPr>
+          <a:xfrm>
+            <a:off x="228600" y="73152"/>
+            <a:ext cx="7772400" cy="502920"/>
+          </a:xfrm>
+          <a:prstGeom prst="rect">
+            <a:avLst/>
+          </a:prstGeom>
+          <a:noFill/>
+        </p:spPr>
+        <p:txBody>
+          <a:bodyPr wrap="square">
+            <a:spAutoFit/>
+          </a:bodyPr>
+          <a:lstStyle/>
+          <a:p>
+            <a:pPr algn="l"/>
+            <a:r>
+              <a:rPr sz="2200" b="1" i="0">
+                <a:solidFill>
+                  <a:srgbClr val="FFFFFF"/>
+                </a:solidFill>
+              </a:rPr>
+              <a:t>PRUEBA A/B — ALTA vs BAJA GANADERÍA</a:t>
+            </a:r>
+          </a:p>
+        </p:txBody>
+      </p:sp>
+      <p:sp>
+        <p:nvSpPr>
+          <p:cNvPr id="4" name="Rectangle 3"/>
+          <p:cNvSpPr/>
+          <p:nvPr/>
+        </p:nvSpPr>
+        <p:spPr>
+          <a:xfrm>
+            <a:off x="0" y="658368"/>
+            <a:ext cx="9144000" cy="36576"/>
+          </a:xfrm>
+          <a:prstGeom prst="rect">
+            <a:avLst/>
+          </a:prstGeom>
+          <a:solidFill>
+            <a:srgbClr val="795548"/>
+          </a:solidFill>
+          <a:ln>
+            <a:noFill/>
+          </a:ln>
+        </p:spPr>
+        <p:style>
+          <a:lnRef idx="1">
+            <a:schemeClr val="accent1"/>
+          </a:lnRef>
+          <a:fillRef idx="3">
+            <a:schemeClr val="accent1"/>
+          </a:fillRef>
+          <a:effectRef idx="2">
+            <a:schemeClr val="accent1"/>
+          </a:effectRef>
+          <a:fontRef idx="minor">
+            <a:schemeClr val="lt1"/>
+          </a:fontRef>
+        </p:style>
+        <p:txBody>
+          <a:bodyPr rtlCol="0" anchor="ctr"/>
+          <a:lstStyle/>
+          <a:p>
+            <a:pPr algn="ctr"/>
+          </a:p>
+        </p:txBody>
+      </p:sp>
+      <p:pic>
+        <p:nvPicPr>
+          <p:cNvPr id="5" name="Picture 4" descr="F2_07_prueba_ab.png"/>
+          <p:cNvPicPr>
+            <a:picLocks noChangeAspect="1"/>
+          </p:cNvPicPr>
+          <p:nvPr/>
+        </p:nvPicPr>
+        <p:blipFill>
+          <a:blip r:embed="rId2"/>
+          <a:stretch>
+            <a:fillRect/>
+          </a:stretch>
+        </p:blipFill>
+        <p:spPr>
+          <a:xfrm>
+            <a:off x="182880" y="777240"/>
+            <a:ext cx="5943600" cy="4114800"/>
+          </a:xfrm>
+          <a:prstGeom prst="rect">
+            <a:avLst/>
+          </a:prstGeom>
+        </p:spPr>
+      </p:pic>
+      <p:sp>
+        <p:nvSpPr>
+          <p:cNvPr id="6" name="TextBox 5"/>
+          <p:cNvSpPr txBox="1"/>
+          <p:nvPr/>
+        </p:nvSpPr>
+        <p:spPr>
+          <a:xfrm>
+            <a:off x="6263640" y="804672"/>
+            <a:ext cx="2651760" cy="292608"/>
+          </a:xfrm>
+          <a:prstGeom prst="rect">
+            <a:avLst/>
+          </a:prstGeom>
+          <a:noFill/>
+        </p:spPr>
+        <p:txBody>
+          <a:bodyPr wrap="square">
+            <a:spAutoFit/>
+          </a:bodyPr>
+          <a:lstStyle/>
+          <a:p>
+            <a:pPr algn="l"/>
+            <a:r>
+              <a:rPr sz="1300" b="1" i="0">
+                <a:solidFill>
+                  <a:srgbClr val="795548"/>
+                </a:solidFill>
+              </a:rPr>
+              <a:t>Diseño del experimento</a:t>
+            </a:r>
+          </a:p>
+        </p:txBody>
+      </p:sp>
+      <p:sp>
+        <p:nvSpPr>
+          <p:cNvPr id="7" name="TextBox 6"/>
+          <p:cNvSpPr txBox="1"/>
+          <p:nvPr/>
+        </p:nvSpPr>
+        <p:spPr>
+          <a:xfrm>
+            <a:off x="6263640" y="1143000"/>
+            <a:ext cx="2651760" cy="429768"/>
+          </a:xfrm>
+          <a:prstGeom prst="rect">
+            <a:avLst/>
+          </a:prstGeom>
+          <a:noFill/>
+        </p:spPr>
+        <p:txBody>
+          <a:bodyPr wrap="square">
+            <a:spAutoFit/>
+          </a:bodyPr>
+          <a:lstStyle/>
+          <a:p>
+            <a:pPr algn="l"/>
+            <a:r>
+              <a:rPr sz="950" b="0" i="0">
+                <a:solidFill>
+                  <a:srgbClr val="212121"/>
+                </a:solidFill>
+              </a:rPr>
+              <a:t>• Grupo A: estados con ≥ mediana de cabezas bovinas sacrificadas</a:t>
+            </a:r>
+          </a:p>
+        </p:txBody>
+      </p:sp>
+      <p:sp>
+        <p:nvSpPr>
+          <p:cNvPr id="8" name="TextBox 7"/>
+          <p:cNvSpPr txBox="1"/>
+          <p:nvPr/>
+        </p:nvSpPr>
+        <p:spPr>
+          <a:xfrm>
+            <a:off x="6263640" y="1600200"/>
+            <a:ext cx="2651760" cy="429768"/>
+          </a:xfrm>
+          <a:prstGeom prst="rect">
+            <a:avLst/>
+          </a:prstGeom>
+          <a:noFill/>
+        </p:spPr>
+        <p:txBody>
+          <a:bodyPr wrap="square">
+            <a:spAutoFit/>
+          </a:bodyPr>
+          <a:lstStyle/>
+          <a:p>
+            <a:pPr algn="l"/>
+            <a:r>
+              <a:rPr sz="950" b="0" i="0">
+                <a:solidFill>
+                  <a:srgbClr val="212121"/>
+                </a:solidFill>
+              </a:rPr>
+              <a:t>• Grupo B: estados con &lt; mediana</a:t>
+            </a:r>
+          </a:p>
+        </p:txBody>
+      </p:sp>
+      <p:sp>
+        <p:nvSpPr>
+          <p:cNvPr id="9" name="TextBox 8"/>
+          <p:cNvSpPr txBox="1"/>
+          <p:nvPr/>
+        </p:nvSpPr>
+        <p:spPr>
+          <a:xfrm>
+            <a:off x="6263640" y="2057400"/>
+            <a:ext cx="2651760" cy="429768"/>
+          </a:xfrm>
+          <a:prstGeom prst="rect">
+            <a:avLst/>
+          </a:prstGeom>
+          <a:noFill/>
+        </p:spPr>
+        <p:txBody>
+          <a:bodyPr wrap="square">
+            <a:spAutoFit/>
+          </a:bodyPr>
+          <a:lstStyle/>
+          <a:p>
+            <a:pPr algn="l"/>
+            <a:r>
+              <a:rPr sz="950" b="0" i="0">
+                <a:solidFill>
+                  <a:srgbClr val="212121"/>
+                </a:solidFill>
+              </a:rPr>
+              <a:t>• Métrica: pérdida forestal promedio anual (ha/año)</a:t>
+            </a:r>
+          </a:p>
+        </p:txBody>
+      </p:sp>
+      <p:sp>
+        <p:nvSpPr>
+          <p:cNvPr id="10" name="TextBox 9"/>
+          <p:cNvSpPr txBox="1"/>
+          <p:nvPr/>
+        </p:nvSpPr>
+        <p:spPr>
+          <a:xfrm>
+            <a:off x="6263640" y="2514600"/>
+            <a:ext cx="2651760" cy="429768"/>
+          </a:xfrm>
+          <a:prstGeom prst="rect">
+            <a:avLst/>
+          </a:prstGeom>
+          <a:noFill/>
+        </p:spPr>
+        <p:txBody>
+          <a:bodyPr wrap="square">
+            <a:spAutoFit/>
+          </a:bodyPr>
+          <a:lstStyle/>
+          <a:p>
+            <a:pPr algn="l"/>
+            <a:r>
+              <a:rPr sz="950" b="0" i="0">
+                <a:solidFill>
+                  <a:srgbClr val="212121"/>
+                </a:solidFill>
+              </a:rPr>
+              <a:t>• H₀: media(A) = media(B)</a:t>
+            </a:r>
+          </a:p>
+        </p:txBody>
+      </p:sp>
+      <p:sp>
+        <p:nvSpPr>
+          <p:cNvPr id="11" name="TextBox 10"/>
+          <p:cNvSpPr txBox="1"/>
+          <p:nvPr/>
+        </p:nvSpPr>
+        <p:spPr>
+          <a:xfrm>
+            <a:off x="6263640" y="2971800"/>
+            <a:ext cx="2651760" cy="429768"/>
+          </a:xfrm>
+          <a:prstGeom prst="rect">
+            <a:avLst/>
+          </a:prstGeom>
+          <a:noFill/>
+        </p:spPr>
+        <p:txBody>
+          <a:bodyPr wrap="square">
+            <a:spAutoFit/>
+          </a:bodyPr>
+          <a:lstStyle/>
+          <a:p>
+            <a:pPr algn="l"/>
+            <a:r>
+              <a:rPr sz="950" b="0" i="0">
+                <a:solidFill>
+                  <a:srgbClr val="212121"/>
+                </a:solidFill>
+              </a:rPr>
+              <a:t>• H₁: media(A) &gt; media(B)</a:t>
+            </a:r>
+          </a:p>
+        </p:txBody>
+      </p:sp>
+      <p:sp>
+        <p:nvSpPr>
+          <p:cNvPr id="12" name="TextBox 11"/>
+          <p:cNvSpPr txBox="1"/>
+          <p:nvPr/>
+        </p:nvSpPr>
+        <p:spPr>
+          <a:xfrm>
+            <a:off x="6263640" y="3337560"/>
+            <a:ext cx="2651760" cy="292608"/>
+          </a:xfrm>
+          <a:prstGeom prst="rect">
+            <a:avLst/>
+          </a:prstGeom>
+          <a:noFill/>
+        </p:spPr>
+        <p:txBody>
+          <a:bodyPr wrap="square">
+            <a:spAutoFit/>
+          </a:bodyPr>
+          <a:lstStyle/>
+          <a:p>
+            <a:pPr algn="l"/>
+            <a:r>
+              <a:rPr sz="1300" b="1" i="0">
+                <a:solidFill>
+                  <a:srgbClr val="795548"/>
+                </a:solidFill>
+              </a:rPr>
+              <a:t>Resultados</a:t>
+            </a:r>
+          </a:p>
+        </p:txBody>
+      </p:sp>
+      <p:sp>
+        <p:nvSpPr>
+          <p:cNvPr id="13" name="TextBox 12"/>
+          <p:cNvSpPr txBox="1"/>
+          <p:nvPr/>
+        </p:nvSpPr>
+        <p:spPr>
+          <a:xfrm>
+            <a:off x="6263640" y="3657600"/>
+            <a:ext cx="2651760" cy="822960"/>
+          </a:xfrm>
+          <a:prstGeom prst="rect">
+            <a:avLst/>
+          </a:prstGeom>
+          <a:noFill/>
+        </p:spPr>
+        <p:txBody>
+          <a:bodyPr wrap="square">
+            <a:spAutoFit/>
+          </a:bodyPr>
+          <a:lstStyle/>
+          <a:p>
+            <a:pPr algn="l"/>
+            <a:r>
+              <a:rPr sz="950" b="0" i="0">
+                <a:solidFill>
+                  <a:srgbClr val="212121"/>
+                </a:solidFill>
+              </a:rPr>
+              <a:t>t-test (Welch) + Mann-Whitney U
+p-value → ver notebook
+Conclusión: los estados con alta ganadería muestran mayor pérdida forestal</a:t>
+            </a:r>
+          </a:p>
+        </p:txBody>
+      </p:sp>
+      <p:sp>
+        <p:nvSpPr>
+          <p:cNvPr id="14" name="Rectangle 13"/>
+          <p:cNvSpPr/>
+          <p:nvPr/>
+        </p:nvSpPr>
+        <p:spPr>
+          <a:xfrm>
+            <a:off x="0" y="4887468"/>
+            <a:ext cx="9144000" cy="256032"/>
+          </a:xfrm>
+          <a:prstGeom prst="rect">
+            <a:avLst/>
+          </a:prstGeom>
+          <a:solidFill>
+            <a:srgbClr val="2E7D32"/>
+          </a:solidFill>
+          <a:ln>
+            <a:noFill/>
+          </a:ln>
+        </p:spPr>
+        <p:style>
+          <a:lnRef idx="1">
+            <a:schemeClr val="accent1"/>
+          </a:lnRef>
+          <a:fillRef idx="3">
+            <a:schemeClr val="accent1"/>
+          </a:fillRef>
+          <a:effectRef idx="2">
+            <a:schemeClr val="accent1"/>
+          </a:effectRef>
+          <a:fontRef idx="minor">
+            <a:schemeClr val="lt1"/>
+          </a:fontRef>
+        </p:style>
+        <p:txBody>
+          <a:bodyPr rtlCol="0" anchor="ctr"/>
+          <a:lstStyle/>
+          <a:p>
+            <a:pPr algn="ctr"/>
+          </a:p>
+        </p:txBody>
+      </p:sp>
+      <p:sp>
+        <p:nvSpPr>
+          <p:cNvPr id="15" name="TextBox 14"/>
+          <p:cNvSpPr txBox="1"/>
+          <p:nvPr/>
+        </p:nvSpPr>
+        <p:spPr>
+          <a:xfrm>
+            <a:off x="182880" y="4905756"/>
+            <a:ext cx="7315200" cy="219456"/>
+          </a:xfrm>
+          <a:prstGeom prst="rect">
+            <a:avLst/>
+          </a:prstGeom>
+          <a:noFill/>
+        </p:spPr>
+        <p:txBody>
+          <a:bodyPr wrap="square">
+            <a:spAutoFit/>
+          </a:bodyPr>
+          <a:lstStyle/>
+          <a:p>
+            <a:pPr algn="l"/>
+            <a:r>
+              <a:rPr sz="900" b="0" i="0">
+                <a:solidFill>
+                  <a:srgbClr val="FFFFFF"/>
+                </a:solidFill>
+              </a:rPr>
+              <a:t>Deforestación México · Ciencias de Datos · UP</a:t>
+            </a:r>
+          </a:p>
+        </p:txBody>
+      </p:sp>
+      <p:sp>
+        <p:nvSpPr>
+          <p:cNvPr id="16" name="TextBox 15"/>
+          <p:cNvSpPr txBox="1"/>
+          <p:nvPr/>
+        </p:nvSpPr>
+        <p:spPr>
+          <a:xfrm>
+            <a:off x="8595360" y="4905756"/>
+            <a:ext cx="365760" cy="219456"/>
+          </a:xfrm>
+          <a:prstGeom prst="rect">
+            <a:avLst/>
+          </a:prstGeom>
+          <a:noFill/>
+        </p:spPr>
+        <p:txBody>
+          <a:bodyPr wrap="square">
+            <a:spAutoFit/>
+          </a:bodyPr>
+          <a:lstStyle/>
+          <a:p>
+            <a:pPr algn="r"/>
+            <a:r>
+              <a:rPr sz="900" b="0" i="0">
+                <a:solidFill>
+                  <a:srgbClr val="FFFFFF"/>
+                </a:solidFill>
+              </a:rPr>
+              <a:t>15</a:t>
+            </a:r>
+          </a:p>
+        </p:txBody>
+      </p:sp>
+    </p:spTree>
+  </p:cSld>
+  <p:clrMapOvr>
+    <a:masterClrMapping/>
+  </p:clrMapOvr>
+</p:sld>
+</file>
+
+<file path=ppt/slides/slide16.xml><?xml version="1.0" encoding="utf-8"?>
+<p:sld xmlns:a="http://schemas.openxmlformats.org/drawingml/2006/main" xmlns:p="http://schemas.openxmlformats.org/presentationml/2006/main" xmlns:r="http://schemas.openxmlformats.org/officeDocument/2006/relationships">
+  <p:cSld>
+    <p:bg>
+      <p:bgPr>
+        <a:solidFill>
+          <a:srgbClr val="F5F5F5"/>
+        </a:solidFill>
+        <a:effectLst/>
+      </p:bgPr>
+    </p:bg>
+    <p:spTree>
+      <p:nvGrpSpPr>
+        <p:cNvPr id="1" name=""/>
+        <p:cNvGrpSpPr/>
+        <p:nvPr/>
+      </p:nvGrpSpPr>
+      <p:grpSpPr/>
+      <p:sp>
+        <p:nvSpPr>
+          <p:cNvPr id="2" name="Rectangle 1"/>
+          <p:cNvSpPr/>
+          <p:nvPr/>
+        </p:nvSpPr>
+        <p:spPr>
+          <a:xfrm>
+            <a:off x="0" y="0"/>
+            <a:ext cx="9144000" cy="658368"/>
+          </a:xfrm>
+          <a:prstGeom prst="rect">
+            <a:avLst/>
+          </a:prstGeom>
+          <a:solidFill>
+            <a:srgbClr val="2E7D32"/>
+          </a:solidFill>
+          <a:ln>
+            <a:noFill/>
+          </a:ln>
+        </p:spPr>
+        <p:style>
+          <a:lnRef idx="1">
+            <a:schemeClr val="accent1"/>
+          </a:lnRef>
+          <a:fillRef idx="3">
+            <a:schemeClr val="accent1"/>
+          </a:fillRef>
+          <a:effectRef idx="2">
+            <a:schemeClr val="accent1"/>
+          </a:effectRef>
+          <a:fontRef idx="minor">
+            <a:schemeClr val="lt1"/>
+          </a:fontRef>
+        </p:style>
+        <p:txBody>
+          <a:bodyPr rtlCol="0" anchor="ctr"/>
+          <a:lstStyle/>
+          <a:p>
+            <a:pPr algn="ctr"/>
+          </a:p>
+        </p:txBody>
+      </p:sp>
+      <p:sp>
+        <p:nvSpPr>
+          <p:cNvPr id="3" name="TextBox 2"/>
+          <p:cNvSpPr txBox="1"/>
+          <p:nvPr/>
+        </p:nvSpPr>
+        <p:spPr>
+          <a:xfrm>
+            <a:off x="228600" y="73152"/>
+            <a:ext cx="7772400" cy="502920"/>
+          </a:xfrm>
+          <a:prstGeom prst="rect">
+            <a:avLst/>
+          </a:prstGeom>
+          <a:noFill/>
+        </p:spPr>
+        <p:txBody>
+          <a:bodyPr wrap="square">
+            <a:spAutoFit/>
+          </a:bodyPr>
+          <a:lstStyle/>
+          <a:p>
+            <a:pPr algn="l"/>
+            <a:r>
+              <a:rPr sz="2200" b="1" i="0">
+                <a:solidFill>
+                  <a:srgbClr val="FFFFFF"/>
+                </a:solidFill>
+              </a:rPr>
+              <a:t>GRAFOS — RED DE CORRELACIÓN ENTRE ESTADOS</a:t>
+            </a:r>
+          </a:p>
+        </p:txBody>
+      </p:sp>
+      <p:sp>
+        <p:nvSpPr>
+          <p:cNvPr id="4" name="Rectangle 3"/>
+          <p:cNvSpPr/>
+          <p:nvPr/>
+        </p:nvSpPr>
+        <p:spPr>
+          <a:xfrm>
+            <a:off x="0" y="658368"/>
+            <a:ext cx="9144000" cy="36576"/>
+          </a:xfrm>
+          <a:prstGeom prst="rect">
+            <a:avLst/>
+          </a:prstGeom>
+          <a:solidFill>
+            <a:srgbClr val="1565C0"/>
+          </a:solidFill>
+          <a:ln>
+            <a:noFill/>
+          </a:ln>
+        </p:spPr>
+        <p:style>
+          <a:lnRef idx="1">
+            <a:schemeClr val="accent1"/>
+          </a:lnRef>
+          <a:fillRef idx="3">
+            <a:schemeClr val="accent1"/>
+          </a:fillRef>
+          <a:effectRef idx="2">
+            <a:schemeClr val="accent1"/>
+          </a:effectRef>
+          <a:fontRef idx="minor">
+            <a:schemeClr val="lt1"/>
+          </a:fontRef>
+        </p:style>
+        <p:txBody>
+          <a:bodyPr rtlCol="0" anchor="ctr"/>
+          <a:lstStyle/>
+          <a:p>
+            <a:pPr algn="ctr"/>
+          </a:p>
+        </p:txBody>
+      </p:sp>
+      <p:pic>
+        <p:nvPicPr>
+          <p:cNvPr id="5" name="Picture 4" descr="F2_08_grafo_correlacion.png"/>
+          <p:cNvPicPr>
+            <a:picLocks noChangeAspect="1"/>
+          </p:cNvPicPr>
+          <p:nvPr/>
+        </p:nvPicPr>
+        <p:blipFill>
+          <a:blip r:embed="rId2"/>
+          <a:stretch>
+            <a:fillRect/>
+          </a:stretch>
+        </p:blipFill>
+        <p:spPr>
+          <a:xfrm>
+            <a:off x="137160" y="749808"/>
+            <a:ext cx="5760720" cy="4206240"/>
+          </a:xfrm>
+          <a:prstGeom prst="rect">
+            <a:avLst/>
+          </a:prstGeom>
+        </p:spPr>
+      </p:pic>
+      <p:sp>
+        <p:nvSpPr>
+          <p:cNvPr id="6" name="TextBox 5"/>
+          <p:cNvSpPr txBox="1"/>
+          <p:nvPr/>
+        </p:nvSpPr>
+        <p:spPr>
+          <a:xfrm>
+            <a:off x="6035040" y="804672"/>
+            <a:ext cx="2880360" cy="292608"/>
+          </a:xfrm>
+          <a:prstGeom prst="rect">
+            <a:avLst/>
+          </a:prstGeom>
+          <a:noFill/>
+        </p:spPr>
+        <p:txBody>
+          <a:bodyPr wrap="square">
+            <a:spAutoFit/>
+          </a:bodyPr>
+          <a:lstStyle/>
+          <a:p>
+            <a:pPr algn="l"/>
+            <a:r>
+              <a:rPr sz="1300" b="1" i="0">
+                <a:solidFill>
+                  <a:srgbClr val="1565C0"/>
+                </a:solidFill>
+              </a:rPr>
+              <a:t>Construcción del grafo</a:t>
+            </a:r>
+          </a:p>
+        </p:txBody>
+      </p:sp>
+      <p:sp>
+        <p:nvSpPr>
+          <p:cNvPr id="7" name="TextBox 6"/>
+          <p:cNvSpPr txBox="1"/>
+          <p:nvPr/>
+        </p:nvSpPr>
+        <p:spPr>
+          <a:xfrm>
+            <a:off x="6035040" y="1143000"/>
+            <a:ext cx="2880360" cy="429768"/>
+          </a:xfrm>
+          <a:prstGeom prst="rect">
+            <a:avLst/>
+          </a:prstGeom>
+          <a:noFill/>
+        </p:spPr>
+        <p:txBody>
+          <a:bodyPr wrap="square">
+            <a:spAutoFit/>
+          </a:bodyPr>
+          <a:lstStyle/>
+          <a:p>
+            <a:pPr algn="l"/>
+            <a:r>
+              <a:rPr sz="1000" b="0" i="0">
+                <a:solidFill>
+                  <a:srgbClr val="212121"/>
+                </a:solidFill>
+              </a:rPr>
+              <a:t>• Nodos = 32 estados</a:t>
+            </a:r>
+          </a:p>
+        </p:txBody>
+      </p:sp>
+      <p:sp>
+        <p:nvSpPr>
+          <p:cNvPr id="8" name="TextBox 7"/>
+          <p:cNvSpPr txBox="1"/>
+          <p:nvPr/>
+        </p:nvSpPr>
+        <p:spPr>
+          <a:xfrm>
+            <a:off x="6035040" y="1600200"/>
+            <a:ext cx="2880360" cy="429768"/>
+          </a:xfrm>
+          <a:prstGeom prst="rect">
+            <a:avLst/>
+          </a:prstGeom>
+          <a:noFill/>
+        </p:spPr>
+        <p:txBody>
+          <a:bodyPr wrap="square">
+            <a:spAutoFit/>
+          </a:bodyPr>
+          <a:lstStyle/>
+          <a:p>
+            <a:pPr algn="l"/>
+            <a:r>
+              <a:rPr sz="1000" b="0" i="0">
+                <a:solidFill>
+                  <a:srgbClr val="212121"/>
+                </a:solidFill>
+              </a:rPr>
+              <a:t>• Arista = Pearson r &gt; 0.6 entre series temporales 2001-2023</a:t>
+            </a:r>
+          </a:p>
+        </p:txBody>
+      </p:sp>
+      <p:sp>
+        <p:nvSpPr>
+          <p:cNvPr id="9" name="TextBox 8"/>
+          <p:cNvSpPr txBox="1"/>
+          <p:nvPr/>
+        </p:nvSpPr>
+        <p:spPr>
+          <a:xfrm>
+            <a:off x="6035040" y="2057400"/>
+            <a:ext cx="2880360" cy="429768"/>
+          </a:xfrm>
+          <a:prstGeom prst="rect">
+            <a:avLst/>
+          </a:prstGeom>
+          <a:noFill/>
+        </p:spPr>
+        <p:txBody>
+          <a:bodyPr wrap="square">
+            <a:spAutoFit/>
+          </a:bodyPr>
+          <a:lstStyle/>
+          <a:p>
+            <a:pPr algn="l"/>
+            <a:r>
+              <a:rPr sz="1000" b="0" i="0">
+                <a:solidFill>
+                  <a:srgbClr val="212121"/>
+                </a:solidFill>
+              </a:rPr>
+              <a:t>• Tamaño de nodo = pérdida total acumulada</a:t>
+            </a:r>
+          </a:p>
+        </p:txBody>
+      </p:sp>
+      <p:sp>
+        <p:nvSpPr>
+          <p:cNvPr id="10" name="TextBox 9"/>
+          <p:cNvSpPr txBox="1"/>
+          <p:nvPr/>
+        </p:nvSpPr>
+        <p:spPr>
+          <a:xfrm>
+            <a:off x="6035040" y="2514600"/>
+            <a:ext cx="2880360" cy="429768"/>
+          </a:xfrm>
+          <a:prstGeom prst="rect">
+            <a:avLst/>
+          </a:prstGeom>
+          <a:noFill/>
+        </p:spPr>
+        <p:txBody>
+          <a:bodyPr wrap="square">
+            <a:spAutoFit/>
+          </a:bodyPr>
+          <a:lstStyle/>
+          <a:p>
+            <a:pPr algn="l"/>
+            <a:r>
+              <a:rPr sz="1000" b="0" i="0">
+                <a:solidFill>
+                  <a:srgbClr val="212121"/>
+                </a:solidFill>
+              </a:rPr>
+              <a:t>• Color = categoría de riesgo (Bajo/Moderado/Alto/Crítico)</a:t>
+            </a:r>
+          </a:p>
+        </p:txBody>
+      </p:sp>
+      <p:sp>
+        <p:nvSpPr>
+          <p:cNvPr id="11" name="TextBox 10"/>
+          <p:cNvSpPr txBox="1"/>
+          <p:nvPr/>
+        </p:nvSpPr>
+        <p:spPr>
+          <a:xfrm>
+            <a:off x="6035040" y="2926080"/>
+            <a:ext cx="2880360" cy="292608"/>
+          </a:xfrm>
+          <a:prstGeom prst="rect">
+            <a:avLst/>
+          </a:prstGeom>
+          <a:noFill/>
+        </p:spPr>
+        <p:txBody>
+          <a:bodyPr wrap="square">
+            <a:spAutoFit/>
+          </a:bodyPr>
+          <a:lstStyle/>
+          <a:p>
+            <a:pPr algn="l"/>
+            <a:r>
+              <a:rPr sz="1300" b="1" i="0">
+                <a:solidFill>
+                  <a:srgbClr val="1565C0"/>
+                </a:solidFill>
+              </a:rPr>
+              <a:t>Interpretación</a:t>
+            </a:r>
+          </a:p>
+        </p:txBody>
+      </p:sp>
+      <p:sp>
+        <p:nvSpPr>
+          <p:cNvPr id="12" name="TextBox 11"/>
+          <p:cNvSpPr txBox="1"/>
+          <p:nvPr/>
+        </p:nvSpPr>
+        <p:spPr>
+          <a:xfrm>
+            <a:off x="6035040" y="3291840"/>
+            <a:ext cx="2880360" cy="502920"/>
+          </a:xfrm>
+          <a:prstGeom prst="rect">
+            <a:avLst/>
+          </a:prstGeom>
+          <a:noFill/>
+        </p:spPr>
+        <p:txBody>
+          <a:bodyPr wrap="square">
+            <a:spAutoFit/>
+          </a:bodyPr>
+          <a:lstStyle/>
+          <a:p>
+            <a:pPr algn="l"/>
+            <a:r>
+              <a:rPr sz="1000" b="0" i="0">
+                <a:solidFill>
+                  <a:srgbClr val="212121"/>
+                </a:solidFill>
+              </a:rPr>
+              <a:t>• Corredor del Golfo (Campeche-Tabasco-Veracruz-Chiapas): altamente interconectado</a:t>
+            </a:r>
+          </a:p>
+        </p:txBody>
+      </p:sp>
+      <p:sp>
+        <p:nvSpPr>
+          <p:cNvPr id="13" name="TextBox 12"/>
+          <p:cNvSpPr txBox="1"/>
+          <p:nvPr/>
+        </p:nvSpPr>
+        <p:spPr>
+          <a:xfrm>
+            <a:off x="6035040" y="3840480"/>
+            <a:ext cx="2880360" cy="502920"/>
+          </a:xfrm>
+          <a:prstGeom prst="rect">
+            <a:avLst/>
+          </a:prstGeom>
+          <a:noFill/>
+        </p:spPr>
+        <p:txBody>
+          <a:bodyPr wrap="square">
+            <a:spAutoFit/>
+          </a:bodyPr>
+          <a:lstStyle/>
+          <a:p>
+            <a:pPr algn="l"/>
+            <a:r>
+              <a:rPr sz="1000" b="0" i="0">
+                <a:solidFill>
+                  <a:srgbClr val="212121"/>
+                </a:solidFill>
+              </a:rPr>
+              <a:t>• Estados del norte: patrones desacoplados del sureste</a:t>
+            </a:r>
+          </a:p>
+        </p:txBody>
+      </p:sp>
+      <p:sp>
+        <p:nvSpPr>
+          <p:cNvPr id="14" name="TextBox 13"/>
+          <p:cNvSpPr txBox="1"/>
+          <p:nvPr/>
+        </p:nvSpPr>
+        <p:spPr>
+          <a:xfrm>
+            <a:off x="6035040" y="4389120"/>
+            <a:ext cx="2880360" cy="502920"/>
+          </a:xfrm>
+          <a:prstGeom prst="rect">
+            <a:avLst/>
+          </a:prstGeom>
+          <a:noFill/>
+        </p:spPr>
+        <p:txBody>
+          <a:bodyPr wrap="square">
+            <a:spAutoFit/>
+          </a:bodyPr>
+          <a:lstStyle/>
+          <a:p>
+            <a:pPr algn="l"/>
+            <a:r>
+              <a:rPr sz="1000" b="0" i="0">
+                <a:solidFill>
+                  <a:srgbClr val="212121"/>
+                </a:solidFill>
+              </a:rPr>
+              <a:t>• Centralidad de grado revela los estados con sincronía de deforestación</a:t>
+            </a:r>
+          </a:p>
+        </p:txBody>
+      </p:sp>
+      <p:sp>
+        <p:nvSpPr>
+          <p:cNvPr id="15" name="Rectangle 14"/>
+          <p:cNvSpPr/>
+          <p:nvPr/>
+        </p:nvSpPr>
+        <p:spPr>
+          <a:xfrm>
+            <a:off x="0" y="4887468"/>
+            <a:ext cx="9144000" cy="256032"/>
+          </a:xfrm>
+          <a:prstGeom prst="rect">
+            <a:avLst/>
+          </a:prstGeom>
+          <a:solidFill>
+            <a:srgbClr val="2E7D32"/>
+          </a:solidFill>
+          <a:ln>
+            <a:noFill/>
+          </a:ln>
+        </p:spPr>
+        <p:style>
+          <a:lnRef idx="1">
+            <a:schemeClr val="accent1"/>
+          </a:lnRef>
+          <a:fillRef idx="3">
+            <a:schemeClr val="accent1"/>
+          </a:fillRef>
+          <a:effectRef idx="2">
+            <a:schemeClr val="accent1"/>
+          </a:effectRef>
+          <a:fontRef idx="minor">
+            <a:schemeClr val="lt1"/>
+          </a:fontRef>
+        </p:style>
+        <p:txBody>
+          <a:bodyPr rtlCol="0" anchor="ctr"/>
+          <a:lstStyle/>
+          <a:p>
+            <a:pPr algn="ctr"/>
+          </a:p>
+        </p:txBody>
+      </p:sp>
+      <p:sp>
+        <p:nvSpPr>
+          <p:cNvPr id="16" name="TextBox 15"/>
+          <p:cNvSpPr txBox="1"/>
+          <p:nvPr/>
+        </p:nvSpPr>
+        <p:spPr>
+          <a:xfrm>
+            <a:off x="182880" y="4905756"/>
+            <a:ext cx="7315200" cy="219456"/>
+          </a:xfrm>
+          <a:prstGeom prst="rect">
+            <a:avLst/>
+          </a:prstGeom>
+          <a:noFill/>
+        </p:spPr>
+        <p:txBody>
+          <a:bodyPr wrap="square">
+            <a:spAutoFit/>
+          </a:bodyPr>
+          <a:lstStyle/>
+          <a:p>
+            <a:pPr algn="l"/>
+            <a:r>
+              <a:rPr sz="900" b="0" i="0">
+                <a:solidFill>
+                  <a:srgbClr val="FFFFFF"/>
+                </a:solidFill>
+              </a:rPr>
+              <a:t>Deforestación México · Ciencias de Datos · UP</a:t>
+            </a:r>
+          </a:p>
+        </p:txBody>
+      </p:sp>
+      <p:sp>
+        <p:nvSpPr>
+          <p:cNvPr id="17" name="TextBox 16"/>
+          <p:cNvSpPr txBox="1"/>
+          <p:nvPr/>
+        </p:nvSpPr>
+        <p:spPr>
+          <a:xfrm>
+            <a:off x="8595360" y="4905756"/>
+            <a:ext cx="365760" cy="219456"/>
+          </a:xfrm>
+          <a:prstGeom prst="rect">
+            <a:avLst/>
+          </a:prstGeom>
+          <a:noFill/>
+        </p:spPr>
+        <p:txBody>
+          <a:bodyPr wrap="square">
+            <a:spAutoFit/>
+          </a:bodyPr>
+          <a:lstStyle/>
+          <a:p>
+            <a:pPr algn="r"/>
+            <a:r>
+              <a:rPr sz="900" b="0" i="0">
+                <a:solidFill>
+                  <a:srgbClr val="FFFFFF"/>
+                </a:solidFill>
+              </a:rPr>
+              <a:t>16</a:t>
+            </a:r>
+          </a:p>
+        </p:txBody>
+      </p:sp>
+    </p:spTree>
+  </p:cSld>
+  <p:clrMapOvr>
+    <a:masterClrMapping/>
+  </p:clrMapOvr>
+</p:sld>
+</file>
+
+<file path=ppt/slides/slide17.xml><?xml version="1.0" encoding="utf-8"?>
+<p:sld xmlns:a="http://schemas.openxmlformats.org/drawingml/2006/main" xmlns:p="http://schemas.openxmlformats.org/presentationml/2006/main" xmlns:r="http://schemas.openxmlformats.org/officeDocument/2006/relationships">
+  <p:cSld>
+    <p:bg>
+      <p:bgPr>
+        <a:solidFill>
+          <a:srgbClr val="F5F5F5"/>
+        </a:solidFill>
+        <a:effectLst/>
+      </p:bgPr>
+    </p:bg>
+    <p:spTree>
+      <p:nvGrpSpPr>
+        <p:cNvPr id="1" name=""/>
+        <p:cNvGrpSpPr/>
+        <p:nvPr/>
+      </p:nvGrpSpPr>
+      <p:grpSpPr/>
+      <p:sp>
+        <p:nvSpPr>
+          <p:cNvPr id="2" name="Rectangle 1"/>
+          <p:cNvSpPr/>
+          <p:nvPr/>
+        </p:nvSpPr>
+        <p:spPr>
+          <a:xfrm>
+            <a:off x="0" y="0"/>
+            <a:ext cx="9144000" cy="658368"/>
+          </a:xfrm>
+          <a:prstGeom prst="rect">
+            <a:avLst/>
+          </a:prstGeom>
+          <a:solidFill>
+            <a:srgbClr val="2E7D32"/>
+          </a:solidFill>
+          <a:ln>
+            <a:noFill/>
+          </a:ln>
+        </p:spPr>
+        <p:style>
+          <a:lnRef idx="1">
+            <a:schemeClr val="accent1"/>
+          </a:lnRef>
+          <a:fillRef idx="3">
+            <a:schemeClr val="accent1"/>
+          </a:fillRef>
+          <a:effectRef idx="2">
+            <a:schemeClr val="accent1"/>
+          </a:effectRef>
+          <a:fontRef idx="minor">
+            <a:schemeClr val="lt1"/>
+          </a:fontRef>
+        </p:style>
+        <p:txBody>
+          <a:bodyPr rtlCol="0" anchor="ctr"/>
+          <a:lstStyle/>
+          <a:p>
+            <a:pPr algn="ctr"/>
+          </a:p>
+        </p:txBody>
+      </p:sp>
+      <p:sp>
+        <p:nvSpPr>
+          <p:cNvPr id="3" name="TextBox 2"/>
+          <p:cNvSpPr txBox="1"/>
+          <p:nvPr/>
+        </p:nvSpPr>
+        <p:spPr>
+          <a:xfrm>
+            <a:off x="228600" y="73152"/>
+            <a:ext cx="7772400" cy="502920"/>
+          </a:xfrm>
+          <a:prstGeom prst="rect">
+            <a:avLst/>
+          </a:prstGeom>
+          <a:noFill/>
+        </p:spPr>
+        <p:txBody>
+          <a:bodyPr wrap="square">
+            <a:spAutoFit/>
+          </a:bodyPr>
+          <a:lstStyle/>
+          <a:p>
+            <a:pPr algn="l"/>
+            <a:r>
+              <a:rPr sz="2200" b="1" i="0">
+                <a:solidFill>
+                  <a:srgbClr val="FFFFFF"/>
+                </a:solidFill>
+              </a:rPr>
+              <a:t>REDUCCIÓN DE DIMENSIONALIDAD — CON VARIABLES GANADERAS</a:t>
+            </a:r>
+          </a:p>
+        </p:txBody>
+      </p:sp>
+      <p:sp>
+        <p:nvSpPr>
+          <p:cNvPr id="4" name="Rectangle 3"/>
+          <p:cNvSpPr/>
+          <p:nvPr/>
+        </p:nvSpPr>
+        <p:spPr>
+          <a:xfrm>
+            <a:off x="0" y="658368"/>
+            <a:ext cx="9144000" cy="36576"/>
+          </a:xfrm>
+          <a:prstGeom prst="rect">
+            <a:avLst/>
+          </a:prstGeom>
+          <a:solidFill>
+            <a:srgbClr val="2E7D32"/>
+          </a:solidFill>
+          <a:ln>
+            <a:noFill/>
+          </a:ln>
+        </p:spPr>
+        <p:style>
+          <a:lnRef idx="1">
+            <a:schemeClr val="accent1"/>
+          </a:lnRef>
+          <a:fillRef idx="3">
+            <a:schemeClr val="accent1"/>
+          </a:fillRef>
+          <a:effectRef idx="2">
+            <a:schemeClr val="accent1"/>
+          </a:effectRef>
+          <a:fontRef idx="minor">
+            <a:schemeClr val="lt1"/>
+          </a:fontRef>
+        </p:style>
+        <p:txBody>
+          <a:bodyPr rtlCol="0" anchor="ctr"/>
+          <a:lstStyle/>
+          <a:p>
+            <a:pPr algn="ctr"/>
+          </a:p>
+        </p:txBody>
+      </p:sp>
+      <p:pic>
+        <p:nvPicPr>
+          <p:cNvPr id="5" name="Picture 4" descr="F2_09_reduccion_dim.png"/>
+          <p:cNvPicPr>
+            <a:picLocks noChangeAspect="1"/>
+          </p:cNvPicPr>
+          <p:nvPr/>
+        </p:nvPicPr>
+        <p:blipFill>
+          <a:blip r:embed="rId2"/>
+          <a:stretch>
+            <a:fillRect/>
+          </a:stretch>
+        </p:blipFill>
+        <p:spPr>
+          <a:xfrm>
+            <a:off x="137160" y="749808"/>
+            <a:ext cx="6400800" cy="2377440"/>
+          </a:xfrm>
+          <a:prstGeom prst="rect">
+            <a:avLst/>
+          </a:prstGeom>
+        </p:spPr>
+      </p:pic>
+      <p:pic>
+        <p:nvPicPr>
+          <p:cNvPr id="6" name="Picture 5" descr="F2_10_pca_biplot.png"/>
+          <p:cNvPicPr>
+            <a:picLocks noChangeAspect="1"/>
+          </p:cNvPicPr>
+          <p:nvPr/>
+        </p:nvPicPr>
+        <p:blipFill>
+          <a:blip r:embed="rId3"/>
+          <a:stretch>
+            <a:fillRect/>
+          </a:stretch>
+        </p:blipFill>
+        <p:spPr>
+          <a:xfrm>
+            <a:off x="137160" y="3200400"/>
+            <a:ext cx="3474720" cy="1828800"/>
+          </a:xfrm>
+          <a:prstGeom prst="rect">
+            <a:avLst/>
+          </a:prstGeom>
+        </p:spPr>
+      </p:pic>
+      <p:sp>
+        <p:nvSpPr>
+          <p:cNvPr id="7" name="TextBox 6"/>
+          <p:cNvSpPr txBox="1"/>
+          <p:nvPr/>
+        </p:nvSpPr>
+        <p:spPr>
+          <a:xfrm>
+            <a:off x="6583680" y="804672"/>
+            <a:ext cx="2377440" cy="320040"/>
+          </a:xfrm>
+          <a:prstGeom prst="rect">
+            <a:avLst/>
+          </a:prstGeom>
+          <a:noFill/>
+        </p:spPr>
+        <p:txBody>
+          <a:bodyPr wrap="square">
+            <a:spAutoFit/>
+          </a:bodyPr>
+          <a:lstStyle/>
+          <a:p>
+            <a:pPr algn="l"/>
+            <a:r>
+              <a:rPr sz="1100" b="1" i="0">
+                <a:solidFill>
+                  <a:srgbClr val="2E7D32"/>
+                </a:solidFill>
+              </a:rPr>
+              <a:t>PCA, UMAP y t-SNE con variables:</a:t>
+            </a:r>
+          </a:p>
+        </p:txBody>
+      </p:sp>
+      <p:sp>
+        <p:nvSpPr>
+          <p:cNvPr id="8" name="TextBox 7"/>
+          <p:cNvSpPr txBox="1"/>
+          <p:nvPr/>
+        </p:nvSpPr>
+        <p:spPr>
+          <a:xfrm>
+            <a:off x="6583680" y="1170432"/>
+            <a:ext cx="2377440" cy="731520"/>
+          </a:xfrm>
+          <a:prstGeom prst="rect">
+            <a:avLst/>
+          </a:prstGeom>
+          <a:noFill/>
+        </p:spPr>
+        <p:txBody>
+          <a:bodyPr wrap="square">
+            <a:spAutoFit/>
+          </a:bodyPr>
+          <a:lstStyle/>
+          <a:p>
+            <a:pPr algn="l"/>
+            <a:r>
+              <a:rPr sz="1000" b="0" i="0">
+                <a:solidFill>
+                  <a:srgbClr val="212121"/>
+                </a:solidFill>
+              </a:rPr>
+              <a:t>• 17 años de pérdida forestal (2006-2022)
+• 17 años de ganadería bovina por estado</a:t>
+            </a:r>
+          </a:p>
+        </p:txBody>
+      </p:sp>
+      <p:sp>
+        <p:nvSpPr>
+          <p:cNvPr id="9" name="TextBox 8"/>
+          <p:cNvSpPr txBox="1"/>
+          <p:nvPr/>
+        </p:nvSpPr>
+        <p:spPr>
+          <a:xfrm>
+            <a:off x="6583680" y="1965960"/>
+            <a:ext cx="2377440" cy="292608"/>
+          </a:xfrm>
+          <a:prstGeom prst="rect">
+            <a:avLst/>
+          </a:prstGeom>
+          <a:noFill/>
+        </p:spPr>
+        <p:txBody>
+          <a:bodyPr wrap="square">
+            <a:spAutoFit/>
+          </a:bodyPr>
+          <a:lstStyle/>
+          <a:p>
+            <a:pPr algn="l"/>
+            <a:r>
+              <a:rPr sz="1100" b="1" i="0">
+                <a:solidFill>
+                  <a:srgbClr val="2E7D32"/>
+                </a:solidFill>
+              </a:rPr>
+              <a:t>Hallazgo clave:</a:t>
+            </a:r>
+          </a:p>
+        </p:txBody>
+      </p:sp>
+      <p:sp>
+        <p:nvSpPr>
+          <p:cNvPr id="10" name="TextBox 9"/>
+          <p:cNvSpPr txBox="1"/>
+          <p:nvPr/>
+        </p:nvSpPr>
+        <p:spPr>
+          <a:xfrm>
+            <a:off x="6583680" y="2286000"/>
+            <a:ext cx="2377440" cy="822960"/>
+          </a:xfrm>
+          <a:prstGeom prst="rect">
+            <a:avLst/>
+          </a:prstGeom>
+          <a:noFill/>
+        </p:spPr>
+        <p:txBody>
+          <a:bodyPr wrap="square">
+            <a:spAutoFit/>
+          </a:bodyPr>
+          <a:lstStyle/>
+          <a:p>
+            <a:pPr algn="l"/>
+            <a:r>
+              <a:rPr sz="1000" b="0" i="0">
+                <a:solidFill>
+                  <a:srgbClr val="212121"/>
+                </a:solidFill>
+              </a:rPr>
+              <a:t>Al agregar ganadería bovina a la reducción dimensional, los estados Críticos se separan más claramente del resto, especialmente en PC1.</a:t>
+            </a:r>
+          </a:p>
+        </p:txBody>
+      </p:sp>
+      <p:sp>
+        <p:nvSpPr>
+          <p:cNvPr id="11" name="TextBox 10"/>
+          <p:cNvSpPr txBox="1"/>
+          <p:nvPr/>
+        </p:nvSpPr>
+        <p:spPr>
+          <a:xfrm>
+            <a:off x="3749039" y="3218688"/>
+            <a:ext cx="5212080" cy="292608"/>
+          </a:xfrm>
+          <a:prstGeom prst="rect">
+            <a:avLst/>
+          </a:prstGeom>
+          <a:noFill/>
+        </p:spPr>
+        <p:txBody>
+          <a:bodyPr wrap="square">
+            <a:spAutoFit/>
+          </a:bodyPr>
+          <a:lstStyle/>
+          <a:p>
+            <a:pPr algn="l"/>
+            <a:r>
+              <a:rPr sz="1100" b="1" i="0">
+                <a:solidFill>
+                  <a:srgbClr val="2E7D32"/>
+                </a:solidFill>
+              </a:rPr>
+              <a:t>Biplot PCA:</a:t>
+            </a:r>
+          </a:p>
+        </p:txBody>
+      </p:sp>
+      <p:sp>
+        <p:nvSpPr>
+          <p:cNvPr id="12" name="TextBox 11"/>
+          <p:cNvSpPr txBox="1"/>
+          <p:nvPr/>
+        </p:nvSpPr>
+        <p:spPr>
+          <a:xfrm>
+            <a:off x="3749039" y="3547872"/>
+            <a:ext cx="5212080" cy="731520"/>
+          </a:xfrm>
+          <a:prstGeom prst="rect">
+            <a:avLst/>
+          </a:prstGeom>
+          <a:noFill/>
+        </p:spPr>
+        <p:txBody>
+          <a:bodyPr wrap="square">
+            <a:spAutoFit/>
+          </a:bodyPr>
+          <a:lstStyle/>
+          <a:p>
+            <a:pPr algn="l"/>
+            <a:r>
+              <a:rPr sz="1000" b="0" i="0">
+                <a:solidFill>
+                  <a:srgbClr val="212121"/>
+                </a:solidFill>
+              </a:rPr>
+              <a:t>Las flechas de pérdida forestal (rojo) y ganadería bovina (café) apuntan en direcciones similares, sugiriendo covariación positiva.</a:t>
+            </a:r>
+          </a:p>
+        </p:txBody>
+      </p:sp>
+      <p:sp>
+        <p:nvSpPr>
+          <p:cNvPr id="13" name="Rectangle 12"/>
+          <p:cNvSpPr/>
+          <p:nvPr/>
+        </p:nvSpPr>
+        <p:spPr>
+          <a:xfrm>
+            <a:off x="0" y="4887468"/>
+            <a:ext cx="9144000" cy="256032"/>
+          </a:xfrm>
+          <a:prstGeom prst="rect">
+            <a:avLst/>
+          </a:prstGeom>
+          <a:solidFill>
+            <a:srgbClr val="2E7D32"/>
+          </a:solidFill>
+          <a:ln>
+            <a:noFill/>
+          </a:ln>
+        </p:spPr>
+        <p:style>
+          <a:lnRef idx="1">
+            <a:schemeClr val="accent1"/>
+          </a:lnRef>
+          <a:fillRef idx="3">
+            <a:schemeClr val="accent1"/>
+          </a:fillRef>
+          <a:effectRef idx="2">
+            <a:schemeClr val="accent1"/>
+          </a:effectRef>
+          <a:fontRef idx="minor">
+            <a:schemeClr val="lt1"/>
+          </a:fontRef>
+        </p:style>
+        <p:txBody>
+          <a:bodyPr rtlCol="0" anchor="ctr"/>
+          <a:lstStyle/>
+          <a:p>
+            <a:pPr algn="ctr"/>
+          </a:p>
+        </p:txBody>
+      </p:sp>
+      <p:sp>
+        <p:nvSpPr>
+          <p:cNvPr id="14" name="TextBox 13"/>
+          <p:cNvSpPr txBox="1"/>
+          <p:nvPr/>
+        </p:nvSpPr>
+        <p:spPr>
+          <a:xfrm>
+            <a:off x="182880" y="4905756"/>
+            <a:ext cx="7315200" cy="219456"/>
+          </a:xfrm>
+          <a:prstGeom prst="rect">
+            <a:avLst/>
+          </a:prstGeom>
+          <a:noFill/>
+        </p:spPr>
+        <p:txBody>
+          <a:bodyPr wrap="square">
+            <a:spAutoFit/>
+          </a:bodyPr>
+          <a:lstStyle/>
+          <a:p>
+            <a:pPr algn="l"/>
+            <a:r>
+              <a:rPr sz="900" b="0" i="0">
+                <a:solidFill>
+                  <a:srgbClr val="FFFFFF"/>
+                </a:solidFill>
+              </a:rPr>
+              <a:t>Deforestación México · Ciencias de Datos · UP</a:t>
+            </a:r>
+          </a:p>
+        </p:txBody>
+      </p:sp>
+      <p:sp>
+        <p:nvSpPr>
+          <p:cNvPr id="15" name="TextBox 14"/>
+          <p:cNvSpPr txBox="1"/>
+          <p:nvPr/>
+        </p:nvSpPr>
+        <p:spPr>
+          <a:xfrm>
+            <a:off x="8595360" y="4905756"/>
+            <a:ext cx="365760" cy="219456"/>
+          </a:xfrm>
+          <a:prstGeom prst="rect">
+            <a:avLst/>
+          </a:prstGeom>
+          <a:noFill/>
+        </p:spPr>
+        <p:txBody>
+          <a:bodyPr wrap="square">
+            <a:spAutoFit/>
+          </a:bodyPr>
+          <a:lstStyle/>
+          <a:p>
+            <a:pPr algn="r"/>
+            <a:r>
+              <a:rPr sz="900" b="0" i="0">
+                <a:solidFill>
+                  <a:srgbClr val="FFFFFF"/>
+                </a:solidFill>
+              </a:rPr>
+              <a:t>17</a:t>
+            </a:r>
+          </a:p>
+        </p:txBody>
+      </p:sp>
+    </p:spTree>
+  </p:cSld>
+  <p:clrMapOvr>
+    <a:masterClrMapping/>
+  </p:clrMapOvr>
+</p:sld>
+</file>
+
+<file path=ppt/slides/slide18.xml><?xml version="1.0" encoding="utf-8"?>
+<p:sld xmlns:a="http://schemas.openxmlformats.org/drawingml/2006/main" xmlns:p="http://schemas.openxmlformats.org/presentationml/2006/main" xmlns:r="http://schemas.openxmlformats.org/officeDocument/2006/relationships">
+  <p:cSld>
+    <p:bg>
+      <p:bgPr>
+        <a:solidFill>
+          <a:srgbClr val="F5F5F5"/>
+        </a:solidFill>
+        <a:effectLst/>
+      </p:bgPr>
+    </p:bg>
+    <p:spTree>
+      <p:nvGrpSpPr>
+        <p:cNvPr id="1" name=""/>
+        <p:cNvGrpSpPr/>
+        <p:nvPr/>
+      </p:nvGrpSpPr>
+      <p:grpSpPr/>
+      <p:sp>
+        <p:nvSpPr>
+          <p:cNvPr id="2" name="Rectangle 1"/>
+          <p:cNvSpPr/>
+          <p:nvPr/>
+        </p:nvSpPr>
+        <p:spPr>
+          <a:xfrm>
+            <a:off x="0" y="0"/>
+            <a:ext cx="9144000" cy="658368"/>
+          </a:xfrm>
+          <a:prstGeom prst="rect">
+            <a:avLst/>
+          </a:prstGeom>
+          <a:solidFill>
+            <a:srgbClr val="2E7D32"/>
+          </a:solidFill>
+          <a:ln>
+            <a:noFill/>
+          </a:ln>
+        </p:spPr>
+        <p:style>
+          <a:lnRef idx="1">
+            <a:schemeClr val="accent1"/>
+          </a:lnRef>
+          <a:fillRef idx="3">
+            <a:schemeClr val="accent1"/>
+          </a:fillRef>
+          <a:effectRef idx="2">
+            <a:schemeClr val="accent1"/>
+          </a:effectRef>
+          <a:fontRef idx="minor">
+            <a:schemeClr val="lt1"/>
+          </a:fontRef>
+        </p:style>
+        <p:txBody>
+          <a:bodyPr rtlCol="0" anchor="ctr"/>
+          <a:lstStyle/>
+          <a:p>
+            <a:pPr algn="ctr"/>
+          </a:p>
+        </p:txBody>
+      </p:sp>
+      <p:sp>
+        <p:nvSpPr>
+          <p:cNvPr id="3" name="TextBox 2"/>
+          <p:cNvSpPr txBox="1"/>
+          <p:nvPr/>
+        </p:nvSpPr>
+        <p:spPr>
+          <a:xfrm>
+            <a:off x="228600" y="73152"/>
+            <a:ext cx="7772400" cy="502920"/>
+          </a:xfrm>
+          <a:prstGeom prst="rect">
+            <a:avLst/>
+          </a:prstGeom>
+          <a:noFill/>
+        </p:spPr>
+        <p:txBody>
+          <a:bodyPr wrap="square">
+            <a:spAutoFit/>
+          </a:bodyPr>
+          <a:lstStyle/>
+          <a:p>
+            <a:pPr algn="l"/>
+            <a:r>
+              <a:rPr sz="2200" b="1" i="0">
+                <a:solidFill>
+                  <a:srgbClr val="FFFFFF"/>
+                </a:solidFill>
+              </a:rPr>
+              <a:t>ANONIMIZACIÓN DE DATOS — k-ANONIMATO</a:t>
+            </a:r>
+          </a:p>
+        </p:txBody>
+      </p:sp>
+      <p:sp>
+        <p:nvSpPr>
+          <p:cNvPr id="4" name="Rectangle 3"/>
+          <p:cNvSpPr/>
+          <p:nvPr/>
+        </p:nvSpPr>
+        <p:spPr>
+          <a:xfrm>
+            <a:off x="0" y="658368"/>
+            <a:ext cx="9144000" cy="36576"/>
+          </a:xfrm>
+          <a:prstGeom prst="rect">
+            <a:avLst/>
+          </a:prstGeom>
+          <a:solidFill>
+            <a:srgbClr val="6A1B9A"/>
+          </a:solidFill>
+          <a:ln>
+            <a:noFill/>
+          </a:ln>
+        </p:spPr>
+        <p:style>
+          <a:lnRef idx="1">
+            <a:schemeClr val="accent1"/>
+          </a:lnRef>
+          <a:fillRef idx="3">
+            <a:schemeClr val="accent1"/>
+          </a:fillRef>
+          <a:effectRef idx="2">
+            <a:schemeClr val="accent1"/>
+          </a:effectRef>
+          <a:fontRef idx="minor">
+            <a:schemeClr val="lt1"/>
+          </a:fontRef>
+        </p:style>
+        <p:txBody>
+          <a:bodyPr rtlCol="0" anchor="ctr"/>
+          <a:lstStyle/>
+          <a:p>
+            <a:pPr algn="ctr"/>
+          </a:p>
+        </p:txBody>
+      </p:sp>
+      <p:pic>
+        <p:nvPicPr>
+          <p:cNvPr id="5" name="Picture 4" descr="F2_11_anonimizacion.png"/>
+          <p:cNvPicPr>
+            <a:picLocks noChangeAspect="1"/>
+          </p:cNvPicPr>
+          <p:nvPr/>
+        </p:nvPicPr>
+        <p:blipFill>
+          <a:blip r:embed="rId2"/>
+          <a:stretch>
+            <a:fillRect/>
+          </a:stretch>
+        </p:blipFill>
+        <p:spPr>
+          <a:xfrm>
+            <a:off x="182880" y="777240"/>
+            <a:ext cx="5486400" cy="2194560"/>
+          </a:xfrm>
+          <a:prstGeom prst="rect">
+            <a:avLst/>
+          </a:prstGeom>
+        </p:spPr>
+      </p:pic>
+      <p:sp>
+        <p:nvSpPr>
+          <p:cNvPr id="6" name="TextBox 5"/>
+          <p:cNvSpPr txBox="1"/>
+          <p:nvPr/>
+        </p:nvSpPr>
+        <p:spPr>
+          <a:xfrm>
+            <a:off x="5760720" y="804672"/>
+            <a:ext cx="3200400" cy="292608"/>
+          </a:xfrm>
+          <a:prstGeom prst="rect">
+            <a:avLst/>
+          </a:prstGeom>
+          <a:noFill/>
+        </p:spPr>
+        <p:txBody>
+          <a:bodyPr wrap="square">
+            <a:spAutoFit/>
+          </a:bodyPr>
+          <a:lstStyle/>
+          <a:p>
+            <a:pPr algn="l"/>
+            <a:r>
+              <a:rPr sz="1300" b="1" i="0">
+                <a:solidFill>
+                  <a:srgbClr val="6A1B9A"/>
+                </a:solidFill>
+              </a:rPr>
+              <a:t>¿Por qué anonimizar?</a:t>
+            </a:r>
+          </a:p>
+        </p:txBody>
+      </p:sp>
+      <p:sp>
+        <p:nvSpPr>
+          <p:cNvPr id="7" name="TextBox 6"/>
+          <p:cNvSpPr txBox="1"/>
+          <p:nvPr/>
+        </p:nvSpPr>
+        <p:spPr>
+          <a:xfrm>
+            <a:off x="5760720" y="1170432"/>
+            <a:ext cx="3200400" cy="429768"/>
+          </a:xfrm>
+          <a:prstGeom prst="rect">
+            <a:avLst/>
+          </a:prstGeom>
+          <a:noFill/>
+        </p:spPr>
+        <p:txBody>
+          <a:bodyPr wrap="square">
+            <a:spAutoFit/>
+          </a:bodyPr>
+          <a:lstStyle/>
+          <a:p>
+            <a:pPr algn="l"/>
+            <a:r>
+              <a:rPr sz="1000" b="0" i="0">
+                <a:solidFill>
+                  <a:srgbClr val="212121"/>
+                </a:solidFill>
+              </a:rPr>
+              <a:t>• Los datos ganaderos llegan a nivel municipio</a:t>
+            </a:r>
+          </a:p>
+        </p:txBody>
+      </p:sp>
+      <p:sp>
+        <p:nvSpPr>
+          <p:cNvPr id="8" name="TextBox 7"/>
+          <p:cNvSpPr txBox="1"/>
+          <p:nvPr/>
+        </p:nvSpPr>
+        <p:spPr>
+          <a:xfrm>
+            <a:off x="5760720" y="1627632"/>
+            <a:ext cx="3200400" cy="429768"/>
+          </a:xfrm>
+          <a:prstGeom prst="rect">
+            <a:avLst/>
+          </a:prstGeom>
+          <a:noFill/>
+        </p:spPr>
+        <p:txBody>
+          <a:bodyPr wrap="square">
+            <a:spAutoFit/>
+          </a:bodyPr>
+          <a:lstStyle/>
+          <a:p>
+            <a:pPr algn="l"/>
+            <a:r>
+              <a:rPr sz="1000" b="0" i="0">
+                <a:solidFill>
+                  <a:srgbClr val="212121"/>
+                </a:solidFill>
+              </a:rPr>
+              <a:t>• Un productor grande en un municipio pequeño es identificable</a:t>
+            </a:r>
+          </a:p>
+        </p:txBody>
+      </p:sp>
+      <p:sp>
+        <p:nvSpPr>
+          <p:cNvPr id="9" name="TextBox 8"/>
+          <p:cNvSpPr txBox="1"/>
+          <p:nvPr/>
+        </p:nvSpPr>
+        <p:spPr>
+          <a:xfrm>
+            <a:off x="5760720" y="2084832"/>
+            <a:ext cx="3200400" cy="429768"/>
+          </a:xfrm>
+          <a:prstGeom prst="rect">
+            <a:avLst/>
+          </a:prstGeom>
+          <a:noFill/>
+        </p:spPr>
+        <p:txBody>
+          <a:bodyPr wrap="square">
+            <a:spAutoFit/>
+          </a:bodyPr>
+          <a:lstStyle/>
+          <a:p>
+            <a:pPr algn="l"/>
+            <a:r>
+              <a:rPr sz="1000" b="0" i="0">
+                <a:solidFill>
+                  <a:srgbClr val="212121"/>
+                </a:solidFill>
+              </a:rPr>
+              <a:t>• Aplica en cualquier proyecto de ciencia de datos con datos sensibles</a:t>
+            </a:r>
+          </a:p>
+        </p:txBody>
+      </p:sp>
+      <p:sp>
+        <p:nvSpPr>
+          <p:cNvPr id="10" name="TextBox 9"/>
+          <p:cNvSpPr txBox="1"/>
+          <p:nvPr/>
+        </p:nvSpPr>
+        <p:spPr>
+          <a:xfrm>
+            <a:off x="5760720" y="2514600"/>
+            <a:ext cx="3200400" cy="292608"/>
+          </a:xfrm>
+          <a:prstGeom prst="rect">
+            <a:avLst/>
+          </a:prstGeom>
+          <a:noFill/>
+        </p:spPr>
+        <p:txBody>
+          <a:bodyPr wrap="square">
+            <a:spAutoFit/>
+          </a:bodyPr>
+          <a:lstStyle/>
+          <a:p>
+            <a:pPr algn="l"/>
+            <a:r>
+              <a:rPr sz="1300" b="1" i="0">
+                <a:solidFill>
+                  <a:srgbClr val="6A1B9A"/>
+                </a:solidFill>
+              </a:rPr>
+              <a:t>Método: k-anonimato (k=5)</a:t>
+            </a:r>
+          </a:p>
+        </p:txBody>
+      </p:sp>
+      <p:sp>
+        <p:nvSpPr>
+          <p:cNvPr id="11" name="TextBox 10"/>
+          <p:cNvSpPr txBox="1"/>
+          <p:nvPr/>
+        </p:nvSpPr>
+        <p:spPr>
+          <a:xfrm>
+            <a:off x="5760720" y="2852928"/>
+            <a:ext cx="3200400" cy="822960"/>
+          </a:xfrm>
+          <a:prstGeom prst="rect">
+            <a:avLst/>
+          </a:prstGeom>
+          <a:noFill/>
+        </p:spPr>
+        <p:txBody>
+          <a:bodyPr wrap="square">
+            <a:spAutoFit/>
+          </a:bodyPr>
+          <a:lstStyle/>
+          <a:p>
+            <a:pPr algn="l"/>
+            <a:r>
+              <a:rPr sz="1000" b="0" i="0">
+                <a:solidFill>
+                  <a:srgbClr val="212121"/>
+                </a:solidFill>
+              </a:rPr>
+              <a:t>Si un estado tiene &lt; 5 municipios con datos bovinos, se agrupan en "Municipios agrupados". Preserva la estadística estatal sin exponer productores individuales.</a:t>
+            </a:r>
+          </a:p>
+        </p:txBody>
+      </p:sp>
+      <p:sp>
+        <p:nvSpPr>
+          <p:cNvPr id="12" name="Rectangle 11"/>
+          <p:cNvSpPr/>
+          <p:nvPr/>
+        </p:nvSpPr>
+        <p:spPr>
+          <a:xfrm>
+            <a:off x="182880" y="3063240"/>
+            <a:ext cx="5303520" cy="347472"/>
+          </a:xfrm>
+          <a:prstGeom prst="rect">
+            <a:avLst/>
+          </a:prstGeom>
+          <a:solidFill>
+            <a:srgbClr val="6A1B9A"/>
+          </a:solidFill>
+          <a:ln>
+            <a:noFill/>
+          </a:ln>
+        </p:spPr>
+        <p:style>
+          <a:lnRef idx="1">
+            <a:schemeClr val="accent1"/>
+          </a:lnRef>
+          <a:fillRef idx="3">
+            <a:schemeClr val="accent1"/>
+          </a:fillRef>
+          <a:effectRef idx="2">
+            <a:schemeClr val="accent1"/>
+          </a:effectRef>
+          <a:fontRef idx="minor">
+            <a:schemeClr val="lt1"/>
+          </a:fontRef>
+        </p:style>
+        <p:txBody>
+          <a:bodyPr rtlCol="0" anchor="ctr"/>
+          <a:lstStyle/>
+          <a:p>
+            <a:pPr algn="ctr"/>
+          </a:p>
+        </p:txBody>
+      </p:sp>
+      <p:sp>
+        <p:nvSpPr>
+          <p:cNvPr id="13" name="TextBox 12"/>
+          <p:cNvSpPr txBox="1"/>
+          <p:nvPr/>
+        </p:nvSpPr>
+        <p:spPr>
+          <a:xfrm>
+            <a:off x="228600" y="3081528"/>
+            <a:ext cx="1645920" cy="310896"/>
+          </a:xfrm>
+          <a:prstGeom prst="rect">
+            <a:avLst/>
+          </a:prstGeom>
+          <a:noFill/>
+        </p:spPr>
+        <p:txBody>
+          <a:bodyPr wrap="square">
+            <a:spAutoFit/>
+          </a:bodyPr>
+          <a:lstStyle/>
+          <a:p>
+            <a:pPr algn="l"/>
+            <a:r>
+              <a:rPr sz="1000" b="1" i="0">
+                <a:solidFill>
+                  <a:srgbClr val="FFFFFF"/>
+                </a:solidFill>
+              </a:rPr>
+              <a:t>Métrica</a:t>
+            </a:r>
+          </a:p>
+        </p:txBody>
+      </p:sp>
+      <p:sp>
+        <p:nvSpPr>
+          <p:cNvPr id="14" name="TextBox 13"/>
+          <p:cNvSpPr txBox="1"/>
+          <p:nvPr/>
+        </p:nvSpPr>
+        <p:spPr>
+          <a:xfrm>
+            <a:off x="1965960" y="3081528"/>
+            <a:ext cx="1645920" cy="310896"/>
+          </a:xfrm>
+          <a:prstGeom prst="rect">
+            <a:avLst/>
+          </a:prstGeom>
+          <a:noFill/>
+        </p:spPr>
+        <p:txBody>
+          <a:bodyPr wrap="square">
+            <a:spAutoFit/>
+          </a:bodyPr>
+          <a:lstStyle/>
+          <a:p>
+            <a:pPr algn="l"/>
+            <a:r>
+              <a:rPr sz="1000" b="1" i="0">
+                <a:solidFill>
+                  <a:srgbClr val="FFFFFF"/>
+                </a:solidFill>
+              </a:rPr>
+              <a:t>Antes</a:t>
+            </a:r>
+          </a:p>
+        </p:txBody>
+      </p:sp>
+      <p:sp>
+        <p:nvSpPr>
+          <p:cNvPr id="15" name="TextBox 14"/>
+          <p:cNvSpPr txBox="1"/>
+          <p:nvPr/>
+        </p:nvSpPr>
+        <p:spPr>
+          <a:xfrm>
+            <a:off x="3703320" y="3081528"/>
+            <a:ext cx="1645920" cy="310896"/>
+          </a:xfrm>
+          <a:prstGeom prst="rect">
+            <a:avLst/>
+          </a:prstGeom>
+          <a:noFill/>
+        </p:spPr>
+        <p:txBody>
+          <a:bodyPr wrap="square">
+            <a:spAutoFit/>
+          </a:bodyPr>
+          <a:lstStyle/>
+          <a:p>
+            <a:pPr algn="l"/>
+            <a:r>
+              <a:rPr sz="1000" b="1" i="0">
+                <a:solidFill>
+                  <a:srgbClr val="FFFFFF"/>
+                </a:solidFill>
+              </a:rPr>
+              <a:t>Después</a:t>
+            </a:r>
+          </a:p>
+        </p:txBody>
+      </p:sp>
+      <p:sp>
+        <p:nvSpPr>
+          <p:cNvPr id="16" name="Rectangle 15"/>
+          <p:cNvSpPr/>
+          <p:nvPr/>
+        </p:nvSpPr>
+        <p:spPr>
+          <a:xfrm>
+            <a:off x="182880" y="3410712"/>
+            <a:ext cx="5303520" cy="320040"/>
+          </a:xfrm>
+          <a:prstGeom prst="rect">
+            <a:avLst/>
+          </a:prstGeom>
+          <a:solidFill>
+            <a:srgbClr val="EEEEEE"/>
+          </a:solidFill>
+          <a:ln>
+            <a:noFill/>
+          </a:ln>
+        </p:spPr>
+        <p:style>
+          <a:lnRef idx="1">
+            <a:schemeClr val="accent1"/>
+          </a:lnRef>
+          <a:fillRef idx="3">
+            <a:schemeClr val="accent1"/>
+          </a:fillRef>
+          <a:effectRef idx="2">
+            <a:schemeClr val="accent1"/>
+          </a:effectRef>
+          <a:fontRef idx="minor">
+            <a:schemeClr val="lt1"/>
+          </a:fontRef>
+        </p:style>
+        <p:txBody>
+          <a:bodyPr rtlCol="0" anchor="ctr"/>
+          <a:lstStyle/>
+          <a:p>
+            <a:pPr algn="ctr"/>
+          </a:p>
+        </p:txBody>
+      </p:sp>
+      <p:sp>
+        <p:nvSpPr>
+          <p:cNvPr id="17" name="TextBox 16"/>
+          <p:cNvSpPr txBox="1"/>
+          <p:nvPr/>
+        </p:nvSpPr>
+        <p:spPr>
+          <a:xfrm>
+            <a:off x="228600" y="3429000"/>
+            <a:ext cx="1645920" cy="292608"/>
+          </a:xfrm>
+          <a:prstGeom prst="rect">
+            <a:avLst/>
+          </a:prstGeom>
+          <a:noFill/>
+        </p:spPr>
+        <p:txBody>
+          <a:bodyPr wrap="square">
+            <a:spAutoFit/>
+          </a:bodyPr>
+          <a:lstStyle/>
+          <a:p>
+            <a:pPr algn="l"/>
+            <a:r>
+              <a:rPr sz="950" b="0" i="0">
+                <a:solidFill>
+                  <a:srgbClr val="212121"/>
+                </a:solidFill>
+              </a:rPr>
+              <a:t>Registros</a:t>
+            </a:r>
+          </a:p>
+        </p:txBody>
+      </p:sp>
+      <p:sp>
+        <p:nvSpPr>
+          <p:cNvPr id="18" name="TextBox 17"/>
+          <p:cNvSpPr txBox="1"/>
+          <p:nvPr/>
+        </p:nvSpPr>
+        <p:spPr>
+          <a:xfrm>
+            <a:off x="1965960" y="3429000"/>
+            <a:ext cx="1645920" cy="292608"/>
+          </a:xfrm>
+          <a:prstGeom prst="rect">
+            <a:avLst/>
+          </a:prstGeom>
+          <a:noFill/>
+        </p:spPr>
+        <p:txBody>
+          <a:bodyPr wrap="square">
+            <a:spAutoFit/>
+          </a:bodyPr>
+          <a:lstStyle/>
+          <a:p>
+            <a:pPr algn="l"/>
+            <a:r>
+              <a:rPr sz="950" b="0" i="0">
+                <a:solidFill>
+                  <a:srgbClr val="212121"/>
+                </a:solidFill>
+              </a:rPr>
+              <a:t>~2,400 filas municipales</a:t>
+            </a:r>
+          </a:p>
+        </p:txBody>
+      </p:sp>
+      <p:sp>
+        <p:nvSpPr>
+          <p:cNvPr id="19" name="TextBox 18"/>
+          <p:cNvSpPr txBox="1"/>
+          <p:nvPr/>
+        </p:nvSpPr>
+        <p:spPr>
+          <a:xfrm>
+            <a:off x="3703320" y="3429000"/>
+            <a:ext cx="1645920" cy="292608"/>
+          </a:xfrm>
+          <a:prstGeom prst="rect">
+            <a:avLst/>
+          </a:prstGeom>
+          <a:noFill/>
+        </p:spPr>
+        <p:txBody>
+          <a:bodyPr wrap="square">
+            <a:spAutoFit/>
+          </a:bodyPr>
+          <a:lstStyle/>
+          <a:p>
+            <a:pPr algn="l"/>
+            <a:r>
+              <a:rPr sz="950" b="0" i="0">
+                <a:solidFill>
+                  <a:srgbClr val="212121"/>
+                </a:solidFill>
+              </a:rPr>
+              <a:t>~800-1,200 filas</a:t>
+            </a:r>
+          </a:p>
+        </p:txBody>
+      </p:sp>
+      <p:sp>
+        <p:nvSpPr>
+          <p:cNvPr id="20" name="Rectangle 19"/>
+          <p:cNvSpPr/>
+          <p:nvPr/>
+        </p:nvSpPr>
+        <p:spPr>
+          <a:xfrm>
+            <a:off x="182880" y="3730752"/>
+            <a:ext cx="5303520" cy="320040"/>
+          </a:xfrm>
+          <a:prstGeom prst="rect">
+            <a:avLst/>
+          </a:prstGeom>
+          <a:solidFill>
+            <a:srgbClr val="FFFFFF"/>
+          </a:solidFill>
+          <a:ln>
+            <a:noFill/>
+          </a:ln>
+        </p:spPr>
+        <p:style>
+          <a:lnRef idx="1">
+            <a:schemeClr val="accent1"/>
+          </a:lnRef>
+          <a:fillRef idx="3">
+            <a:schemeClr val="accent1"/>
+          </a:fillRef>
+          <a:effectRef idx="2">
+            <a:schemeClr val="accent1"/>
+          </a:effectRef>
+          <a:fontRef idx="minor">
+            <a:schemeClr val="lt1"/>
+          </a:fontRef>
+        </p:style>
+        <p:txBody>
+          <a:bodyPr rtlCol="0" anchor="ctr"/>
+          <a:lstStyle/>
+          <a:p>
+            <a:pPr algn="ctr"/>
+          </a:p>
+        </p:txBody>
+      </p:sp>
+      <p:sp>
+        <p:nvSpPr>
+          <p:cNvPr id="21" name="TextBox 20"/>
+          <p:cNvSpPr txBox="1"/>
+          <p:nvPr/>
+        </p:nvSpPr>
+        <p:spPr>
+          <a:xfrm>
+            <a:off x="228600" y="3749040"/>
+            <a:ext cx="1645920" cy="292608"/>
+          </a:xfrm>
+          <a:prstGeom prst="rect">
+            <a:avLst/>
+          </a:prstGeom>
+          <a:noFill/>
+        </p:spPr>
+        <p:txBody>
+          <a:bodyPr wrap="square">
+            <a:spAutoFit/>
+          </a:bodyPr>
+          <a:lstStyle/>
+          <a:p>
+            <a:pPr algn="l"/>
+            <a:r>
+              <a:rPr sz="950" b="0" i="0">
+                <a:solidFill>
+                  <a:srgbClr val="212121"/>
+                </a:solidFill>
+              </a:rPr>
+              <a:t>Granularidad</a:t>
+            </a:r>
+          </a:p>
+        </p:txBody>
+      </p:sp>
+      <p:sp>
+        <p:nvSpPr>
+          <p:cNvPr id="22" name="TextBox 21"/>
+          <p:cNvSpPr txBox="1"/>
+          <p:nvPr/>
+        </p:nvSpPr>
+        <p:spPr>
+          <a:xfrm>
+            <a:off x="1965960" y="3749040"/>
+            <a:ext cx="1645920" cy="292608"/>
+          </a:xfrm>
+          <a:prstGeom prst="rect">
+            <a:avLst/>
+          </a:prstGeom>
+          <a:noFill/>
+        </p:spPr>
+        <p:txBody>
+          <a:bodyPr wrap="square">
+            <a:spAutoFit/>
+          </a:bodyPr>
+          <a:lstStyle/>
+          <a:p>
+            <a:pPr algn="l"/>
+            <a:r>
+              <a:rPr sz="950" b="0" i="0">
+                <a:solidFill>
+                  <a:srgbClr val="212121"/>
+                </a:solidFill>
+              </a:rPr>
+              <a:t>Municipio identificable</a:t>
+            </a:r>
+          </a:p>
+        </p:txBody>
+      </p:sp>
+      <p:sp>
+        <p:nvSpPr>
+          <p:cNvPr id="23" name="TextBox 22"/>
+          <p:cNvSpPr txBox="1"/>
+          <p:nvPr/>
+        </p:nvSpPr>
+        <p:spPr>
+          <a:xfrm>
+            <a:off x="3703320" y="3749040"/>
+            <a:ext cx="1645920" cy="292608"/>
+          </a:xfrm>
+          <a:prstGeom prst="rect">
+            <a:avLst/>
+          </a:prstGeom>
+          <a:noFill/>
+        </p:spPr>
+        <p:txBody>
+          <a:bodyPr wrap="square">
+            <a:spAutoFit/>
+          </a:bodyPr>
+          <a:lstStyle/>
+          <a:p>
+            <a:pPr algn="l"/>
+            <a:r>
+              <a:rPr sz="950" b="0" i="0">
+                <a:solidFill>
+                  <a:srgbClr val="212121"/>
+                </a:solidFill>
+              </a:rPr>
+              <a:t>Estado o "Agrupado"</a:t>
+            </a:r>
+          </a:p>
+        </p:txBody>
+      </p:sp>
+      <p:sp>
+        <p:nvSpPr>
+          <p:cNvPr id="24" name="Rectangle 23"/>
+          <p:cNvSpPr/>
+          <p:nvPr/>
+        </p:nvSpPr>
+        <p:spPr>
+          <a:xfrm>
+            <a:off x="182880" y="4050792"/>
+            <a:ext cx="5303520" cy="320040"/>
+          </a:xfrm>
+          <a:prstGeom prst="rect">
+            <a:avLst/>
+          </a:prstGeom>
+          <a:solidFill>
+            <a:srgbClr val="EEEEEE"/>
+          </a:solidFill>
+          <a:ln>
+            <a:noFill/>
+          </a:ln>
+        </p:spPr>
+        <p:style>
+          <a:lnRef idx="1">
+            <a:schemeClr val="accent1"/>
+          </a:lnRef>
+          <a:fillRef idx="3">
+            <a:schemeClr val="accent1"/>
+          </a:fillRef>
+          <a:effectRef idx="2">
+            <a:schemeClr val="accent1"/>
+          </a:effectRef>
+          <a:fontRef idx="minor">
+            <a:schemeClr val="lt1"/>
+          </a:fontRef>
+        </p:style>
+        <p:txBody>
+          <a:bodyPr rtlCol="0" anchor="ctr"/>
+          <a:lstStyle/>
+          <a:p>
+            <a:pPr algn="ctr"/>
+          </a:p>
+        </p:txBody>
+      </p:sp>
+      <p:sp>
+        <p:nvSpPr>
+          <p:cNvPr id="25" name="TextBox 24"/>
+          <p:cNvSpPr txBox="1"/>
+          <p:nvPr/>
+        </p:nvSpPr>
+        <p:spPr>
+          <a:xfrm>
+            <a:off x="228600" y="4069080"/>
+            <a:ext cx="1645920" cy="292608"/>
+          </a:xfrm>
+          <a:prstGeom prst="rect">
+            <a:avLst/>
+          </a:prstGeom>
+          <a:noFill/>
+        </p:spPr>
+        <p:txBody>
+          <a:bodyPr wrap="square">
+            <a:spAutoFit/>
+          </a:bodyPr>
+          <a:lstStyle/>
+          <a:p>
+            <a:pPr algn="l"/>
+            <a:r>
+              <a:rPr sz="950" b="0" i="0">
+                <a:solidFill>
+                  <a:srgbClr val="212121"/>
+                </a:solidFill>
+              </a:rPr>
+              <a:t>Agregados</a:t>
+            </a:r>
+          </a:p>
+        </p:txBody>
+      </p:sp>
+      <p:sp>
+        <p:nvSpPr>
+          <p:cNvPr id="26" name="TextBox 25"/>
+          <p:cNvSpPr txBox="1"/>
+          <p:nvPr/>
+        </p:nvSpPr>
+        <p:spPr>
+          <a:xfrm>
+            <a:off x="1965960" y="4069080"/>
+            <a:ext cx="1645920" cy="292608"/>
+          </a:xfrm>
+          <a:prstGeom prst="rect">
+            <a:avLst/>
+          </a:prstGeom>
+          <a:noFill/>
+        </p:spPr>
+        <p:txBody>
+          <a:bodyPr wrap="square">
+            <a:spAutoFit/>
+          </a:bodyPr>
+          <a:lstStyle/>
+          <a:p>
+            <a:pPr algn="l"/>
+            <a:r>
+              <a:rPr sz="950" b="0" i="0">
+                <a:solidFill>
+                  <a:srgbClr val="212121"/>
+                </a:solidFill>
+              </a:rPr>
+              <a:t>Preservados</a:t>
+            </a:r>
+          </a:p>
+        </p:txBody>
+      </p:sp>
+      <p:sp>
+        <p:nvSpPr>
+          <p:cNvPr id="27" name="TextBox 26"/>
+          <p:cNvSpPr txBox="1"/>
+          <p:nvPr/>
+        </p:nvSpPr>
+        <p:spPr>
+          <a:xfrm>
+            <a:off x="3703320" y="4069080"/>
+            <a:ext cx="1645920" cy="292608"/>
+          </a:xfrm>
+          <a:prstGeom prst="rect">
+            <a:avLst/>
+          </a:prstGeom>
+          <a:noFill/>
+        </p:spPr>
+        <p:txBody>
+          <a:bodyPr wrap="square">
+            <a:spAutoFit/>
+          </a:bodyPr>
+          <a:lstStyle/>
+          <a:p>
+            <a:pPr algn="l"/>
+            <a:r>
+              <a:rPr sz="950" b="0" i="0">
+                <a:solidFill>
+                  <a:srgbClr val="212121"/>
+                </a:solidFill>
+              </a:rPr>
+              <a:t>Preservados (sin pérdida)</a:t>
+            </a:r>
+          </a:p>
+        </p:txBody>
+      </p:sp>
+      <p:sp>
+        <p:nvSpPr>
+          <p:cNvPr id="28" name="Rectangle 27"/>
+          <p:cNvSpPr/>
+          <p:nvPr/>
+        </p:nvSpPr>
+        <p:spPr>
+          <a:xfrm>
+            <a:off x="0" y="4887468"/>
+            <a:ext cx="9144000" cy="256032"/>
+          </a:xfrm>
+          <a:prstGeom prst="rect">
+            <a:avLst/>
+          </a:prstGeom>
+          <a:solidFill>
+            <a:srgbClr val="2E7D32"/>
+          </a:solidFill>
+          <a:ln>
+            <a:noFill/>
+          </a:ln>
+        </p:spPr>
+        <p:style>
+          <a:lnRef idx="1">
+            <a:schemeClr val="accent1"/>
+          </a:lnRef>
+          <a:fillRef idx="3">
+            <a:schemeClr val="accent1"/>
+          </a:fillRef>
+          <a:effectRef idx="2">
+            <a:schemeClr val="accent1"/>
+          </a:effectRef>
+          <a:fontRef idx="minor">
+            <a:schemeClr val="lt1"/>
+          </a:fontRef>
+        </p:style>
+        <p:txBody>
+          <a:bodyPr rtlCol="0" anchor="ctr"/>
+          <a:lstStyle/>
+          <a:p>
+            <a:pPr algn="ctr"/>
+          </a:p>
+        </p:txBody>
+      </p:sp>
+      <p:sp>
+        <p:nvSpPr>
+          <p:cNvPr id="29" name="TextBox 28"/>
+          <p:cNvSpPr txBox="1"/>
+          <p:nvPr/>
+        </p:nvSpPr>
+        <p:spPr>
+          <a:xfrm>
+            <a:off x="182880" y="4905756"/>
+            <a:ext cx="7315200" cy="219456"/>
+          </a:xfrm>
+          <a:prstGeom prst="rect">
+            <a:avLst/>
+          </a:prstGeom>
+          <a:noFill/>
+        </p:spPr>
+        <p:txBody>
+          <a:bodyPr wrap="square">
+            <a:spAutoFit/>
+          </a:bodyPr>
+          <a:lstStyle/>
+          <a:p>
+            <a:pPr algn="l"/>
+            <a:r>
+              <a:rPr sz="900" b="0" i="0">
+                <a:solidFill>
+                  <a:srgbClr val="FFFFFF"/>
+                </a:solidFill>
+              </a:rPr>
+              <a:t>Deforestación México · Ciencias de Datos · UP</a:t>
+            </a:r>
+          </a:p>
+        </p:txBody>
+      </p:sp>
+      <p:sp>
+        <p:nvSpPr>
+          <p:cNvPr id="30" name="TextBox 29"/>
+          <p:cNvSpPr txBox="1"/>
+          <p:nvPr/>
+        </p:nvSpPr>
+        <p:spPr>
+          <a:xfrm>
+            <a:off x="8595360" y="4905756"/>
+            <a:ext cx="365760" cy="219456"/>
+          </a:xfrm>
+          <a:prstGeom prst="rect">
+            <a:avLst/>
+          </a:prstGeom>
+          <a:noFill/>
+        </p:spPr>
+        <p:txBody>
+          <a:bodyPr wrap="square">
+            <a:spAutoFit/>
+          </a:bodyPr>
+          <a:lstStyle/>
+          <a:p>
+            <a:pPr algn="r"/>
+            <a:r>
+              <a:rPr sz="900" b="0" i="0">
+                <a:solidFill>
+                  <a:srgbClr val="FFFFFF"/>
+                </a:solidFill>
+              </a:rPr>
+              <a:t>18</a:t>
+            </a:r>
+          </a:p>
+        </p:txBody>
+      </p:sp>
+    </p:spTree>
+  </p:cSld>
+  <p:clrMapOvr>
+    <a:masterClrMapping/>
+  </p:clrMapOvr>
+</p:sld>
+</file>
+
+<file path=ppt/slides/slide19.xml><?xml version="1.0" encoding="utf-8"?>
+<p:sld xmlns:a="http://schemas.openxmlformats.org/drawingml/2006/main" xmlns:p="http://schemas.openxmlformats.org/presentationml/2006/main" xmlns:r="http://schemas.openxmlformats.org/officeDocument/2006/relationships">
+  <p:cSld>
+    <p:bg>
+      <p:bgPr>
+        <a:solidFill>
+          <a:srgbClr val="F5F5F5"/>
+        </a:solidFill>
+        <a:effectLst/>
+      </p:bgPr>
+    </p:bg>
+    <p:spTree>
+      <p:nvGrpSpPr>
+        <p:cNvPr id="1" name=""/>
+        <p:cNvGrpSpPr/>
+        <p:nvPr/>
+      </p:nvGrpSpPr>
+      <p:grpSpPr/>
+      <p:sp>
+        <p:nvSpPr>
+          <p:cNvPr id="2" name="Rectangle 1"/>
+          <p:cNvSpPr/>
+          <p:nvPr/>
+        </p:nvSpPr>
+        <p:spPr>
+          <a:xfrm>
+            <a:off x="0" y="0"/>
+            <a:ext cx="9144000" cy="658368"/>
+          </a:xfrm>
+          <a:prstGeom prst="rect">
+            <a:avLst/>
+          </a:prstGeom>
+          <a:solidFill>
+            <a:srgbClr val="2E7D32"/>
+          </a:solidFill>
+          <a:ln>
+            <a:noFill/>
+          </a:ln>
+        </p:spPr>
+        <p:style>
+          <a:lnRef idx="1">
+            <a:schemeClr val="accent1"/>
+          </a:lnRef>
+          <a:fillRef idx="3">
+            <a:schemeClr val="accent1"/>
+          </a:fillRef>
+          <a:effectRef idx="2">
+            <a:schemeClr val="accent1"/>
+          </a:effectRef>
+          <a:fontRef idx="minor">
+            <a:schemeClr val="lt1"/>
+          </a:fontRef>
+        </p:style>
+        <p:txBody>
+          <a:bodyPr rtlCol="0" anchor="ctr"/>
+          <a:lstStyle/>
+          <a:p>
+            <a:pPr algn="ctr"/>
+          </a:p>
+        </p:txBody>
+      </p:sp>
+      <p:sp>
+        <p:nvSpPr>
+          <p:cNvPr id="3" name="TextBox 2"/>
+          <p:cNvSpPr txBox="1"/>
+          <p:nvPr/>
+        </p:nvSpPr>
+        <p:spPr>
+          <a:xfrm>
+            <a:off x="228600" y="73152"/>
+            <a:ext cx="7772400" cy="502920"/>
+          </a:xfrm>
+          <a:prstGeom prst="rect">
+            <a:avLst/>
+          </a:prstGeom>
+          <a:noFill/>
+        </p:spPr>
+        <p:txBody>
+          <a:bodyPr wrap="square">
+            <a:spAutoFit/>
+          </a:bodyPr>
+          <a:lstStyle/>
+          <a:p>
+            <a:pPr algn="l"/>
+            <a:r>
+              <a:rPr sz="2200" b="1" i="0">
+                <a:solidFill>
+                  <a:srgbClr val="FFFFFF"/>
+                </a:solidFill>
+              </a:rPr>
+              <a:t>HIPÓTESIS FINALES</a:t>
+            </a:r>
+          </a:p>
+        </p:txBody>
+      </p:sp>
+      <p:sp>
+        <p:nvSpPr>
+          <p:cNvPr id="4" name="Rectangle 3"/>
+          <p:cNvSpPr/>
+          <p:nvPr/>
+        </p:nvSpPr>
+        <p:spPr>
+          <a:xfrm>
+            <a:off x="0" y="658368"/>
+            <a:ext cx="9144000" cy="36576"/>
+          </a:xfrm>
+          <a:prstGeom prst="rect">
+            <a:avLst/>
+          </a:prstGeom>
+          <a:solidFill>
+            <a:srgbClr val="2E7D32"/>
+          </a:solidFill>
+          <a:ln>
+            <a:noFill/>
+          </a:ln>
+        </p:spPr>
+        <p:style>
+          <a:lnRef idx="1">
+            <a:schemeClr val="accent1"/>
+          </a:lnRef>
+          <a:fillRef idx="3">
+            <a:schemeClr val="accent1"/>
+          </a:fillRef>
+          <a:effectRef idx="2">
+            <a:schemeClr val="accent1"/>
+          </a:effectRef>
+          <a:fontRef idx="minor">
+            <a:schemeClr val="lt1"/>
+          </a:fontRef>
+        </p:style>
+        <p:txBody>
+          <a:bodyPr rtlCol="0" anchor="ctr"/>
+          <a:lstStyle/>
+          <a:p>
+            <a:pPr algn="ctr"/>
+          </a:p>
+        </p:txBody>
+      </p:sp>
+      <p:sp>
+        <p:nvSpPr>
+          <p:cNvPr id="5" name="Rectangle 4"/>
+          <p:cNvSpPr/>
+          <p:nvPr/>
+        </p:nvSpPr>
+        <p:spPr>
+          <a:xfrm>
+            <a:off x="137160" y="749808"/>
+            <a:ext cx="640080" cy="978408"/>
+          </a:xfrm>
+          <a:prstGeom prst="rect">
+            <a:avLst/>
+          </a:prstGeom>
+          <a:solidFill>
+            <a:srgbClr val="E65100"/>
+          </a:solidFill>
+          <a:ln>
+            <a:noFill/>
+          </a:ln>
+        </p:spPr>
+        <p:style>
+          <a:lnRef idx="1">
+            <a:schemeClr val="accent1"/>
+          </a:lnRef>
+          <a:fillRef idx="3">
+            <a:schemeClr val="accent1"/>
+          </a:fillRef>
+          <a:effectRef idx="2">
+            <a:schemeClr val="accent1"/>
+          </a:effectRef>
+          <a:fontRef idx="minor">
+            <a:schemeClr val="lt1"/>
+          </a:fontRef>
+        </p:style>
+        <p:txBody>
+          <a:bodyPr rtlCol="0" anchor="ctr"/>
+          <a:lstStyle/>
+          <a:p>
+            <a:pPr algn="ctr"/>
+          </a:p>
+        </p:txBody>
+      </p:sp>
+      <p:sp>
+        <p:nvSpPr>
+          <p:cNvPr id="6" name="TextBox 5"/>
+          <p:cNvSpPr txBox="1"/>
+          <p:nvPr/>
+        </p:nvSpPr>
+        <p:spPr>
+          <a:xfrm>
+            <a:off x="137160" y="1024128"/>
+            <a:ext cx="640080" cy="457200"/>
+          </a:xfrm>
+          <a:prstGeom prst="rect">
+            <a:avLst/>
+          </a:prstGeom>
+          <a:noFill/>
+        </p:spPr>
+        <p:txBody>
+          <a:bodyPr wrap="square">
+            <a:spAutoFit/>
+          </a:bodyPr>
+          <a:lstStyle/>
+          <a:p>
+            <a:pPr algn="ctr"/>
+            <a:r>
+              <a:rPr sz="1800" b="1" i="0">
+                <a:solidFill>
+                  <a:srgbClr val="FFFFFF"/>
+                </a:solidFill>
+              </a:rPr>
+              <a:t>H₁</a:t>
+            </a:r>
+          </a:p>
+        </p:txBody>
+      </p:sp>
+      <p:sp>
+        <p:nvSpPr>
+          <p:cNvPr id="7" name="Rectangle 6"/>
+          <p:cNvSpPr/>
+          <p:nvPr/>
+        </p:nvSpPr>
+        <p:spPr>
+          <a:xfrm>
+            <a:off x="822960" y="749808"/>
+            <a:ext cx="8229600" cy="978408"/>
+          </a:xfrm>
+          <a:prstGeom prst="rect">
+            <a:avLst/>
+          </a:prstGeom>
+          <a:solidFill>
+            <a:srgbClr val="EEEEEE"/>
+          </a:solidFill>
+          <a:ln>
+            <a:noFill/>
+          </a:ln>
+        </p:spPr>
+        <p:style>
+          <a:lnRef idx="1">
+            <a:schemeClr val="accent1"/>
+          </a:lnRef>
+          <a:fillRef idx="3">
+            <a:schemeClr val="accent1"/>
+          </a:fillRef>
+          <a:effectRef idx="2">
+            <a:schemeClr val="accent1"/>
+          </a:effectRef>
+          <a:fontRef idx="minor">
+            <a:schemeClr val="lt1"/>
+          </a:fontRef>
+        </p:style>
+        <p:txBody>
+          <a:bodyPr rtlCol="0" anchor="ctr"/>
+          <a:lstStyle/>
+          <a:p>
+            <a:pPr algn="ctr"/>
+          </a:p>
+        </p:txBody>
+      </p:sp>
+      <p:sp>
+        <p:nvSpPr>
+          <p:cNvPr id="8" name="TextBox 7"/>
+          <p:cNvSpPr txBox="1"/>
+          <p:nvPr/>
+        </p:nvSpPr>
+        <p:spPr>
+          <a:xfrm>
+            <a:off x="914400" y="786384"/>
+            <a:ext cx="5029200" cy="292608"/>
+          </a:xfrm>
+          <a:prstGeom prst="rect">
+            <a:avLst/>
+          </a:prstGeom>
+          <a:noFill/>
+        </p:spPr>
+        <p:txBody>
+          <a:bodyPr wrap="square">
+            <a:spAutoFit/>
+          </a:bodyPr>
+          <a:lstStyle/>
+          <a:p>
+            <a:pPr algn="l"/>
+            <a:r>
+              <a:rPr sz="1000" b="1" i="0">
+                <a:solidFill>
+                  <a:srgbClr val="546E7A"/>
+                </a:solidFill>
+              </a:rPr>
+              <a:t>¿La expansión agrícola impulsa la deforestación?</a:t>
+            </a:r>
+          </a:p>
+        </p:txBody>
+      </p:sp>
+      <p:sp>
+        <p:nvSpPr>
+          <p:cNvPr id="9" name="Rectangle 8"/>
+          <p:cNvSpPr/>
+          <p:nvPr/>
+        </p:nvSpPr>
+        <p:spPr>
+          <a:xfrm>
+            <a:off x="5989320" y="786384"/>
+            <a:ext cx="2926080" cy="274320"/>
+          </a:xfrm>
+          <a:prstGeom prst="rect">
+            <a:avLst/>
+          </a:prstGeom>
+          <a:solidFill>
+            <a:srgbClr val="E65100"/>
+          </a:solidFill>
+          <a:ln>
+            <a:noFill/>
+          </a:ln>
+        </p:spPr>
+        <p:style>
+          <a:lnRef idx="1">
+            <a:schemeClr val="accent1"/>
+          </a:lnRef>
+          <a:fillRef idx="3">
+            <a:schemeClr val="accent1"/>
+          </a:fillRef>
+          <a:effectRef idx="2">
+            <a:schemeClr val="accent1"/>
+          </a:effectRef>
+          <a:fontRef idx="minor">
+            <a:schemeClr val="lt1"/>
+          </a:fontRef>
+        </p:style>
+        <p:txBody>
+          <a:bodyPr rtlCol="0" anchor="ctr"/>
+          <a:lstStyle/>
+          <a:p>
+            <a:pPr algn="ctr"/>
+          </a:p>
+        </p:txBody>
+      </p:sp>
+      <p:sp>
+        <p:nvSpPr>
+          <p:cNvPr id="10" name="TextBox 9"/>
+          <p:cNvSpPr txBox="1"/>
+          <p:nvPr/>
+        </p:nvSpPr>
+        <p:spPr>
+          <a:xfrm>
+            <a:off x="6035040" y="804672"/>
+            <a:ext cx="2834640" cy="237744"/>
+          </a:xfrm>
+          <a:prstGeom prst="rect">
+            <a:avLst/>
+          </a:prstGeom>
+          <a:noFill/>
+        </p:spPr>
+        <p:txBody>
+          <a:bodyPr wrap="square">
+            <a:spAutoFit/>
+          </a:bodyPr>
+          <a:lstStyle/>
+          <a:p>
+            <a:pPr algn="ctr"/>
+            <a:r>
+              <a:rPr sz="850" b="1" i="0">
+                <a:solidFill>
+                  <a:srgbClr val="FFFFFF"/>
+                </a:solidFill>
+              </a:rPr>
+              <a:t>PARCIALMENTE CONFIRMADA</a:t>
+            </a:r>
+          </a:p>
+        </p:txBody>
+      </p:sp>
+      <p:sp>
+        <p:nvSpPr>
+          <p:cNvPr id="11" name="TextBox 10"/>
+          <p:cNvSpPr txBox="1"/>
+          <p:nvPr/>
+        </p:nvSpPr>
+        <p:spPr>
+          <a:xfrm>
+            <a:off x="914400" y="1097280"/>
+            <a:ext cx="8001000" cy="594360"/>
+          </a:xfrm>
+          <a:prstGeom prst="rect">
+            <a:avLst/>
+          </a:prstGeom>
+          <a:noFill/>
+        </p:spPr>
+        <p:txBody>
+          <a:bodyPr wrap="square">
+            <a:spAutoFit/>
+          </a:bodyPr>
+          <a:lstStyle/>
+          <a:p>
+            <a:pPr algn="l"/>
+            <a:r>
+              <a:rPr sz="950" b="0" i="0">
+                <a:solidFill>
+                  <a:srgbClr val="212121"/>
+                </a:solidFill>
+              </a:rPr>
+              <a:t>Los cultivos de exportación (palma +495%, aguacate +180%) crecen junto con la pérdida forestal, pero la correlación total agricultura-deforestación es débil (r=0.245). El cambio de uso no es uniforme.</a:t>
+            </a:r>
+          </a:p>
+        </p:txBody>
+      </p:sp>
+      <p:sp>
+        <p:nvSpPr>
+          <p:cNvPr id="12" name="Rectangle 11"/>
+          <p:cNvSpPr/>
+          <p:nvPr/>
+        </p:nvSpPr>
+        <p:spPr>
+          <a:xfrm>
+            <a:off x="137160" y="1819656"/>
+            <a:ext cx="640080" cy="978408"/>
+          </a:xfrm>
+          <a:prstGeom prst="rect">
+            <a:avLst/>
+          </a:prstGeom>
+          <a:solidFill>
+            <a:srgbClr val="2E7D32"/>
+          </a:solidFill>
+          <a:ln>
+            <a:noFill/>
+          </a:ln>
+        </p:spPr>
+        <p:style>
+          <a:lnRef idx="1">
+            <a:schemeClr val="accent1"/>
+          </a:lnRef>
+          <a:fillRef idx="3">
+            <a:schemeClr val="accent1"/>
+          </a:fillRef>
+          <a:effectRef idx="2">
+            <a:schemeClr val="accent1"/>
+          </a:effectRef>
+          <a:fontRef idx="minor">
+            <a:schemeClr val="lt1"/>
+          </a:fontRef>
+        </p:style>
+        <p:txBody>
+          <a:bodyPr rtlCol="0" anchor="ctr"/>
+          <a:lstStyle/>
+          <a:p>
+            <a:pPr algn="ctr"/>
+          </a:p>
+        </p:txBody>
+      </p:sp>
+      <p:sp>
+        <p:nvSpPr>
+          <p:cNvPr id="13" name="TextBox 12"/>
+          <p:cNvSpPr txBox="1"/>
+          <p:nvPr/>
+        </p:nvSpPr>
+        <p:spPr>
+          <a:xfrm>
+            <a:off x="137160" y="2093976"/>
+            <a:ext cx="640080" cy="457200"/>
+          </a:xfrm>
+          <a:prstGeom prst="rect">
+            <a:avLst/>
+          </a:prstGeom>
+          <a:noFill/>
+        </p:spPr>
+        <p:txBody>
+          <a:bodyPr wrap="square">
+            <a:spAutoFit/>
+          </a:bodyPr>
+          <a:lstStyle/>
+          <a:p>
+            <a:pPr algn="ctr"/>
+            <a:r>
+              <a:rPr sz="1800" b="1" i="0">
+                <a:solidFill>
+                  <a:srgbClr val="FFFFFF"/>
+                </a:solidFill>
+              </a:rPr>
+              <a:t>H₂</a:t>
+            </a:r>
+          </a:p>
+        </p:txBody>
+      </p:sp>
+      <p:sp>
+        <p:nvSpPr>
+          <p:cNvPr id="14" name="Rectangle 13"/>
+          <p:cNvSpPr/>
+          <p:nvPr/>
+        </p:nvSpPr>
+        <p:spPr>
+          <a:xfrm>
+            <a:off x="822960" y="1819656"/>
+            <a:ext cx="8229600" cy="978408"/>
+          </a:xfrm>
+          <a:prstGeom prst="rect">
+            <a:avLst/>
+          </a:prstGeom>
+          <a:solidFill>
+            <a:srgbClr val="EEEEEE"/>
+          </a:solidFill>
+          <a:ln>
+            <a:noFill/>
+          </a:ln>
+        </p:spPr>
+        <p:style>
+          <a:lnRef idx="1">
+            <a:schemeClr val="accent1"/>
+          </a:lnRef>
+          <a:fillRef idx="3">
+            <a:schemeClr val="accent1"/>
+          </a:fillRef>
+          <a:effectRef idx="2">
+            <a:schemeClr val="accent1"/>
+          </a:effectRef>
+          <a:fontRef idx="minor">
+            <a:schemeClr val="lt1"/>
+          </a:fontRef>
+        </p:style>
+        <p:txBody>
+          <a:bodyPr rtlCol="0" anchor="ctr"/>
+          <a:lstStyle/>
+          <a:p>
+            <a:pPr algn="ctr"/>
+          </a:p>
+        </p:txBody>
+      </p:sp>
+      <p:sp>
+        <p:nvSpPr>
+          <p:cNvPr id="15" name="TextBox 14"/>
+          <p:cNvSpPr txBox="1"/>
+          <p:nvPr/>
+        </p:nvSpPr>
+        <p:spPr>
+          <a:xfrm>
+            <a:off x="914400" y="1856232"/>
+            <a:ext cx="5029200" cy="292608"/>
+          </a:xfrm>
+          <a:prstGeom prst="rect">
+            <a:avLst/>
+          </a:prstGeom>
+          <a:noFill/>
+        </p:spPr>
+        <p:txBody>
+          <a:bodyPr wrap="square">
+            <a:spAutoFit/>
+          </a:bodyPr>
+          <a:lstStyle/>
+          <a:p>
+            <a:pPr algn="l"/>
+            <a:r>
+              <a:rPr sz="1000" b="1" i="0">
+                <a:solidFill>
+                  <a:srgbClr val="546E7A"/>
+                </a:solidFill>
+              </a:rPr>
+              <a:t>¿El sureste es la región más afectada?</a:t>
+            </a:r>
+          </a:p>
+        </p:txBody>
+      </p:sp>
+      <p:sp>
+        <p:nvSpPr>
+          <p:cNvPr id="16" name="Rectangle 15"/>
+          <p:cNvSpPr/>
+          <p:nvPr/>
+        </p:nvSpPr>
+        <p:spPr>
+          <a:xfrm>
+            <a:off x="5989320" y="1856232"/>
+            <a:ext cx="2926080" cy="274320"/>
+          </a:xfrm>
+          <a:prstGeom prst="rect">
+            <a:avLst/>
+          </a:prstGeom>
+          <a:solidFill>
+            <a:srgbClr val="2E7D32"/>
+          </a:solidFill>
+          <a:ln>
+            <a:noFill/>
+          </a:ln>
+        </p:spPr>
+        <p:style>
+          <a:lnRef idx="1">
+            <a:schemeClr val="accent1"/>
+          </a:lnRef>
+          <a:fillRef idx="3">
+            <a:schemeClr val="accent1"/>
+          </a:fillRef>
+          <a:effectRef idx="2">
+            <a:schemeClr val="accent1"/>
+          </a:effectRef>
+          <a:fontRef idx="minor">
+            <a:schemeClr val="lt1"/>
+          </a:fontRef>
+        </p:style>
+        <p:txBody>
+          <a:bodyPr rtlCol="0" anchor="ctr"/>
+          <a:lstStyle/>
+          <a:p>
+            <a:pPr algn="ctr"/>
+          </a:p>
+        </p:txBody>
+      </p:sp>
+      <p:sp>
+        <p:nvSpPr>
+          <p:cNvPr id="17" name="TextBox 16"/>
+          <p:cNvSpPr txBox="1"/>
+          <p:nvPr/>
+        </p:nvSpPr>
+        <p:spPr>
+          <a:xfrm>
+            <a:off x="6035040" y="1874520"/>
+            <a:ext cx="2834640" cy="237744"/>
+          </a:xfrm>
+          <a:prstGeom prst="rect">
+            <a:avLst/>
+          </a:prstGeom>
+          <a:noFill/>
+        </p:spPr>
+        <p:txBody>
+          <a:bodyPr wrap="square">
+            <a:spAutoFit/>
+          </a:bodyPr>
+          <a:lstStyle/>
+          <a:p>
+            <a:pPr algn="ctr"/>
+            <a:r>
+              <a:rPr sz="850" b="1" i="0">
+                <a:solidFill>
+                  <a:srgbClr val="FFFFFF"/>
+                </a:solidFill>
+              </a:rPr>
+              <a:t>CONFIRMADA</a:t>
+            </a:r>
+          </a:p>
+        </p:txBody>
+      </p:sp>
+      <p:sp>
+        <p:nvSpPr>
+          <p:cNvPr id="18" name="TextBox 17"/>
+          <p:cNvSpPr txBox="1"/>
+          <p:nvPr/>
+        </p:nvSpPr>
+        <p:spPr>
+          <a:xfrm>
+            <a:off x="914400" y="2167128"/>
+            <a:ext cx="8001000" cy="594360"/>
+          </a:xfrm>
+          <a:prstGeom prst="rect">
+            <a:avLst/>
+          </a:prstGeom>
+          <a:noFill/>
+        </p:spPr>
+        <p:txBody>
+          <a:bodyPr wrap="square">
+            <a:spAutoFit/>
+          </a:bodyPr>
+          <a:lstStyle/>
+          <a:p>
+            <a:pPr algn="l"/>
+            <a:r>
+              <a:rPr sz="950" b="0" i="0">
+                <a:solidFill>
+                  <a:srgbClr val="212121"/>
+                </a:solidFill>
+              </a:rPr>
+              <a:t>Campeche (906k ha), Chiapas (783k), Quintana Roo (599k) y Veracruz (496k) acumulan el 59% de la pérdida nacional. Los grafos de correlación confirman el "corredor del Golfo" como zona crítica.</a:t>
+            </a:r>
+          </a:p>
+        </p:txBody>
+      </p:sp>
+      <p:sp>
+        <p:nvSpPr>
+          <p:cNvPr id="19" name="Rectangle 18"/>
+          <p:cNvSpPr/>
+          <p:nvPr/>
+        </p:nvSpPr>
+        <p:spPr>
+          <a:xfrm>
+            <a:off x="137160" y="2889504"/>
+            <a:ext cx="640080" cy="978408"/>
+          </a:xfrm>
+          <a:prstGeom prst="rect">
+            <a:avLst/>
+          </a:prstGeom>
+          <a:solidFill>
+            <a:srgbClr val="1565C0"/>
+          </a:solidFill>
+          <a:ln>
+            <a:noFill/>
+          </a:ln>
+        </p:spPr>
+        <p:style>
+          <a:lnRef idx="1">
+            <a:schemeClr val="accent1"/>
+          </a:lnRef>
+          <a:fillRef idx="3">
+            <a:schemeClr val="accent1"/>
+          </a:fillRef>
+          <a:effectRef idx="2">
+            <a:schemeClr val="accent1"/>
+          </a:effectRef>
+          <a:fontRef idx="minor">
+            <a:schemeClr val="lt1"/>
+          </a:fontRef>
+        </p:style>
+        <p:txBody>
+          <a:bodyPr rtlCol="0" anchor="ctr"/>
+          <a:lstStyle/>
+          <a:p>
+            <a:pPr algn="ctr"/>
+          </a:p>
+        </p:txBody>
+      </p:sp>
+      <p:sp>
+        <p:nvSpPr>
+          <p:cNvPr id="20" name="TextBox 19"/>
+          <p:cNvSpPr txBox="1"/>
+          <p:nvPr/>
+        </p:nvSpPr>
+        <p:spPr>
+          <a:xfrm>
+            <a:off x="137160" y="3163824"/>
+            <a:ext cx="640080" cy="457200"/>
+          </a:xfrm>
+          <a:prstGeom prst="rect">
+            <a:avLst/>
+          </a:prstGeom>
+          <a:noFill/>
+        </p:spPr>
+        <p:txBody>
+          <a:bodyPr wrap="square">
+            <a:spAutoFit/>
+          </a:bodyPr>
+          <a:lstStyle/>
+          <a:p>
+            <a:pPr algn="ctr"/>
+            <a:r>
+              <a:rPr sz="1800" b="1" i="0">
+                <a:solidFill>
+                  <a:srgbClr val="FFFFFF"/>
+                </a:solidFill>
+              </a:rPr>
+              <a:t>H₃</a:t>
+            </a:r>
+          </a:p>
+        </p:txBody>
+      </p:sp>
+      <p:sp>
+        <p:nvSpPr>
+          <p:cNvPr id="21" name="Rectangle 20"/>
+          <p:cNvSpPr/>
+          <p:nvPr/>
+        </p:nvSpPr>
+        <p:spPr>
+          <a:xfrm>
+            <a:off x="822960" y="2889504"/>
+            <a:ext cx="8229600" cy="978408"/>
+          </a:xfrm>
+          <a:prstGeom prst="rect">
+            <a:avLst/>
+          </a:prstGeom>
+          <a:solidFill>
+            <a:srgbClr val="EEEEEE"/>
+          </a:solidFill>
+          <a:ln>
+            <a:noFill/>
+          </a:ln>
+        </p:spPr>
+        <p:style>
+          <a:lnRef idx="1">
+            <a:schemeClr val="accent1"/>
+          </a:lnRef>
+          <a:fillRef idx="3">
+            <a:schemeClr val="accent1"/>
+          </a:fillRef>
+          <a:effectRef idx="2">
+            <a:schemeClr val="accent1"/>
+          </a:effectRef>
+          <a:fontRef idx="minor">
+            <a:schemeClr val="lt1"/>
+          </a:fontRef>
+        </p:style>
+        <p:txBody>
+          <a:bodyPr rtlCol="0" anchor="ctr"/>
+          <a:lstStyle/>
+          <a:p>
+            <a:pPr algn="ctr"/>
+          </a:p>
+        </p:txBody>
+      </p:sp>
+      <p:sp>
+        <p:nvSpPr>
+          <p:cNvPr id="22" name="TextBox 21"/>
+          <p:cNvSpPr txBox="1"/>
+          <p:nvPr/>
+        </p:nvSpPr>
+        <p:spPr>
+          <a:xfrm>
+            <a:off x="914400" y="2926080"/>
+            <a:ext cx="5029200" cy="292608"/>
+          </a:xfrm>
+          <a:prstGeom prst="rect">
+            <a:avLst/>
+          </a:prstGeom>
+          <a:noFill/>
+        </p:spPr>
+        <p:txBody>
+          <a:bodyPr wrap="square">
+            <a:spAutoFit/>
+          </a:bodyPr>
+          <a:lstStyle/>
+          <a:p>
+            <a:pPr algn="l"/>
+            <a:r>
+              <a:rPr sz="1000" b="1" i="0">
+                <a:solidFill>
+                  <a:srgbClr val="546E7A"/>
+                </a:solidFill>
+              </a:rPr>
+              <a:t>¿Existe tendencia creciente vinculada al cambio de uso?</a:t>
+            </a:r>
+          </a:p>
+        </p:txBody>
+      </p:sp>
+      <p:sp>
+        <p:nvSpPr>
+          <p:cNvPr id="23" name="Rectangle 22"/>
+          <p:cNvSpPr/>
+          <p:nvPr/>
+        </p:nvSpPr>
+        <p:spPr>
+          <a:xfrm>
+            <a:off x="5989320" y="2926080"/>
+            <a:ext cx="2926080" cy="274320"/>
+          </a:xfrm>
+          <a:prstGeom prst="rect">
+            <a:avLst/>
+          </a:prstGeom>
+          <a:solidFill>
+            <a:srgbClr val="1565C0"/>
+          </a:solidFill>
+          <a:ln>
+            <a:noFill/>
+          </a:ln>
+        </p:spPr>
+        <p:style>
+          <a:lnRef idx="1">
+            <a:schemeClr val="accent1"/>
+          </a:lnRef>
+          <a:fillRef idx="3">
+            <a:schemeClr val="accent1"/>
+          </a:fillRef>
+          <a:effectRef idx="2">
+            <a:schemeClr val="accent1"/>
+          </a:effectRef>
+          <a:fontRef idx="minor">
+            <a:schemeClr val="lt1"/>
+          </a:fontRef>
+        </p:style>
+        <p:txBody>
+          <a:bodyPr rtlCol="0" anchor="ctr"/>
+          <a:lstStyle/>
+          <a:p>
+            <a:pPr algn="ctr"/>
+          </a:p>
+        </p:txBody>
+      </p:sp>
+      <p:sp>
+        <p:nvSpPr>
+          <p:cNvPr id="24" name="TextBox 23"/>
+          <p:cNvSpPr txBox="1"/>
+          <p:nvPr/>
+        </p:nvSpPr>
+        <p:spPr>
+          <a:xfrm>
+            <a:off x="6035040" y="2944368"/>
+            <a:ext cx="2834640" cy="237744"/>
+          </a:xfrm>
+          <a:prstGeom prst="rect">
+            <a:avLst/>
+          </a:prstGeom>
+          <a:noFill/>
+        </p:spPr>
+        <p:txBody>
+          <a:bodyPr wrap="square">
+            <a:spAutoFit/>
+          </a:bodyPr>
+          <a:lstStyle/>
+          <a:p>
+            <a:pPr algn="ctr"/>
+            <a:r>
+              <a:rPr sz="850" b="1" i="0">
+                <a:solidFill>
+                  <a:srgbClr val="FFFFFF"/>
+                </a:solidFill>
+              </a:rPr>
+              <a:t>CONFIRMADA CON MATIZ</a:t>
+            </a:r>
+          </a:p>
+        </p:txBody>
+      </p:sp>
+      <p:sp>
+        <p:nvSpPr>
+          <p:cNvPr id="25" name="TextBox 24"/>
+          <p:cNvSpPr txBox="1"/>
+          <p:nvPr/>
+        </p:nvSpPr>
+        <p:spPr>
+          <a:xfrm>
+            <a:off x="914400" y="3236976"/>
+            <a:ext cx="8001000" cy="594360"/>
+          </a:xfrm>
+          <a:prstGeom prst="rect">
+            <a:avLst/>
+          </a:prstGeom>
+          <a:noFill/>
+        </p:spPr>
+        <p:txBody>
+          <a:bodyPr wrap="square">
+            <a:spAutoFit/>
+          </a:bodyPr>
+          <a:lstStyle/>
+          <a:p>
+            <a:pPr algn="l"/>
+            <a:r>
+              <a:rPr sz="950" b="0" i="0">
+                <a:solidFill>
+                  <a:srgbClr val="212121"/>
+                </a:solidFill>
+              </a:rPr>
+              <a:t>La tendencia general sube 2001-2019 (pico 327k ha). El año 2019 (cambio de gobierno + cancelación de PRONAFOR) es un outlier Z=+2.5. Post-2019 hay ligera recuperación.</a:t>
+            </a:r>
+          </a:p>
+        </p:txBody>
+      </p:sp>
+      <p:sp>
+        <p:nvSpPr>
+          <p:cNvPr id="26" name="Rectangle 25"/>
+          <p:cNvSpPr/>
+          <p:nvPr/>
+        </p:nvSpPr>
+        <p:spPr>
+          <a:xfrm>
+            <a:off x="137160" y="3959352"/>
+            <a:ext cx="640080" cy="978408"/>
+          </a:xfrm>
+          <a:prstGeom prst="rect">
+            <a:avLst/>
+          </a:prstGeom>
+          <a:solidFill>
+            <a:srgbClr val="795548"/>
+          </a:solidFill>
+          <a:ln>
+            <a:noFill/>
+          </a:ln>
+        </p:spPr>
+        <p:style>
+          <a:lnRef idx="1">
+            <a:schemeClr val="accent1"/>
+          </a:lnRef>
+          <a:fillRef idx="3">
+            <a:schemeClr val="accent1"/>
+          </a:fillRef>
+          <a:effectRef idx="2">
+            <a:schemeClr val="accent1"/>
+          </a:effectRef>
+          <a:fontRef idx="minor">
+            <a:schemeClr val="lt1"/>
+          </a:fontRef>
+        </p:style>
+        <p:txBody>
+          <a:bodyPr rtlCol="0" anchor="ctr"/>
+          <a:lstStyle/>
+          <a:p>
+            <a:pPr algn="ctr"/>
+          </a:p>
+        </p:txBody>
+      </p:sp>
+      <p:sp>
+        <p:nvSpPr>
+          <p:cNvPr id="27" name="TextBox 26"/>
+          <p:cNvSpPr txBox="1"/>
+          <p:nvPr/>
+        </p:nvSpPr>
+        <p:spPr>
+          <a:xfrm>
+            <a:off x="137160" y="4233672"/>
+            <a:ext cx="640080" cy="457200"/>
+          </a:xfrm>
+          <a:prstGeom prst="rect">
+            <a:avLst/>
+          </a:prstGeom>
+          <a:noFill/>
+        </p:spPr>
+        <p:txBody>
+          <a:bodyPr wrap="square">
+            <a:spAutoFit/>
+          </a:bodyPr>
+          <a:lstStyle/>
+          <a:p>
+            <a:pPr algn="ctr"/>
+            <a:r>
+              <a:rPr sz="1800" b="1" i="0">
+                <a:solidFill>
+                  <a:srgbClr val="FFFFFF"/>
+                </a:solidFill>
+              </a:rPr>
+              <a:t>H₄</a:t>
+            </a:r>
+          </a:p>
+        </p:txBody>
+      </p:sp>
+      <p:sp>
+        <p:nvSpPr>
+          <p:cNvPr id="28" name="Rectangle 27"/>
+          <p:cNvSpPr/>
+          <p:nvPr/>
+        </p:nvSpPr>
+        <p:spPr>
+          <a:xfrm>
+            <a:off x="822960" y="3959352"/>
+            <a:ext cx="8229600" cy="978408"/>
+          </a:xfrm>
+          <a:prstGeom prst="rect">
+            <a:avLst/>
+          </a:prstGeom>
+          <a:solidFill>
+            <a:srgbClr val="EEEEEE"/>
+          </a:solidFill>
+          <a:ln>
+            <a:noFill/>
+          </a:ln>
+        </p:spPr>
+        <p:style>
+          <a:lnRef idx="1">
+            <a:schemeClr val="accent1"/>
+          </a:lnRef>
+          <a:fillRef idx="3">
+            <a:schemeClr val="accent1"/>
+          </a:fillRef>
+          <a:effectRef idx="2">
+            <a:schemeClr val="accent1"/>
+          </a:effectRef>
+          <a:fontRef idx="minor">
+            <a:schemeClr val="lt1"/>
+          </a:fontRef>
+        </p:style>
+        <p:txBody>
+          <a:bodyPr rtlCol="0" anchor="ctr"/>
+          <a:lstStyle/>
+          <a:p>
+            <a:pPr algn="ctr"/>
+          </a:p>
+        </p:txBody>
+      </p:sp>
+      <p:sp>
+        <p:nvSpPr>
+          <p:cNvPr id="29" name="TextBox 28"/>
+          <p:cNvSpPr txBox="1"/>
+          <p:nvPr/>
+        </p:nvSpPr>
+        <p:spPr>
+          <a:xfrm>
+            <a:off x="914400" y="3995928"/>
+            <a:ext cx="5029200" cy="292608"/>
+          </a:xfrm>
+          <a:prstGeom prst="rect">
+            <a:avLst/>
+          </a:prstGeom>
+          <a:noFill/>
+        </p:spPr>
+        <p:txBody>
+          <a:bodyPr wrap="square">
+            <a:spAutoFit/>
+          </a:bodyPr>
+          <a:lstStyle/>
+          <a:p>
+            <a:pPr algn="l"/>
+            <a:r>
+              <a:rPr sz="1000" b="1" i="0">
+                <a:solidFill>
+                  <a:srgbClr val="546E7A"/>
+                </a:solidFill>
+              </a:rPr>
+              <a:t>¿La ganadería bovina es un driver de deforestación?</a:t>
+            </a:r>
+          </a:p>
+        </p:txBody>
+      </p:sp>
+      <p:sp>
+        <p:nvSpPr>
+          <p:cNvPr id="30" name="Rectangle 29"/>
+          <p:cNvSpPr/>
+          <p:nvPr/>
+        </p:nvSpPr>
+        <p:spPr>
+          <a:xfrm>
+            <a:off x="5989320" y="3995928"/>
+            <a:ext cx="2926080" cy="274320"/>
+          </a:xfrm>
+          <a:prstGeom prst="rect">
+            <a:avLst/>
+          </a:prstGeom>
+          <a:solidFill>
+            <a:srgbClr val="795548"/>
+          </a:solidFill>
+          <a:ln>
+            <a:noFill/>
+          </a:ln>
+        </p:spPr>
+        <p:style>
+          <a:lnRef idx="1">
+            <a:schemeClr val="accent1"/>
+          </a:lnRef>
+          <a:fillRef idx="3">
+            <a:schemeClr val="accent1"/>
+          </a:fillRef>
+          <a:effectRef idx="2">
+            <a:schemeClr val="accent1"/>
+          </a:effectRef>
+          <a:fontRef idx="minor">
+            <a:schemeClr val="lt1"/>
+          </a:fontRef>
+        </p:style>
+        <p:txBody>
+          <a:bodyPr rtlCol="0" anchor="ctr"/>
+          <a:lstStyle/>
+          <a:p>
+            <a:pPr algn="ctr"/>
+          </a:p>
+        </p:txBody>
+      </p:sp>
+      <p:sp>
+        <p:nvSpPr>
+          <p:cNvPr id="31" name="TextBox 30"/>
+          <p:cNvSpPr txBox="1"/>
+          <p:nvPr/>
+        </p:nvSpPr>
+        <p:spPr>
+          <a:xfrm>
+            <a:off x="6035040" y="4014216"/>
+            <a:ext cx="2834640" cy="237744"/>
+          </a:xfrm>
+          <a:prstGeom prst="rect">
+            <a:avLst/>
+          </a:prstGeom>
+          <a:noFill/>
+        </p:spPr>
+        <p:txBody>
+          <a:bodyPr wrap="square">
+            <a:spAutoFit/>
+          </a:bodyPr>
+          <a:lstStyle/>
+          <a:p>
+            <a:pPr algn="ctr"/>
+            <a:r>
+              <a:rPr sz="850" b="1" i="0">
+                <a:solidFill>
+                  <a:srgbClr val="FFFFFF"/>
+                </a:solidFill>
+              </a:rPr>
+              <a:t>SOPORTADA, NO CONCLUYENTE</a:t>
+            </a:r>
+          </a:p>
+        </p:txBody>
+      </p:sp>
+      <p:sp>
+        <p:nvSpPr>
+          <p:cNvPr id="32" name="TextBox 31"/>
+          <p:cNvSpPr txBox="1"/>
+          <p:nvPr/>
+        </p:nvSpPr>
+        <p:spPr>
+          <a:xfrm>
+            <a:off x="914400" y="4306824"/>
+            <a:ext cx="8001000" cy="594360"/>
+          </a:xfrm>
+          <a:prstGeom prst="rect">
+            <a:avLst/>
+          </a:prstGeom>
+          <a:noFill/>
+        </p:spPr>
+        <p:txBody>
+          <a:bodyPr wrap="square">
+            <a:spAutoFit/>
+          </a:bodyPr>
+          <a:lstStyle/>
+          <a:p>
+            <a:pPr algn="l"/>
+            <a:r>
+              <a:rPr sz="950" b="0" i="0">
+                <a:solidFill>
+                  <a:srgbClr val="212121"/>
+                </a:solidFill>
+              </a:rPr>
+              <a:t>La prueba A/B muestra mayor pérdida en estados ganaderos. Pastizales = categoría destino del bosque más frecuente. El gobierno omitió datos ganaderos de 2023. Correlación directa requiere datos municipales más granulares.</a:t>
+            </a:r>
+          </a:p>
+        </p:txBody>
+      </p:sp>
+      <p:sp>
+        <p:nvSpPr>
+          <p:cNvPr id="33" name="Rectangle 32"/>
+          <p:cNvSpPr/>
+          <p:nvPr/>
+        </p:nvSpPr>
+        <p:spPr>
+          <a:xfrm>
+            <a:off x="0" y="4887468"/>
+            <a:ext cx="9144000" cy="256032"/>
+          </a:xfrm>
+          <a:prstGeom prst="rect">
+            <a:avLst/>
+          </a:prstGeom>
+          <a:solidFill>
+            <a:srgbClr val="2E7D32"/>
+          </a:solidFill>
+          <a:ln>
+            <a:noFill/>
+          </a:ln>
+        </p:spPr>
+        <p:style>
+          <a:lnRef idx="1">
+            <a:schemeClr val="accent1"/>
+          </a:lnRef>
+          <a:fillRef idx="3">
+            <a:schemeClr val="accent1"/>
+          </a:fillRef>
+          <a:effectRef idx="2">
+            <a:schemeClr val="accent1"/>
+          </a:effectRef>
+          <a:fontRef idx="minor">
+            <a:schemeClr val="lt1"/>
+          </a:fontRef>
+        </p:style>
+        <p:txBody>
+          <a:bodyPr rtlCol="0" anchor="ctr"/>
+          <a:lstStyle/>
+          <a:p>
+            <a:pPr algn="ctr"/>
+          </a:p>
+        </p:txBody>
+      </p:sp>
+      <p:sp>
+        <p:nvSpPr>
+          <p:cNvPr id="34" name="TextBox 33"/>
+          <p:cNvSpPr txBox="1"/>
+          <p:nvPr/>
+        </p:nvSpPr>
+        <p:spPr>
+          <a:xfrm>
+            <a:off x="182880" y="4905756"/>
+            <a:ext cx="7315200" cy="219456"/>
+          </a:xfrm>
+          <a:prstGeom prst="rect">
+            <a:avLst/>
+          </a:prstGeom>
+          <a:noFill/>
+        </p:spPr>
+        <p:txBody>
+          <a:bodyPr wrap="square">
+            <a:spAutoFit/>
+          </a:bodyPr>
+          <a:lstStyle/>
+          <a:p>
+            <a:pPr algn="l"/>
+            <a:r>
+              <a:rPr sz="900" b="0" i="0">
+                <a:solidFill>
+                  <a:srgbClr val="FFFFFF"/>
+                </a:solidFill>
+              </a:rPr>
+              <a:t>Deforestación México · Ciencias de Datos · UP</a:t>
+            </a:r>
+          </a:p>
+        </p:txBody>
+      </p:sp>
+      <p:sp>
+        <p:nvSpPr>
+          <p:cNvPr id="35" name="TextBox 34"/>
+          <p:cNvSpPr txBox="1"/>
+          <p:nvPr/>
+        </p:nvSpPr>
+        <p:spPr>
+          <a:xfrm>
+            <a:off x="8595360" y="4905756"/>
+            <a:ext cx="365760" cy="219456"/>
+          </a:xfrm>
+          <a:prstGeom prst="rect">
+            <a:avLst/>
+          </a:prstGeom>
+          <a:noFill/>
+        </p:spPr>
+        <p:txBody>
+          <a:bodyPr wrap="square">
+            <a:spAutoFit/>
+          </a:bodyPr>
+          <a:lstStyle/>
+          <a:p>
+            <a:pPr algn="r"/>
+            <a:r>
+              <a:rPr sz="900" b="0" i="0">
+                <a:solidFill>
+                  <a:srgbClr val="FFFFFF"/>
+                </a:solidFill>
+              </a:rPr>
+              <a:t>19</a:t>
+            </a:r>
+          </a:p>
+        </p:txBody>
+      </p:sp>
+    </p:spTree>
+  </p:cSld>
+  <p:clrMapOvr>
+    <a:masterClrMapping/>
+  </p:clrMapOvr>
+</p:sld>
+</file>
+
 <file path=ppt/slides/slide2.xml><?xml version="1.0" encoding="utf-8"?>
 <p:sld xmlns:a="http://schemas.openxmlformats.org/drawingml/2006/main" xmlns:r="http://schemas.openxmlformats.org/officeDocument/2006/relationships" xmlns:p="http://schemas.openxmlformats.org/presentationml/2006/main">
   <p:cSld name="Slide 2">
@@ -4052,6 +12065,741 @@
               <a:t>La Frontera que Avanza</a:t>
             </a:r>
             <a:endParaRPr lang="en-US" sz="900" dirty="0"/>
+          </a:p>
+        </p:txBody>
+      </p:sp>
+    </p:spTree>
+  </p:cSld>
+  <p:clrMapOvr>
+    <a:masterClrMapping/>
+  </p:clrMapOvr>
+</p:sld>
+</file>
+
+<file path=ppt/slides/slide20.xml><?xml version="1.0" encoding="utf-8"?>
+<p:sld xmlns:a="http://schemas.openxmlformats.org/drawingml/2006/main" xmlns:p="http://schemas.openxmlformats.org/presentationml/2006/main" xmlns:r="http://schemas.openxmlformats.org/officeDocument/2006/relationships">
+  <p:cSld>
+    <p:bg>
+      <p:bgPr>
+        <a:solidFill>
+          <a:srgbClr val="212121"/>
+        </a:solidFill>
+        <a:effectLst/>
+      </p:bgPr>
+    </p:bg>
+    <p:spTree>
+      <p:nvGrpSpPr>
+        <p:cNvPr id="1" name=""/>
+        <p:cNvGrpSpPr/>
+        <p:nvPr/>
+      </p:nvGrpSpPr>
+      <p:grpSpPr/>
+      <p:sp>
+        <p:nvSpPr>
+          <p:cNvPr id="2" name="Rectangle 1"/>
+          <p:cNvSpPr/>
+          <p:nvPr/>
+        </p:nvSpPr>
+        <p:spPr>
+          <a:xfrm>
+            <a:off x="0" y="0"/>
+            <a:ext cx="457200" cy="5143500"/>
+          </a:xfrm>
+          <a:prstGeom prst="rect">
+            <a:avLst/>
+          </a:prstGeom>
+          <a:solidFill>
+            <a:srgbClr val="2E7D32"/>
+          </a:solidFill>
+          <a:ln>
+            <a:noFill/>
+          </a:ln>
+        </p:spPr>
+        <p:style>
+          <a:lnRef idx="1">
+            <a:schemeClr val="accent1"/>
+          </a:lnRef>
+          <a:fillRef idx="3">
+            <a:schemeClr val="accent1"/>
+          </a:fillRef>
+          <a:effectRef idx="2">
+            <a:schemeClr val="accent1"/>
+          </a:effectRef>
+          <a:fontRef idx="minor">
+            <a:schemeClr val="lt1"/>
+          </a:fontRef>
+        </p:style>
+        <p:txBody>
+          <a:bodyPr rtlCol="0" anchor="ctr"/>
+          <a:lstStyle/>
+          <a:p>
+            <a:pPr algn="ctr"/>
+          </a:p>
+        </p:txBody>
+      </p:sp>
+      <p:sp>
+        <p:nvSpPr>
+          <p:cNvPr id="3" name="TextBox 2"/>
+          <p:cNvSpPr txBox="1"/>
+          <p:nvPr/>
+        </p:nvSpPr>
+        <p:spPr>
+          <a:xfrm>
+            <a:off x="640080" y="182880"/>
+            <a:ext cx="7772400" cy="457200"/>
+          </a:xfrm>
+          <a:prstGeom prst="rect">
+            <a:avLst/>
+          </a:prstGeom>
+          <a:noFill/>
+        </p:spPr>
+        <p:txBody>
+          <a:bodyPr wrap="square">
+            <a:spAutoFit/>
+          </a:bodyPr>
+          <a:lstStyle/>
+          <a:p>
+            <a:pPr algn="l"/>
+            <a:r>
+              <a:rPr sz="2600" b="1" i="0">
+                <a:solidFill>
+                  <a:srgbClr val="FFFFFF"/>
+                </a:solidFill>
+              </a:rPr>
+              <a:t>CONCLUSIONES</a:t>
+            </a:r>
+          </a:p>
+        </p:txBody>
+      </p:sp>
+      <p:sp>
+        <p:nvSpPr>
+          <p:cNvPr id="4" name="Rectangle 3"/>
+          <p:cNvSpPr/>
+          <p:nvPr/>
+        </p:nvSpPr>
+        <p:spPr>
+          <a:xfrm>
+            <a:off x="594360" y="777240"/>
+            <a:ext cx="73152" cy="685800"/>
+          </a:xfrm>
+          <a:prstGeom prst="rect">
+            <a:avLst/>
+          </a:prstGeom>
+          <a:solidFill>
+            <a:srgbClr val="B71C1C"/>
+          </a:solidFill>
+          <a:ln>
+            <a:noFill/>
+          </a:ln>
+        </p:spPr>
+        <p:style>
+          <a:lnRef idx="1">
+            <a:schemeClr val="accent1"/>
+          </a:lnRef>
+          <a:fillRef idx="3">
+            <a:schemeClr val="accent1"/>
+          </a:fillRef>
+          <a:effectRef idx="2">
+            <a:schemeClr val="accent1"/>
+          </a:effectRef>
+          <a:fontRef idx="minor">
+            <a:schemeClr val="lt1"/>
+          </a:fontRef>
+        </p:style>
+        <p:txBody>
+          <a:bodyPr rtlCol="0" anchor="ctr"/>
+          <a:lstStyle/>
+          <a:p>
+            <a:pPr algn="ctr"/>
+          </a:p>
+        </p:txBody>
+      </p:sp>
+      <p:sp>
+        <p:nvSpPr>
+          <p:cNvPr id="5" name="TextBox 4"/>
+          <p:cNvSpPr txBox="1"/>
+          <p:nvPr/>
+        </p:nvSpPr>
+        <p:spPr>
+          <a:xfrm>
+            <a:off x="777240" y="804672"/>
+            <a:ext cx="2926080" cy="292608"/>
+          </a:xfrm>
+          <a:prstGeom prst="rect">
+            <a:avLst/>
+          </a:prstGeom>
+          <a:noFill/>
+        </p:spPr>
+        <p:txBody>
+          <a:bodyPr wrap="square">
+            <a:spAutoFit/>
+          </a:bodyPr>
+          <a:lstStyle/>
+          <a:p>
+            <a:pPr algn="l"/>
+            <a:r>
+              <a:rPr sz="1100" b="1" i="0">
+                <a:solidFill>
+                  <a:srgbClr val="B71C1C"/>
+                </a:solidFill>
+              </a:rPr>
+              <a:t>4.88 millones de ha</a:t>
+            </a:r>
+          </a:p>
+        </p:txBody>
+      </p:sp>
+      <p:sp>
+        <p:nvSpPr>
+          <p:cNvPr id="6" name="TextBox 5"/>
+          <p:cNvSpPr txBox="1"/>
+          <p:nvPr/>
+        </p:nvSpPr>
+        <p:spPr>
+          <a:xfrm>
+            <a:off x="777240" y="1124712"/>
+            <a:ext cx="8092440" cy="457200"/>
+          </a:xfrm>
+          <a:prstGeom prst="rect">
+            <a:avLst/>
+          </a:prstGeom>
+          <a:noFill/>
+        </p:spPr>
+        <p:txBody>
+          <a:bodyPr wrap="square">
+            <a:spAutoFit/>
+          </a:bodyPr>
+          <a:lstStyle/>
+          <a:p>
+            <a:pPr algn="l"/>
+            <a:r>
+              <a:rPr sz="1000" b="0" i="0">
+                <a:solidFill>
+                  <a:srgbClr val="CCCCCC"/>
+                </a:solidFill>
+              </a:rPr>
+              <a:t>perdidas en México entre 2001 y 2023 — equivalente a ~112 veces la CDMX</a:t>
+            </a:r>
+          </a:p>
+        </p:txBody>
+      </p:sp>
+      <p:sp>
+        <p:nvSpPr>
+          <p:cNvPr id="7" name="Rectangle 6"/>
+          <p:cNvSpPr/>
+          <p:nvPr/>
+        </p:nvSpPr>
+        <p:spPr>
+          <a:xfrm>
+            <a:off x="594360" y="1627632"/>
+            <a:ext cx="73152" cy="685800"/>
+          </a:xfrm>
+          <a:prstGeom prst="rect">
+            <a:avLst/>
+          </a:prstGeom>
+          <a:solidFill>
+            <a:srgbClr val="E65100"/>
+          </a:solidFill>
+          <a:ln>
+            <a:noFill/>
+          </a:ln>
+        </p:spPr>
+        <p:style>
+          <a:lnRef idx="1">
+            <a:schemeClr val="accent1"/>
+          </a:lnRef>
+          <a:fillRef idx="3">
+            <a:schemeClr val="accent1"/>
+          </a:fillRef>
+          <a:effectRef idx="2">
+            <a:schemeClr val="accent1"/>
+          </a:effectRef>
+          <a:fontRef idx="minor">
+            <a:schemeClr val="lt1"/>
+          </a:fontRef>
+        </p:style>
+        <p:txBody>
+          <a:bodyPr rtlCol="0" anchor="ctr"/>
+          <a:lstStyle/>
+          <a:p>
+            <a:pPr algn="ctr"/>
+          </a:p>
+        </p:txBody>
+      </p:sp>
+      <p:sp>
+        <p:nvSpPr>
+          <p:cNvPr id="8" name="TextBox 7"/>
+          <p:cNvSpPr txBox="1"/>
+          <p:nvPr/>
+        </p:nvSpPr>
+        <p:spPr>
+          <a:xfrm>
+            <a:off x="777240" y="1655064"/>
+            <a:ext cx="2926080" cy="292608"/>
+          </a:xfrm>
+          <a:prstGeom prst="rect">
+            <a:avLst/>
+          </a:prstGeom>
+          <a:noFill/>
+        </p:spPr>
+        <p:txBody>
+          <a:bodyPr wrap="square">
+            <a:spAutoFit/>
+          </a:bodyPr>
+          <a:lstStyle/>
+          <a:p>
+            <a:pPr algn="l"/>
+            <a:r>
+              <a:rPr sz="1100" b="1" i="0">
+                <a:solidFill>
+                  <a:srgbClr val="E65100"/>
+                </a:solidFill>
+              </a:rPr>
+              <a:t>2019: el año sin explicación</a:t>
+            </a:r>
+          </a:p>
+        </p:txBody>
+      </p:sp>
+      <p:sp>
+        <p:nvSpPr>
+          <p:cNvPr id="9" name="TextBox 8"/>
+          <p:cNvSpPr txBox="1"/>
+          <p:nvPr/>
+        </p:nvSpPr>
+        <p:spPr>
+          <a:xfrm>
+            <a:off x="777240" y="1975104"/>
+            <a:ext cx="8092440" cy="457200"/>
+          </a:xfrm>
+          <a:prstGeom prst="rect">
+            <a:avLst/>
+          </a:prstGeom>
+          <a:noFill/>
+        </p:spPr>
+        <p:txBody>
+          <a:bodyPr wrap="square">
+            <a:spAutoFit/>
+          </a:bodyPr>
+          <a:lstStyle/>
+          <a:p>
+            <a:pPr algn="l"/>
+            <a:r>
+              <a:rPr sz="1000" b="0" i="0">
+                <a:solidFill>
+                  <a:srgbClr val="CCCCCC"/>
+                </a:solidFill>
+              </a:rPr>
+              <a:t>Pico de 327k ha coincide con cambio de gobierno y cancelación de PRONAFOR. El outlier más significativo de la serie.</a:t>
+            </a:r>
+          </a:p>
+        </p:txBody>
+      </p:sp>
+      <p:sp>
+        <p:nvSpPr>
+          <p:cNvPr id="10" name="Rectangle 9"/>
+          <p:cNvSpPr/>
+          <p:nvPr/>
+        </p:nvSpPr>
+        <p:spPr>
+          <a:xfrm>
+            <a:off x="594360" y="2478024"/>
+            <a:ext cx="73152" cy="685800"/>
+          </a:xfrm>
+          <a:prstGeom prst="rect">
+            <a:avLst/>
+          </a:prstGeom>
+          <a:solidFill>
+            <a:srgbClr val="795548"/>
+          </a:solidFill>
+          <a:ln>
+            <a:noFill/>
+          </a:ln>
+        </p:spPr>
+        <p:style>
+          <a:lnRef idx="1">
+            <a:schemeClr val="accent1"/>
+          </a:lnRef>
+          <a:fillRef idx="3">
+            <a:schemeClr val="accent1"/>
+          </a:fillRef>
+          <a:effectRef idx="2">
+            <a:schemeClr val="accent1"/>
+          </a:effectRef>
+          <a:fontRef idx="minor">
+            <a:schemeClr val="lt1"/>
+          </a:fontRef>
+        </p:style>
+        <p:txBody>
+          <a:bodyPr rtlCol="0" anchor="ctr"/>
+          <a:lstStyle/>
+          <a:p>
+            <a:pPr algn="ctr"/>
+          </a:p>
+        </p:txBody>
+      </p:sp>
+      <p:sp>
+        <p:nvSpPr>
+          <p:cNvPr id="11" name="TextBox 10"/>
+          <p:cNvSpPr txBox="1"/>
+          <p:nvPr/>
+        </p:nvSpPr>
+        <p:spPr>
+          <a:xfrm>
+            <a:off x="777240" y="2505456"/>
+            <a:ext cx="2926080" cy="292608"/>
+          </a:xfrm>
+          <a:prstGeom prst="rect">
+            <a:avLst/>
+          </a:prstGeom>
+          <a:noFill/>
+        </p:spPr>
+        <p:txBody>
+          <a:bodyPr wrap="square">
+            <a:spAutoFit/>
+          </a:bodyPr>
+          <a:lstStyle/>
+          <a:p>
+            <a:pPr algn="l"/>
+            <a:r>
+              <a:rPr sz="1100" b="1" i="0">
+                <a:solidFill>
+                  <a:srgbClr val="795548"/>
+                </a:solidFill>
+              </a:rPr>
+              <a:t>Ganadería bovina como driver encubierto</a:t>
+            </a:r>
+          </a:p>
+        </p:txBody>
+      </p:sp>
+      <p:sp>
+        <p:nvSpPr>
+          <p:cNvPr id="12" name="TextBox 11"/>
+          <p:cNvSpPr txBox="1"/>
+          <p:nvPr/>
+        </p:nvSpPr>
+        <p:spPr>
+          <a:xfrm>
+            <a:off x="777240" y="2825496"/>
+            <a:ext cx="8092440" cy="457200"/>
+          </a:xfrm>
+          <a:prstGeom prst="rect">
+            <a:avLst/>
+          </a:prstGeom>
+          <a:noFill/>
+        </p:spPr>
+        <p:txBody>
+          <a:bodyPr wrap="square">
+            <a:spAutoFit/>
+          </a:bodyPr>
+          <a:lstStyle/>
+          <a:p>
+            <a:pPr algn="l"/>
+            <a:r>
+              <a:rPr sz="1000" b="0" i="0">
+                <a:solidFill>
+                  <a:srgbClr val="CCCCCC"/>
+                </a:solidFill>
+              </a:rPr>
+              <a:t>Los datos de destino del bosque muestran que Pastizales es la categoría predominante. El gobierno omitiogó los datos ganaderos de 2023.</a:t>
+            </a:r>
+          </a:p>
+        </p:txBody>
+      </p:sp>
+      <p:sp>
+        <p:nvSpPr>
+          <p:cNvPr id="13" name="Rectangle 12"/>
+          <p:cNvSpPr/>
+          <p:nvPr/>
+        </p:nvSpPr>
+        <p:spPr>
+          <a:xfrm>
+            <a:off x="594360" y="3328416"/>
+            <a:ext cx="73152" cy="685800"/>
+          </a:xfrm>
+          <a:prstGeom prst="rect">
+            <a:avLst/>
+          </a:prstGeom>
+          <a:solidFill>
+            <a:srgbClr val="2E7D32"/>
+          </a:solidFill>
+          <a:ln>
+            <a:noFill/>
+          </a:ln>
+        </p:spPr>
+        <p:style>
+          <a:lnRef idx="1">
+            <a:schemeClr val="accent1"/>
+          </a:lnRef>
+          <a:fillRef idx="3">
+            <a:schemeClr val="accent1"/>
+          </a:fillRef>
+          <a:effectRef idx="2">
+            <a:schemeClr val="accent1"/>
+          </a:effectRef>
+          <a:fontRef idx="minor">
+            <a:schemeClr val="lt1"/>
+          </a:fontRef>
+        </p:style>
+        <p:txBody>
+          <a:bodyPr rtlCol="0" anchor="ctr"/>
+          <a:lstStyle/>
+          <a:p>
+            <a:pPr algn="ctr"/>
+          </a:p>
+        </p:txBody>
+      </p:sp>
+      <p:sp>
+        <p:nvSpPr>
+          <p:cNvPr id="14" name="TextBox 13"/>
+          <p:cNvSpPr txBox="1"/>
+          <p:nvPr/>
+        </p:nvSpPr>
+        <p:spPr>
+          <a:xfrm>
+            <a:off x="777240" y="3355848"/>
+            <a:ext cx="2926080" cy="292608"/>
+          </a:xfrm>
+          <a:prstGeom prst="rect">
+            <a:avLst/>
+          </a:prstGeom>
+          <a:noFill/>
+        </p:spPr>
+        <p:txBody>
+          <a:bodyPr wrap="square">
+            <a:spAutoFit/>
+          </a:bodyPr>
+          <a:lstStyle/>
+          <a:p>
+            <a:pPr algn="l"/>
+            <a:r>
+              <a:rPr sz="1100" b="1" i="0">
+                <a:solidFill>
+                  <a:srgbClr val="2E7D32"/>
+                </a:solidFill>
+              </a:rPr>
+              <a:t>Subreporte sistemático</a:t>
+            </a:r>
+          </a:p>
+        </p:txBody>
+      </p:sp>
+      <p:sp>
+        <p:nvSpPr>
+          <p:cNvPr id="15" name="TextBox 14"/>
+          <p:cNvSpPr txBox="1"/>
+          <p:nvPr/>
+        </p:nvSpPr>
+        <p:spPr>
+          <a:xfrm>
+            <a:off x="777240" y="3675888"/>
+            <a:ext cx="8092440" cy="457200"/>
+          </a:xfrm>
+          <a:prstGeom prst="rect">
+            <a:avLst/>
+          </a:prstGeom>
+          <a:noFill/>
+        </p:spPr>
+        <p:txBody>
+          <a:bodyPr wrap="square">
+            <a:spAutoFit/>
+          </a:bodyPr>
+          <a:lstStyle/>
+          <a:p>
+            <a:pPr algn="l"/>
+            <a:r>
+              <a:rPr sz="1000" b="0" i="0">
+                <a:solidFill>
+                  <a:srgbClr val="CCCCCC"/>
+                </a:solidFill>
+              </a:rPr>
+              <a:t>El gobierno reconoce entre el 32% y 63% de lo que los satélites detectan. En 2019: 223,000 ha desaparecidas sin reconocimiento oficial.</a:t>
+            </a:r>
+          </a:p>
+        </p:txBody>
+      </p:sp>
+      <p:sp>
+        <p:nvSpPr>
+          <p:cNvPr id="16" name="Rectangle 15"/>
+          <p:cNvSpPr/>
+          <p:nvPr/>
+        </p:nvSpPr>
+        <p:spPr>
+          <a:xfrm>
+            <a:off x="594360" y="4178808"/>
+            <a:ext cx="73152" cy="685800"/>
+          </a:xfrm>
+          <a:prstGeom prst="rect">
+            <a:avLst/>
+          </a:prstGeom>
+          <a:solidFill>
+            <a:srgbClr val="1565C0"/>
+          </a:solidFill>
+          <a:ln>
+            <a:noFill/>
+          </a:ln>
+        </p:spPr>
+        <p:style>
+          <a:lnRef idx="1">
+            <a:schemeClr val="accent1"/>
+          </a:lnRef>
+          <a:fillRef idx="3">
+            <a:schemeClr val="accent1"/>
+          </a:fillRef>
+          <a:effectRef idx="2">
+            <a:schemeClr val="accent1"/>
+          </a:effectRef>
+          <a:fontRef idx="minor">
+            <a:schemeClr val="lt1"/>
+          </a:fontRef>
+        </p:style>
+        <p:txBody>
+          <a:bodyPr rtlCol="0" anchor="ctr"/>
+          <a:lstStyle/>
+          <a:p>
+            <a:pPr algn="ctr"/>
+          </a:p>
+        </p:txBody>
+      </p:sp>
+      <p:sp>
+        <p:nvSpPr>
+          <p:cNvPr id="17" name="TextBox 16"/>
+          <p:cNvSpPr txBox="1"/>
+          <p:nvPr/>
+        </p:nvSpPr>
+        <p:spPr>
+          <a:xfrm>
+            <a:off x="777240" y="4206240"/>
+            <a:ext cx="2926080" cy="292608"/>
+          </a:xfrm>
+          <a:prstGeom prst="rect">
+            <a:avLst/>
+          </a:prstGeom>
+          <a:noFill/>
+        </p:spPr>
+        <p:txBody>
+          <a:bodyPr wrap="square">
+            <a:spAutoFit/>
+          </a:bodyPr>
+          <a:lstStyle/>
+          <a:p>
+            <a:pPr algn="l"/>
+            <a:r>
+              <a:rPr sz="1100" b="1" i="0">
+                <a:solidFill>
+                  <a:srgbClr val="1565C0"/>
+                </a:solidFill>
+              </a:rPr>
+              <a:t>La deforestación no es aleatoria</a:t>
+            </a:r>
+          </a:p>
+        </p:txBody>
+      </p:sp>
+      <p:sp>
+        <p:nvSpPr>
+          <p:cNvPr id="18" name="TextBox 17"/>
+          <p:cNvSpPr txBox="1"/>
+          <p:nvPr/>
+        </p:nvSpPr>
+        <p:spPr>
+          <a:xfrm>
+            <a:off x="777240" y="4526280"/>
+            <a:ext cx="8092440" cy="457200"/>
+          </a:xfrm>
+          <a:prstGeom prst="rect">
+            <a:avLst/>
+          </a:prstGeom>
+          <a:noFill/>
+        </p:spPr>
+        <p:txBody>
+          <a:bodyPr wrap="square">
+            <a:spAutoFit/>
+          </a:bodyPr>
+          <a:lstStyle/>
+          <a:p>
+            <a:pPr algn="l"/>
+            <a:r>
+              <a:rPr sz="1000" b="0" i="0">
+                <a:solidFill>
+                  <a:srgbClr val="CCCCCC"/>
+                </a:solidFill>
+              </a:rPr>
+              <a:t>Los grafos y la reducción dimensional revelan corredores y clusters de deforestación sincronizada en el Golfo de México.</a:t>
+            </a:r>
+          </a:p>
+        </p:txBody>
+      </p:sp>
+      <p:sp>
+        <p:nvSpPr>
+          <p:cNvPr id="19" name="Rectangle 18"/>
+          <p:cNvSpPr/>
+          <p:nvPr/>
+        </p:nvSpPr>
+        <p:spPr>
+          <a:xfrm>
+            <a:off x="594360" y="4777740"/>
+            <a:ext cx="8366760" cy="18288"/>
+          </a:xfrm>
+          <a:prstGeom prst="rect">
+            <a:avLst/>
+          </a:prstGeom>
+          <a:solidFill>
+            <a:srgbClr val="2E7D32"/>
+          </a:solidFill>
+          <a:ln>
+            <a:noFill/>
+          </a:ln>
+        </p:spPr>
+        <p:style>
+          <a:lnRef idx="1">
+            <a:schemeClr val="accent1"/>
+          </a:lnRef>
+          <a:fillRef idx="3">
+            <a:schemeClr val="accent1"/>
+          </a:fillRef>
+          <a:effectRef idx="2">
+            <a:schemeClr val="accent1"/>
+          </a:effectRef>
+          <a:fontRef idx="minor">
+            <a:schemeClr val="lt1"/>
+          </a:fontRef>
+        </p:style>
+        <p:txBody>
+          <a:bodyPr rtlCol="0" anchor="ctr"/>
+          <a:lstStyle/>
+          <a:p>
+            <a:pPr algn="ctr"/>
+          </a:p>
+        </p:txBody>
+      </p:sp>
+      <p:sp>
+        <p:nvSpPr>
+          <p:cNvPr id="20" name="TextBox 19"/>
+          <p:cNvSpPr txBox="1"/>
+          <p:nvPr/>
+        </p:nvSpPr>
+        <p:spPr>
+          <a:xfrm>
+            <a:off x="594360" y="4796028"/>
+            <a:ext cx="8366760" cy="274320"/>
+          </a:xfrm>
+          <a:prstGeom prst="rect">
+            <a:avLst/>
+          </a:prstGeom>
+          <a:noFill/>
+        </p:spPr>
+        <p:txBody>
+          <a:bodyPr wrap="square">
+            <a:spAutoFit/>
+          </a:bodyPr>
+          <a:lstStyle/>
+          <a:p>
+            <a:pPr algn="l"/>
+            <a:r>
+              <a:rPr sz="950" b="0" i="0">
+                <a:solidFill>
+                  <a:srgbClr val="888888"/>
+                </a:solidFill>
+              </a:rPr>
+              <a:t>Repositorio: github.com/YahwthaniMG/Deforestacion_Mexico</a:t>
+            </a:r>
           </a:p>
         </p:txBody>
       </p:sp>
